--- a/slides/Module_01_Chat_vs_Agents_v2.pptx
+++ b/slides/Module_01_Chat_vs_Agents_v2.pptx
@@ -2293,7 +2293,7 @@
         <p:spPr>
           <a:xfrm>
             <a:off x="365760" y="182880"/>
-            <a:ext cx="8412480" cy="457200"/>
+            <a:ext cx="8412480" cy="411480"/>
           </a:xfrm>
           <a:prstGeom prst="rect">
             <a:avLst/>
@@ -2314,7 +2314,7 @@
                   <a:srgbClr val="5B8DB8"/>
                 </a:solidFill>
               </a:rPr>
-              <a:t>KEY TERMS  ·  MODULE 1 REFERENCE</a:t>
+              <a:t>CODING AGENTS ACROSS THE FULL SDLC</a:t>
             </a:r>
             <a:endParaRPr lang="en-US" sz="1300" dirty="0"/>
           </a:p>
@@ -2322,21 +2322,185 @@
       </p:sp>
       <p:sp>
         <p:nvSpPr>
-          <p:cNvPr id="3" name="Shape 1"/>
-          <p:cNvSpPr/>
-          <p:nvPr/>
-        </p:nvSpPr>
-        <p:spPr>
-          <a:xfrm>
-            <a:off x="320040" y="822960"/>
-            <a:ext cx="4206240" cy="868680"/>
+          <p:cNvPr id="3" name="Text 1"/>
+          <p:cNvSpPr/>
+          <p:nvPr/>
+        </p:nvSpPr>
+        <p:spPr>
+          <a:xfrm>
+            <a:off x="365760" y="621792"/>
+            <a:ext cx="8412480" cy="320040"/>
+          </a:xfrm>
+          <a:prstGeom prst="rect">
+            <a:avLst/>
+          </a:prstGeom>
+          <a:noFill/>
+          <a:ln/>
+        </p:spPr>
+        <p:txBody>
+          <a:bodyPr wrap="square" lIns="0" tIns="0" rIns="0" bIns="0" rtlCol="0" anchor="ctr"/>
+          <a:lstStyle/>
+          <a:p>
+            <a:pPr indent="0" marL="0">
+              <a:buNone/>
+            </a:pPr>
+            <a:r>
+              <a:rPr lang="en-US" sz="1400" i="1" dirty="0">
+                <a:solidFill>
+                  <a:srgbClr val="FFFFFF"/>
+                </a:solidFill>
+              </a:rPr>
+              <a:t>Coding agents add value at every phase — not just code generation</a:t>
+            </a:r>
+            <a:endParaRPr lang="en-US" sz="1400" dirty="0"/>
+          </a:p>
+        </p:txBody>
+      </p:sp>
+      <p:sp>
+        <p:nvSpPr>
+          <p:cNvPr id="4" name="Shape 2"/>
+          <p:cNvSpPr/>
+          <p:nvPr/>
+        </p:nvSpPr>
+        <p:spPr>
+          <a:xfrm>
+            <a:off x="320040" y="1024128"/>
+            <a:ext cx="8503920" cy="347472"/>
+          </a:xfrm>
+          <a:prstGeom prst="rect">
+            <a:avLst/>
+          </a:prstGeom>
+          <a:solidFill>
+            <a:srgbClr val="2E5073"/>
+          </a:solidFill>
+          <a:ln/>
+        </p:spPr>
+      </p:sp>
+      <p:sp>
+        <p:nvSpPr>
+          <p:cNvPr id="5" name="Text 3"/>
+          <p:cNvSpPr/>
+          <p:nvPr/>
+        </p:nvSpPr>
+        <p:spPr>
+          <a:xfrm>
+            <a:off x="384048" y="1024128"/>
+            <a:ext cx="2194560" cy="347472"/>
+          </a:xfrm>
+          <a:prstGeom prst="rect">
+            <a:avLst/>
+          </a:prstGeom>
+          <a:noFill/>
+          <a:ln/>
+        </p:spPr>
+        <p:txBody>
+          <a:bodyPr wrap="square" lIns="0" tIns="0" rIns="0" bIns="0" rtlCol="0" anchor="ctr"/>
+          <a:lstStyle/>
+          <a:p>
+            <a:pPr indent="0" marL="0">
+              <a:buNone/>
+            </a:pPr>
+            <a:r>
+              <a:rPr lang="en-US" sz="1000" b="1" spc="100" kern="0" dirty="0">
+                <a:solidFill>
+                  <a:srgbClr val="5B8DB8"/>
+                </a:solidFill>
+              </a:rPr>
+              <a:t>SDLC PHASE</a:t>
+            </a:r>
+            <a:endParaRPr lang="en-US" sz="1000" dirty="0"/>
+          </a:p>
+        </p:txBody>
+      </p:sp>
+      <p:sp>
+        <p:nvSpPr>
+          <p:cNvPr id="6" name="Text 4"/>
+          <p:cNvSpPr/>
+          <p:nvPr/>
+        </p:nvSpPr>
+        <p:spPr>
+          <a:xfrm>
+            <a:off x="2651760" y="1024128"/>
+            <a:ext cx="2560320" cy="347472"/>
+          </a:xfrm>
+          <a:prstGeom prst="rect">
+            <a:avLst/>
+          </a:prstGeom>
+          <a:noFill/>
+          <a:ln/>
+        </p:spPr>
+        <p:txBody>
+          <a:bodyPr wrap="square" lIns="0" tIns="0" rIns="0" bIns="0" rtlCol="0" anchor="ctr"/>
+          <a:lstStyle/>
+          <a:p>
+            <a:pPr indent="0" marL="0">
+              <a:buNone/>
+            </a:pPr>
+            <a:r>
+              <a:rPr lang="en-US" sz="1000" b="1" spc="100" kern="0" dirty="0">
+                <a:solidFill>
+                  <a:srgbClr val="5B8DB8"/>
+                </a:solidFill>
+              </a:rPr>
+              <a:t>CODING AGENT ROLE</a:t>
+            </a:r>
+            <a:endParaRPr lang="en-US" sz="1000" dirty="0"/>
+          </a:p>
+        </p:txBody>
+      </p:sp>
+      <p:sp>
+        <p:nvSpPr>
+          <p:cNvPr id="7" name="Text 5"/>
+          <p:cNvSpPr/>
+          <p:nvPr/>
+        </p:nvSpPr>
+        <p:spPr>
+          <a:xfrm>
+            <a:off x="5285232" y="1024128"/>
+            <a:ext cx="3474720" cy="347472"/>
+          </a:xfrm>
+          <a:prstGeom prst="rect">
+            <a:avLst/>
+          </a:prstGeom>
+          <a:noFill/>
+          <a:ln/>
+        </p:spPr>
+        <p:txBody>
+          <a:bodyPr wrap="square" lIns="0" tIns="0" rIns="0" bIns="0" rtlCol="0" anchor="ctr"/>
+          <a:lstStyle/>
+          <a:p>
+            <a:pPr indent="0" marL="0">
+              <a:buNone/>
+            </a:pPr>
+            <a:r>
+              <a:rPr lang="en-US" sz="1000" b="1" spc="100" kern="0" dirty="0">
+                <a:solidFill>
+                  <a:srgbClr val="5B8DB8"/>
+                </a:solidFill>
+              </a:rPr>
+              <a:t>EXAMPLE</a:t>
+            </a:r>
+            <a:endParaRPr lang="en-US" sz="1000" dirty="0"/>
+          </a:p>
+        </p:txBody>
+      </p:sp>
+      <p:sp>
+        <p:nvSpPr>
+          <p:cNvPr id="8" name="Shape 6"/>
+          <p:cNvSpPr/>
+          <p:nvPr/>
+        </p:nvSpPr>
+        <p:spPr>
+          <a:xfrm>
+            <a:off x="320040" y="1371600"/>
+            <a:ext cx="8503920" cy="429768"/>
           </a:xfrm>
           <a:prstGeom prst="rect">
             <a:avLst/>
           </a:prstGeom>
           <a:solidFill>
             <a:srgbClr val="2E5073">
-              <a:alpha val="85000"/>
+              <a:alpha val="65000"/>
             </a:srgbClr>
           </a:solidFill>
           <a:ln/>
@@ -2344,14 +2508,14 @@
       </p:sp>
       <p:sp>
         <p:nvSpPr>
-          <p:cNvPr id="4" name="Shape 2"/>
-          <p:cNvSpPr/>
-          <p:nvPr/>
-        </p:nvSpPr>
-        <p:spPr>
-          <a:xfrm>
-            <a:off x="320040" y="822960"/>
-            <a:ext cx="54864" cy="868680"/>
+          <p:cNvPr id="9" name="Shape 7"/>
+          <p:cNvSpPr/>
+          <p:nvPr/>
+        </p:nvSpPr>
+        <p:spPr>
+          <a:xfrm>
+            <a:off x="320040" y="1371600"/>
+            <a:ext cx="54864" cy="429768"/>
           </a:xfrm>
           <a:prstGeom prst="rect">
             <a:avLst/>
@@ -2364,93 +2528,279 @@
       </p:sp>
       <p:sp>
         <p:nvSpPr>
-          <p:cNvPr id="5" name="Text 3"/>
-          <p:cNvSpPr/>
-          <p:nvPr/>
-        </p:nvSpPr>
-        <p:spPr>
-          <a:xfrm>
-            <a:off x="466344" y="877824"/>
-            <a:ext cx="3931920" cy="292608"/>
-          </a:xfrm>
-          <a:prstGeom prst="rect">
-            <a:avLst/>
-          </a:prstGeom>
-          <a:noFill/>
-          <a:ln/>
-        </p:spPr>
-        <p:txBody>
-          <a:bodyPr wrap="square" lIns="0" tIns="0" rIns="0" bIns="0" rtlCol="0" anchor="ctr"/>
-          <a:lstStyle/>
-          <a:p>
-            <a:pPr indent="0" marL="0">
-              <a:buNone/>
-            </a:pPr>
-            <a:r>
-              <a:rPr lang="en-US" sz="1300" b="1" dirty="0">
+          <p:cNvPr id="10" name="Text 8"/>
+          <p:cNvSpPr/>
+          <p:nvPr/>
+        </p:nvSpPr>
+        <p:spPr>
+          <a:xfrm>
+            <a:off x="457200" y="1371600"/>
+            <a:ext cx="2121408" cy="429768"/>
+          </a:xfrm>
+          <a:prstGeom prst="rect">
+            <a:avLst/>
+          </a:prstGeom>
+          <a:noFill/>
+          <a:ln/>
+        </p:spPr>
+        <p:txBody>
+          <a:bodyPr wrap="square" lIns="0" tIns="0" rIns="0" bIns="0" rtlCol="0" anchor="ctr"/>
+          <a:lstStyle/>
+          <a:p>
+            <a:pPr indent="0" marL="0">
+              <a:buNone/>
+            </a:pPr>
+            <a:r>
+              <a:rPr lang="en-US" sz="1000" b="1" dirty="0">
                 <a:solidFill>
                   <a:srgbClr val="3A7DC9"/>
                 </a:solidFill>
               </a:rPr>
-              <a:t>Agent</a:t>
-            </a:r>
-            <a:endParaRPr lang="en-US" sz="1300" dirty="0"/>
-          </a:p>
-        </p:txBody>
-      </p:sp>
-      <p:sp>
-        <p:nvSpPr>
-          <p:cNvPr id="6" name="Text 4"/>
-          <p:cNvSpPr/>
-          <p:nvPr/>
-        </p:nvSpPr>
-        <p:spPr>
-          <a:xfrm>
-            <a:off x="466344" y="1207008"/>
-            <a:ext cx="3931920" cy="420624"/>
-          </a:xfrm>
-          <a:prstGeom prst="rect">
-            <a:avLst/>
-          </a:prstGeom>
-          <a:noFill/>
-          <a:ln/>
-        </p:spPr>
-        <p:txBody>
-          <a:bodyPr wrap="square" lIns="0" tIns="0" rIns="0" bIns="0" rtlCol="0" anchor="ctr"/>
-          <a:lstStyle/>
-          <a:p>
-            <a:pPr indent="0" marL="0">
-              <a:buNone/>
-            </a:pPr>
-            <a:r>
-              <a:rPr lang="en-US" sz="1050" dirty="0">
+              <a:t>Ideation &amp; Planning</a:t>
+            </a:r>
+            <a:endParaRPr lang="en-US" sz="1000" dirty="0"/>
+          </a:p>
+        </p:txBody>
+      </p:sp>
+      <p:sp>
+        <p:nvSpPr>
+          <p:cNvPr id="11" name="Text 9"/>
+          <p:cNvSpPr/>
+          <p:nvPr/>
+        </p:nvSpPr>
+        <p:spPr>
+          <a:xfrm>
+            <a:off x="2651760" y="1371600"/>
+            <a:ext cx="2542032" cy="429768"/>
+          </a:xfrm>
+          <a:prstGeom prst="rect">
+            <a:avLst/>
+          </a:prstGeom>
+          <a:noFill/>
+          <a:ln/>
+        </p:spPr>
+        <p:txBody>
+          <a:bodyPr wrap="square" lIns="0" tIns="0" rIns="0" bIns="0" rtlCol="0" anchor="ctr"/>
+          <a:lstStyle/>
+          <a:p>
+            <a:pPr indent="0" marL="0">
+              <a:buNone/>
+            </a:pPr>
+            <a:r>
+              <a:rPr lang="en-US" sz="950" dirty="0">
                 <a:solidFill>
                   <a:srgbClr val="D4E4F0"/>
                 </a:solidFill>
               </a:rPr>
-              <a:t>AI that autonomously plans and executes multi-step tasks using tools and memory</a:t>
-            </a:r>
-            <a:endParaRPr lang="en-US" sz="1050" dirty="0"/>
-          </a:p>
-        </p:txBody>
-      </p:sp>
-      <p:sp>
-        <p:nvSpPr>
-          <p:cNvPr id="7" name="Shape 5"/>
-          <p:cNvSpPr/>
-          <p:nvPr/>
-        </p:nvSpPr>
-        <p:spPr>
-          <a:xfrm>
-            <a:off x="320040" y="1810512"/>
-            <a:ext cx="4206240" cy="868680"/>
+              <a:t>Research options, assess feasibility</a:t>
+            </a:r>
+            <a:endParaRPr lang="en-US" sz="950" dirty="0"/>
+          </a:p>
+        </p:txBody>
+      </p:sp>
+      <p:sp>
+        <p:nvSpPr>
+          <p:cNvPr id="12" name="Text 10"/>
+          <p:cNvSpPr/>
+          <p:nvPr/>
+        </p:nvSpPr>
+        <p:spPr>
+          <a:xfrm>
+            <a:off x="5285232" y="1371600"/>
+            <a:ext cx="3429000" cy="429768"/>
+          </a:xfrm>
+          <a:prstGeom prst="rect">
+            <a:avLst/>
+          </a:prstGeom>
+          <a:noFill/>
+          <a:ln/>
+        </p:spPr>
+        <p:txBody>
+          <a:bodyPr wrap="square" lIns="0" tIns="0" rIns="0" bIns="0" rtlCol="0" anchor="ctr"/>
+          <a:lstStyle/>
+          <a:p>
+            <a:pPr indent="0" marL="0">
+              <a:buNone/>
+            </a:pPr>
+            <a:r>
+              <a:rPr lang="en-US" sz="900" i="1" dirty="0">
+                <a:solidFill>
+                  <a:srgbClr val="7A90A8"/>
+                </a:solidFill>
+              </a:rPr>
+              <a:t>"Which caching approach has least impact on SessionService?"</a:t>
+            </a:r>
+            <a:endParaRPr lang="en-US" sz="900" dirty="0"/>
+          </a:p>
+        </p:txBody>
+      </p:sp>
+      <p:sp>
+        <p:nvSpPr>
+          <p:cNvPr id="13" name="Shape 11"/>
+          <p:cNvSpPr/>
+          <p:nvPr/>
+        </p:nvSpPr>
+        <p:spPr>
+          <a:xfrm>
+            <a:off x="320040" y="1819656"/>
+            <a:ext cx="8503920" cy="429768"/>
+          </a:xfrm>
+          <a:prstGeom prst="rect">
+            <a:avLst/>
+          </a:prstGeom>
+          <a:solidFill>
+            <a:srgbClr val="1E3D5A">
+              <a:alpha val="65000"/>
+            </a:srgbClr>
+          </a:solidFill>
+          <a:ln/>
+        </p:spPr>
+      </p:sp>
+      <p:sp>
+        <p:nvSpPr>
+          <p:cNvPr id="14" name="Shape 12"/>
+          <p:cNvSpPr/>
+          <p:nvPr/>
+        </p:nvSpPr>
+        <p:spPr>
+          <a:xfrm>
+            <a:off x="320040" y="1819656"/>
+            <a:ext cx="54864" cy="429768"/>
+          </a:xfrm>
+          <a:prstGeom prst="rect">
+            <a:avLst/>
+          </a:prstGeom>
+          <a:solidFill>
+            <a:srgbClr val="4A7FA8"/>
+          </a:solidFill>
+          <a:ln/>
+        </p:spPr>
+      </p:sp>
+      <p:sp>
+        <p:nvSpPr>
+          <p:cNvPr id="15" name="Text 13"/>
+          <p:cNvSpPr/>
+          <p:nvPr/>
+        </p:nvSpPr>
+        <p:spPr>
+          <a:xfrm>
+            <a:off x="457200" y="1819656"/>
+            <a:ext cx="2121408" cy="429768"/>
+          </a:xfrm>
+          <a:prstGeom prst="rect">
+            <a:avLst/>
+          </a:prstGeom>
+          <a:noFill/>
+          <a:ln/>
+        </p:spPr>
+        <p:txBody>
+          <a:bodyPr wrap="square" lIns="0" tIns="0" rIns="0" bIns="0" rtlCol="0" anchor="ctr"/>
+          <a:lstStyle/>
+          <a:p>
+            <a:pPr indent="0" marL="0">
+              <a:buNone/>
+            </a:pPr>
+            <a:r>
+              <a:rPr lang="en-US" sz="1000" b="1" dirty="0">
+                <a:solidFill>
+                  <a:srgbClr val="4A7FA8"/>
+                </a:solidFill>
+              </a:rPr>
+              <a:t>PRD &amp; Requirements</a:t>
+            </a:r>
+            <a:endParaRPr lang="en-US" sz="1000" dirty="0"/>
+          </a:p>
+        </p:txBody>
+      </p:sp>
+      <p:sp>
+        <p:nvSpPr>
+          <p:cNvPr id="16" name="Text 14"/>
+          <p:cNvSpPr/>
+          <p:nvPr/>
+        </p:nvSpPr>
+        <p:spPr>
+          <a:xfrm>
+            <a:off x="2651760" y="1819656"/>
+            <a:ext cx="2542032" cy="429768"/>
+          </a:xfrm>
+          <a:prstGeom prst="rect">
+            <a:avLst/>
+          </a:prstGeom>
+          <a:noFill/>
+          <a:ln/>
+        </p:spPr>
+        <p:txBody>
+          <a:bodyPr wrap="square" lIns="0" tIns="0" rIns="0" bIns="0" rtlCol="0" anchor="ctr"/>
+          <a:lstStyle/>
+          <a:p>
+            <a:pPr indent="0" marL="0">
+              <a:buNone/>
+            </a:pPr>
+            <a:r>
+              <a:rPr lang="en-US" sz="950" dirty="0">
+                <a:solidFill>
+                  <a:srgbClr val="D4E4F0"/>
+                </a:solidFill>
+              </a:rPr>
+              <a:t>Draft reqs, flag gaps &amp; conflicts</a:t>
+            </a:r>
+            <a:endParaRPr lang="en-US" sz="950" dirty="0"/>
+          </a:p>
+        </p:txBody>
+      </p:sp>
+      <p:sp>
+        <p:nvSpPr>
+          <p:cNvPr id="17" name="Text 15"/>
+          <p:cNvSpPr/>
+          <p:nvPr/>
+        </p:nvSpPr>
+        <p:spPr>
+          <a:xfrm>
+            <a:off x="5285232" y="1819656"/>
+            <a:ext cx="3429000" cy="429768"/>
+          </a:xfrm>
+          <a:prstGeom prst="rect">
+            <a:avLst/>
+          </a:prstGeom>
+          <a:noFill/>
+          <a:ln/>
+        </p:spPr>
+        <p:txBody>
+          <a:bodyPr wrap="square" lIns="0" tIns="0" rIns="0" bIns="0" rtlCol="0" anchor="ctr"/>
+          <a:lstStyle/>
+          <a:p>
+            <a:pPr indent="0" marL="0">
+              <a:buNone/>
+            </a:pPr>
+            <a:r>
+              <a:rPr lang="en-US" sz="900" i="1" dirty="0">
+                <a:solidFill>
+                  <a:srgbClr val="7A90A8"/>
+                </a:solidFill>
+              </a:rPr>
+              <a:t>"Review this PRD — what edge cases are missing?"</a:t>
+            </a:r>
+            <a:endParaRPr lang="en-US" sz="900" dirty="0"/>
+          </a:p>
+        </p:txBody>
+      </p:sp>
+      <p:sp>
+        <p:nvSpPr>
+          <p:cNvPr id="18" name="Shape 16"/>
+          <p:cNvSpPr/>
+          <p:nvPr/>
+        </p:nvSpPr>
+        <p:spPr>
+          <a:xfrm>
+            <a:off x="320040" y="2267712"/>
+            <a:ext cx="8503920" cy="429768"/>
           </a:xfrm>
           <a:prstGeom prst="rect">
             <a:avLst/>
           </a:prstGeom>
           <a:solidFill>
             <a:srgbClr val="2E5073">
-              <a:alpha val="85000"/>
+              <a:alpha val="65000"/>
             </a:srgbClr>
           </a:solidFill>
           <a:ln/>
@@ -2458,14 +2808,314 @@
       </p:sp>
       <p:sp>
         <p:nvSpPr>
-          <p:cNvPr id="8" name="Shape 6"/>
-          <p:cNvSpPr/>
-          <p:nvPr/>
-        </p:nvSpPr>
-        <p:spPr>
-          <a:xfrm>
-            <a:off x="320040" y="1810512"/>
-            <a:ext cx="54864" cy="868680"/>
+          <p:cNvPr id="19" name="Shape 17"/>
+          <p:cNvSpPr/>
+          <p:nvPr/>
+        </p:nvSpPr>
+        <p:spPr>
+          <a:xfrm>
+            <a:off x="320040" y="2267712"/>
+            <a:ext cx="54864" cy="429768"/>
+          </a:xfrm>
+          <a:prstGeom prst="rect">
+            <a:avLst/>
+          </a:prstGeom>
+          <a:solidFill>
+            <a:srgbClr val="3A7E6E"/>
+          </a:solidFill>
+          <a:ln/>
+        </p:spPr>
+      </p:sp>
+      <p:sp>
+        <p:nvSpPr>
+          <p:cNvPr id="20" name="Text 18"/>
+          <p:cNvSpPr/>
+          <p:nvPr/>
+        </p:nvSpPr>
+        <p:spPr>
+          <a:xfrm>
+            <a:off x="457200" y="2267712"/>
+            <a:ext cx="2121408" cy="429768"/>
+          </a:xfrm>
+          <a:prstGeom prst="rect">
+            <a:avLst/>
+          </a:prstGeom>
+          <a:noFill/>
+          <a:ln/>
+        </p:spPr>
+        <p:txBody>
+          <a:bodyPr wrap="square" lIns="0" tIns="0" rIns="0" bIns="0" rtlCol="0" anchor="ctr"/>
+          <a:lstStyle/>
+          <a:p>
+            <a:pPr indent="0" marL="0">
+              <a:buNone/>
+            </a:pPr>
+            <a:r>
+              <a:rPr lang="en-US" sz="1000" b="1" dirty="0">
+                <a:solidFill>
+                  <a:srgbClr val="3A7E6E"/>
+                </a:solidFill>
+              </a:rPr>
+              <a:t>Design &amp; Architecture</a:t>
+            </a:r>
+            <a:endParaRPr lang="en-US" sz="1000" dirty="0"/>
+          </a:p>
+        </p:txBody>
+      </p:sp>
+      <p:sp>
+        <p:nvSpPr>
+          <p:cNvPr id="21" name="Text 19"/>
+          <p:cNvSpPr/>
+          <p:nvPr/>
+        </p:nvSpPr>
+        <p:spPr>
+          <a:xfrm>
+            <a:off x="2651760" y="2267712"/>
+            <a:ext cx="2542032" cy="429768"/>
+          </a:xfrm>
+          <a:prstGeom prst="rect">
+            <a:avLst/>
+          </a:prstGeom>
+          <a:noFill/>
+          <a:ln/>
+        </p:spPr>
+        <p:txBody>
+          <a:bodyPr wrap="square" lIns="0" tIns="0" rIns="0" bIns="0" rtlCol="0" anchor="ctr"/>
+          <a:lstStyle/>
+          <a:p>
+            <a:pPr indent="0" marL="0">
+              <a:buNone/>
+            </a:pPr>
+            <a:r>
+              <a:rPr lang="en-US" sz="950" dirty="0">
+                <a:solidFill>
+                  <a:srgbClr val="D4E4F0"/>
+                </a:solidFill>
+              </a:rPr>
+              <a:t>Review design against codebase</a:t>
+            </a:r>
+            <a:endParaRPr lang="en-US" sz="950" dirty="0"/>
+          </a:p>
+        </p:txBody>
+      </p:sp>
+      <p:sp>
+        <p:nvSpPr>
+          <p:cNvPr id="22" name="Text 20"/>
+          <p:cNvSpPr/>
+          <p:nvPr/>
+        </p:nvSpPr>
+        <p:spPr>
+          <a:xfrm>
+            <a:off x="5285232" y="2267712"/>
+            <a:ext cx="3429000" cy="429768"/>
+          </a:xfrm>
+          <a:prstGeom prst="rect">
+            <a:avLst/>
+          </a:prstGeom>
+          <a:noFill/>
+          <a:ln/>
+        </p:spPr>
+        <p:txBody>
+          <a:bodyPr wrap="square" lIns="0" tIns="0" rIns="0" bIns="0" rtlCol="0" anchor="ctr"/>
+          <a:lstStyle/>
+          <a:p>
+            <a:pPr indent="0" marL="0">
+              <a:buNone/>
+            </a:pPr>
+            <a:r>
+              <a:rPr lang="en-US" sz="900" i="1" dirty="0">
+                <a:solidFill>
+                  <a:srgbClr val="7A90A8"/>
+                </a:solidFill>
+              </a:rPr>
+              <a:t>"Where does this caching layer break the current data flow?"</a:t>
+            </a:r>
+            <a:endParaRPr lang="en-US" sz="900" dirty="0"/>
+          </a:p>
+        </p:txBody>
+      </p:sp>
+      <p:sp>
+        <p:nvSpPr>
+          <p:cNvPr id="23" name="Shape 21"/>
+          <p:cNvSpPr/>
+          <p:nvPr/>
+        </p:nvSpPr>
+        <p:spPr>
+          <a:xfrm>
+            <a:off x="320040" y="2715768"/>
+            <a:ext cx="8503920" cy="429768"/>
+          </a:xfrm>
+          <a:prstGeom prst="rect">
+            <a:avLst/>
+          </a:prstGeom>
+          <a:solidFill>
+            <a:srgbClr val="1E3D5A">
+              <a:alpha val="65000"/>
+            </a:srgbClr>
+          </a:solidFill>
+          <a:ln/>
+        </p:spPr>
+      </p:sp>
+      <p:sp>
+        <p:nvSpPr>
+          <p:cNvPr id="24" name="Shape 22"/>
+          <p:cNvSpPr/>
+          <p:nvPr/>
+        </p:nvSpPr>
+        <p:spPr>
+          <a:xfrm>
+            <a:off x="320040" y="2715768"/>
+            <a:ext cx="54864" cy="429768"/>
+          </a:xfrm>
+          <a:prstGeom prst="rect">
+            <a:avLst/>
+          </a:prstGeom>
+          <a:solidFill>
+            <a:srgbClr val="5B8DB8"/>
+          </a:solidFill>
+          <a:ln/>
+        </p:spPr>
+      </p:sp>
+      <p:sp>
+        <p:nvSpPr>
+          <p:cNvPr id="25" name="Text 23"/>
+          <p:cNvSpPr/>
+          <p:nvPr/>
+        </p:nvSpPr>
+        <p:spPr>
+          <a:xfrm>
+            <a:off x="457200" y="2715768"/>
+            <a:ext cx="2121408" cy="429768"/>
+          </a:xfrm>
+          <a:prstGeom prst="rect">
+            <a:avLst/>
+          </a:prstGeom>
+          <a:noFill/>
+          <a:ln/>
+        </p:spPr>
+        <p:txBody>
+          <a:bodyPr wrap="square" lIns="0" tIns="0" rIns="0" bIns="0" rtlCol="0" anchor="ctr"/>
+          <a:lstStyle/>
+          <a:p>
+            <a:pPr indent="0" marL="0">
+              <a:buNone/>
+            </a:pPr>
+            <a:r>
+              <a:rPr lang="en-US" sz="1000" b="1" dirty="0">
+                <a:solidFill>
+                  <a:srgbClr val="5B8DB8"/>
+                </a:solidFill>
+              </a:rPr>
+              <a:t>Specification</a:t>
+            </a:r>
+            <a:endParaRPr lang="en-US" sz="1000" dirty="0"/>
+          </a:p>
+        </p:txBody>
+      </p:sp>
+      <p:sp>
+        <p:nvSpPr>
+          <p:cNvPr id="26" name="Text 24"/>
+          <p:cNvSpPr/>
+          <p:nvPr/>
+        </p:nvSpPr>
+        <p:spPr>
+          <a:xfrm>
+            <a:off x="2651760" y="2715768"/>
+            <a:ext cx="2542032" cy="429768"/>
+          </a:xfrm>
+          <a:prstGeom prst="rect">
+            <a:avLst/>
+          </a:prstGeom>
+          <a:noFill/>
+          <a:ln/>
+        </p:spPr>
+        <p:txBody>
+          <a:bodyPr wrap="square" lIns="0" tIns="0" rIns="0" bIns="0" rtlCol="0" anchor="ctr"/>
+          <a:lstStyle/>
+          <a:p>
+            <a:pPr indent="0" marL="0">
+              <a:buNone/>
+            </a:pPr>
+            <a:r>
+              <a:rPr lang="en-US" sz="950" dirty="0">
+                <a:solidFill>
+                  <a:srgbClr val="D4E4F0"/>
+                </a:solidFill>
+              </a:rPr>
+              <a:t>Generate SPEC, PLAN, TASKS docs</a:t>
+            </a:r>
+            <a:endParaRPr lang="en-US" sz="950" dirty="0"/>
+          </a:p>
+        </p:txBody>
+      </p:sp>
+      <p:sp>
+        <p:nvSpPr>
+          <p:cNvPr id="27" name="Text 25"/>
+          <p:cNvSpPr/>
+          <p:nvPr/>
+        </p:nvSpPr>
+        <p:spPr>
+          <a:xfrm>
+            <a:off x="5285232" y="2715768"/>
+            <a:ext cx="3429000" cy="429768"/>
+          </a:xfrm>
+          <a:prstGeom prst="rect">
+            <a:avLst/>
+          </a:prstGeom>
+          <a:noFill/>
+          <a:ln/>
+        </p:spPr>
+        <p:txBody>
+          <a:bodyPr wrap="square" lIns="0" tIns="0" rIns="0" bIns="0" rtlCol="0" anchor="ctr"/>
+          <a:lstStyle/>
+          <a:p>
+            <a:pPr indent="0" marL="0">
+              <a:buNone/>
+            </a:pPr>
+            <a:r>
+              <a:rPr lang="en-US" sz="900" i="1" dirty="0">
+                <a:solidFill>
+                  <a:srgbClr val="7A90A8"/>
+                </a:solidFill>
+              </a:rPr>
+              <a:t>"Generate a full spec suite from this PRD."</a:t>
+            </a:r>
+            <a:endParaRPr lang="en-US" sz="900" dirty="0"/>
+          </a:p>
+        </p:txBody>
+      </p:sp>
+      <p:sp>
+        <p:nvSpPr>
+          <p:cNvPr id="28" name="Shape 26"/>
+          <p:cNvSpPr/>
+          <p:nvPr/>
+        </p:nvSpPr>
+        <p:spPr>
+          <a:xfrm>
+            <a:off x="320040" y="3163824"/>
+            <a:ext cx="8503920" cy="429768"/>
+          </a:xfrm>
+          <a:prstGeom prst="rect">
+            <a:avLst/>
+          </a:prstGeom>
+          <a:solidFill>
+            <a:srgbClr val="2E5073">
+              <a:alpha val="65000"/>
+            </a:srgbClr>
+          </a:solidFill>
+          <a:ln/>
+        </p:spPr>
+      </p:sp>
+      <p:sp>
+        <p:nvSpPr>
+          <p:cNvPr id="29" name="Shape 27"/>
+          <p:cNvSpPr/>
+          <p:nvPr/>
+        </p:nvSpPr>
+        <p:spPr>
+          <a:xfrm>
+            <a:off x="320040" y="3163824"/>
+            <a:ext cx="54864" cy="429768"/>
           </a:xfrm>
           <a:prstGeom prst="rect">
             <a:avLst/>
@@ -2478,93 +3128,279 @@
       </p:sp>
       <p:sp>
         <p:nvSpPr>
-          <p:cNvPr id="9" name="Text 7"/>
-          <p:cNvSpPr/>
-          <p:nvPr/>
-        </p:nvSpPr>
-        <p:spPr>
-          <a:xfrm>
-            <a:off x="466344" y="1865376"/>
-            <a:ext cx="3931920" cy="292608"/>
-          </a:xfrm>
-          <a:prstGeom prst="rect">
-            <a:avLst/>
-          </a:prstGeom>
-          <a:noFill/>
-          <a:ln/>
-        </p:spPr>
-        <p:txBody>
-          <a:bodyPr wrap="square" lIns="0" tIns="0" rIns="0" bIns="0" rtlCol="0" anchor="ctr"/>
-          <a:lstStyle/>
-          <a:p>
-            <a:pPr indent="0" marL="0">
-              <a:buNone/>
-            </a:pPr>
-            <a:r>
-              <a:rPr lang="en-US" sz="1300" b="1" dirty="0">
+          <p:cNvPr id="30" name="Text 28"/>
+          <p:cNvSpPr/>
+          <p:nvPr/>
+        </p:nvSpPr>
+        <p:spPr>
+          <a:xfrm>
+            <a:off x="457200" y="3163824"/>
+            <a:ext cx="2121408" cy="429768"/>
+          </a:xfrm>
+          <a:prstGeom prst="rect">
+            <a:avLst/>
+          </a:prstGeom>
+          <a:noFill/>
+          <a:ln/>
+        </p:spPr>
+        <p:txBody>
+          <a:bodyPr wrap="square" lIns="0" tIns="0" rIns="0" bIns="0" rtlCol="0" anchor="ctr"/>
+          <a:lstStyle/>
+          <a:p>
+            <a:pPr indent="0" marL="0">
+              <a:buNone/>
+            </a:pPr>
+            <a:r>
+              <a:rPr lang="en-US" sz="1000" b="1" dirty="0">
                 <a:solidFill>
                   <a:srgbClr val="3A7DC9"/>
                 </a:solidFill>
               </a:rPr>
-              <a:t>Tool</a:t>
-            </a:r>
-            <a:endParaRPr lang="en-US" sz="1300" dirty="0"/>
-          </a:p>
-        </p:txBody>
-      </p:sp>
-      <p:sp>
-        <p:nvSpPr>
-          <p:cNvPr id="10" name="Text 8"/>
-          <p:cNvSpPr/>
-          <p:nvPr/>
-        </p:nvSpPr>
-        <p:spPr>
-          <a:xfrm>
-            <a:off x="466344" y="2194560"/>
-            <a:ext cx="3931920" cy="420624"/>
-          </a:xfrm>
-          <a:prstGeom prst="rect">
-            <a:avLst/>
-          </a:prstGeom>
-          <a:noFill/>
-          <a:ln/>
-        </p:spPr>
-        <p:txBody>
-          <a:bodyPr wrap="square" lIns="0" tIns="0" rIns="0" bIns="0" rtlCol="0" anchor="ctr"/>
-          <a:lstStyle/>
-          <a:p>
-            <a:pPr indent="0" marL="0">
-              <a:buNone/>
-            </a:pPr>
-            <a:r>
-              <a:rPr lang="en-US" sz="1050" dirty="0">
+              <a:t>Implementation</a:t>
+            </a:r>
+            <a:endParaRPr lang="en-US" sz="1000" dirty="0"/>
+          </a:p>
+        </p:txBody>
+      </p:sp>
+      <p:sp>
+        <p:nvSpPr>
+          <p:cNvPr id="31" name="Text 29"/>
+          <p:cNvSpPr/>
+          <p:nvPr/>
+        </p:nvSpPr>
+        <p:spPr>
+          <a:xfrm>
+            <a:off x="2651760" y="3163824"/>
+            <a:ext cx="2542032" cy="429768"/>
+          </a:xfrm>
+          <a:prstGeom prst="rect">
+            <a:avLst/>
+          </a:prstGeom>
+          <a:noFill/>
+          <a:ln/>
+        </p:spPr>
+        <p:txBody>
+          <a:bodyPr wrap="square" lIns="0" tIns="0" rIns="0" bIns="0" rtlCol="0" anchor="ctr"/>
+          <a:lstStyle/>
+          <a:p>
+            <a:pPr indent="0" marL="0">
+              <a:buNone/>
+            </a:pPr>
+            <a:r>
+              <a:rPr lang="en-US" sz="950" dirty="0">
                 <a:solidFill>
                   <a:srgbClr val="D4E4F0"/>
                 </a:solidFill>
               </a:rPr>
-              <a:t>A callable function — bash command, file read/write, API call, web search</a:t>
-            </a:r>
-            <a:endParaRPr lang="en-US" sz="1050" dirty="0"/>
-          </a:p>
-        </p:txBody>
-      </p:sp>
-      <p:sp>
-        <p:nvSpPr>
-          <p:cNvPr id="11" name="Shape 9"/>
-          <p:cNvSpPr/>
-          <p:nvPr/>
-        </p:nvSpPr>
-        <p:spPr>
-          <a:xfrm>
-            <a:off x="320040" y="2798064"/>
-            <a:ext cx="4206240" cy="868680"/>
+              <a:t>Write code, fix tests, refactor</a:t>
+            </a:r>
+            <a:endParaRPr lang="en-US" sz="950" dirty="0"/>
+          </a:p>
+        </p:txBody>
+      </p:sp>
+      <p:sp>
+        <p:nvSpPr>
+          <p:cNvPr id="32" name="Text 30"/>
+          <p:cNvSpPr/>
+          <p:nvPr/>
+        </p:nvSpPr>
+        <p:spPr>
+          <a:xfrm>
+            <a:off x="5285232" y="3163824"/>
+            <a:ext cx="3429000" cy="429768"/>
+          </a:xfrm>
+          <a:prstGeom prst="rect">
+            <a:avLst/>
+          </a:prstGeom>
+          <a:noFill/>
+          <a:ln/>
+        </p:spPr>
+        <p:txBody>
+          <a:bodyPr wrap="square" lIns="0" tIns="0" rIns="0" bIns="0" rtlCol="0" anchor="ctr"/>
+          <a:lstStyle/>
+          <a:p>
+            <a:pPr indent="0" marL="0">
+              <a:buNone/>
+            </a:pPr>
+            <a:r>
+              <a:rPr lang="en-US" sz="900" i="1" dirty="0">
+                <a:solidFill>
+                  <a:srgbClr val="7A90A8"/>
+                </a:solidFill>
+              </a:rPr>
+              <a:t>"Implement task 3 from TASKS.md. Write tests first."</a:t>
+            </a:r>
+            <a:endParaRPr lang="en-US" sz="900" dirty="0"/>
+          </a:p>
+        </p:txBody>
+      </p:sp>
+      <p:sp>
+        <p:nvSpPr>
+          <p:cNvPr id="33" name="Shape 31"/>
+          <p:cNvSpPr/>
+          <p:nvPr/>
+        </p:nvSpPr>
+        <p:spPr>
+          <a:xfrm>
+            <a:off x="320040" y="3611880"/>
+            <a:ext cx="8503920" cy="429768"/>
+          </a:xfrm>
+          <a:prstGeom prst="rect">
+            <a:avLst/>
+          </a:prstGeom>
+          <a:solidFill>
+            <a:srgbClr val="1E3D5A">
+              <a:alpha val="65000"/>
+            </a:srgbClr>
+          </a:solidFill>
+          <a:ln/>
+        </p:spPr>
+      </p:sp>
+      <p:sp>
+        <p:nvSpPr>
+          <p:cNvPr id="34" name="Shape 32"/>
+          <p:cNvSpPr/>
+          <p:nvPr/>
+        </p:nvSpPr>
+        <p:spPr>
+          <a:xfrm>
+            <a:off x="320040" y="3611880"/>
+            <a:ext cx="54864" cy="429768"/>
+          </a:xfrm>
+          <a:prstGeom prst="rect">
+            <a:avLst/>
+          </a:prstGeom>
+          <a:solidFill>
+            <a:srgbClr val="4A7FA8"/>
+          </a:solidFill>
+          <a:ln/>
+        </p:spPr>
+      </p:sp>
+      <p:sp>
+        <p:nvSpPr>
+          <p:cNvPr id="35" name="Text 33"/>
+          <p:cNvSpPr/>
+          <p:nvPr/>
+        </p:nvSpPr>
+        <p:spPr>
+          <a:xfrm>
+            <a:off x="457200" y="3611880"/>
+            <a:ext cx="2121408" cy="429768"/>
+          </a:xfrm>
+          <a:prstGeom prst="rect">
+            <a:avLst/>
+          </a:prstGeom>
+          <a:noFill/>
+          <a:ln/>
+        </p:spPr>
+        <p:txBody>
+          <a:bodyPr wrap="square" lIns="0" tIns="0" rIns="0" bIns="0" rtlCol="0" anchor="ctr"/>
+          <a:lstStyle/>
+          <a:p>
+            <a:pPr indent="0" marL="0">
+              <a:buNone/>
+            </a:pPr>
+            <a:r>
+              <a:rPr lang="en-US" sz="1000" b="1" dirty="0">
+                <a:solidFill>
+                  <a:srgbClr val="4A7FA8"/>
+                </a:solidFill>
+              </a:rPr>
+              <a:t>Code Review</a:t>
+            </a:r>
+            <a:endParaRPr lang="en-US" sz="1000" dirty="0"/>
+          </a:p>
+        </p:txBody>
+      </p:sp>
+      <p:sp>
+        <p:nvSpPr>
+          <p:cNvPr id="36" name="Text 34"/>
+          <p:cNvSpPr/>
+          <p:nvPr/>
+        </p:nvSpPr>
+        <p:spPr>
+          <a:xfrm>
+            <a:off x="2651760" y="3611880"/>
+            <a:ext cx="2542032" cy="429768"/>
+          </a:xfrm>
+          <a:prstGeom prst="rect">
+            <a:avLst/>
+          </a:prstGeom>
+          <a:noFill/>
+          <a:ln/>
+        </p:spPr>
+        <p:txBody>
+          <a:bodyPr wrap="square" lIns="0" tIns="0" rIns="0" bIns="0" rtlCol="0" anchor="ctr"/>
+          <a:lstStyle/>
+          <a:p>
+            <a:pPr indent="0" marL="0">
+              <a:buNone/>
+            </a:pPr>
+            <a:r>
+              <a:rPr lang="en-US" sz="950" dirty="0">
+                <a:solidFill>
+                  <a:srgbClr val="D4E4F0"/>
+                </a:solidFill>
+              </a:rPr>
+              <a:t>Review PR against spec &amp; standards</a:t>
+            </a:r>
+            <a:endParaRPr lang="en-US" sz="950" dirty="0"/>
+          </a:p>
+        </p:txBody>
+      </p:sp>
+      <p:sp>
+        <p:nvSpPr>
+          <p:cNvPr id="37" name="Text 35"/>
+          <p:cNvSpPr/>
+          <p:nvPr/>
+        </p:nvSpPr>
+        <p:spPr>
+          <a:xfrm>
+            <a:off x="5285232" y="3611880"/>
+            <a:ext cx="3429000" cy="429768"/>
+          </a:xfrm>
+          <a:prstGeom prst="rect">
+            <a:avLst/>
+          </a:prstGeom>
+          <a:noFill/>
+          <a:ln/>
+        </p:spPr>
+        <p:txBody>
+          <a:bodyPr wrap="square" lIns="0" tIns="0" rIns="0" bIns="0" rtlCol="0" anchor="ctr"/>
+          <a:lstStyle/>
+          <a:p>
+            <a:pPr indent="0" marL="0">
+              <a:buNone/>
+            </a:pPr>
+            <a:r>
+              <a:rPr lang="en-US" sz="900" i="1" dirty="0">
+                <a:solidFill>
+                  <a:srgbClr val="7A90A8"/>
+                </a:solidFill>
+              </a:rPr>
+              <a:t>"Flag any requirement in SPEC.md not satisfied by this PR."</a:t>
+            </a:r>
+            <a:endParaRPr lang="en-US" sz="900" dirty="0"/>
+          </a:p>
+        </p:txBody>
+      </p:sp>
+      <p:sp>
+        <p:nvSpPr>
+          <p:cNvPr id="38" name="Shape 36"/>
+          <p:cNvSpPr/>
+          <p:nvPr/>
+        </p:nvSpPr>
+        <p:spPr>
+          <a:xfrm>
+            <a:off x="320040" y="4059936"/>
+            <a:ext cx="8503920" cy="429768"/>
           </a:xfrm>
           <a:prstGeom prst="rect">
             <a:avLst/>
           </a:prstGeom>
           <a:solidFill>
             <a:srgbClr val="2E5073">
-              <a:alpha val="85000"/>
+              <a:alpha val="65000"/>
             </a:srgbClr>
           </a:solidFill>
           <a:ln/>
@@ -2572,113 +3408,299 @@
       </p:sp>
       <p:sp>
         <p:nvSpPr>
-          <p:cNvPr id="12" name="Shape 10"/>
-          <p:cNvSpPr/>
-          <p:nvPr/>
-        </p:nvSpPr>
-        <p:spPr>
-          <a:xfrm>
-            <a:off x="320040" y="2798064"/>
-            <a:ext cx="54864" cy="868680"/>
-          </a:xfrm>
-          <a:prstGeom prst="rect">
-            <a:avLst/>
-          </a:prstGeom>
-          <a:solidFill>
-            <a:srgbClr val="3A7DC9"/>
-          </a:solidFill>
-          <a:ln/>
-        </p:spPr>
-      </p:sp>
-      <p:sp>
-        <p:nvSpPr>
-          <p:cNvPr id="13" name="Text 11"/>
-          <p:cNvSpPr/>
-          <p:nvPr/>
-        </p:nvSpPr>
-        <p:spPr>
-          <a:xfrm>
-            <a:off x="466344" y="2852928"/>
-            <a:ext cx="3931920" cy="292608"/>
-          </a:xfrm>
-          <a:prstGeom prst="rect">
-            <a:avLst/>
-          </a:prstGeom>
-          <a:noFill/>
-          <a:ln/>
-        </p:spPr>
-        <p:txBody>
-          <a:bodyPr wrap="square" lIns="0" tIns="0" rIns="0" bIns="0" rtlCol="0" anchor="ctr"/>
-          <a:lstStyle/>
-          <a:p>
-            <a:pPr indent="0" marL="0">
-              <a:buNone/>
-            </a:pPr>
-            <a:r>
-              <a:rPr lang="en-US" sz="1300" b="1" dirty="0">
-                <a:solidFill>
-                  <a:srgbClr val="3A7DC9"/>
-                </a:solidFill>
-              </a:rPr>
-              <a:t>HITL</a:t>
-            </a:r>
-            <a:endParaRPr lang="en-US" sz="1300" dirty="0"/>
-          </a:p>
-        </p:txBody>
-      </p:sp>
-      <p:sp>
-        <p:nvSpPr>
-          <p:cNvPr id="14" name="Text 12"/>
-          <p:cNvSpPr/>
-          <p:nvPr/>
-        </p:nvSpPr>
-        <p:spPr>
-          <a:xfrm>
-            <a:off x="466344" y="3182112"/>
-            <a:ext cx="3931920" cy="420624"/>
-          </a:xfrm>
-          <a:prstGeom prst="rect">
-            <a:avLst/>
-          </a:prstGeom>
-          <a:noFill/>
-          <a:ln/>
-        </p:spPr>
-        <p:txBody>
-          <a:bodyPr wrap="square" lIns="0" tIns="0" rIns="0" bIns="0" rtlCol="0" anchor="ctr"/>
-          <a:lstStyle/>
-          <a:p>
-            <a:pPr indent="0" marL="0">
-              <a:buNone/>
-            </a:pPr>
-            <a:r>
-              <a:rPr lang="en-US" sz="1050" dirty="0">
+          <p:cNvPr id="39" name="Shape 37"/>
+          <p:cNvSpPr/>
+          <p:nvPr/>
+        </p:nvSpPr>
+        <p:spPr>
+          <a:xfrm>
+            <a:off x="320040" y="4059936"/>
+            <a:ext cx="54864" cy="429768"/>
+          </a:xfrm>
+          <a:prstGeom prst="rect">
+            <a:avLst/>
+          </a:prstGeom>
+          <a:solidFill>
+            <a:srgbClr val="3A7E6E"/>
+          </a:solidFill>
+          <a:ln/>
+        </p:spPr>
+      </p:sp>
+      <p:sp>
+        <p:nvSpPr>
+          <p:cNvPr id="40" name="Text 38"/>
+          <p:cNvSpPr/>
+          <p:nvPr/>
+        </p:nvSpPr>
+        <p:spPr>
+          <a:xfrm>
+            <a:off x="457200" y="4059936"/>
+            <a:ext cx="2121408" cy="429768"/>
+          </a:xfrm>
+          <a:prstGeom prst="rect">
+            <a:avLst/>
+          </a:prstGeom>
+          <a:noFill/>
+          <a:ln/>
+        </p:spPr>
+        <p:txBody>
+          <a:bodyPr wrap="square" lIns="0" tIns="0" rIns="0" bIns="0" rtlCol="0" anchor="ctr"/>
+          <a:lstStyle/>
+          <a:p>
+            <a:pPr indent="0" marL="0">
+              <a:buNone/>
+            </a:pPr>
+            <a:r>
+              <a:rPr lang="en-US" sz="1000" b="1" dirty="0">
+                <a:solidFill>
+                  <a:srgbClr val="3A7E6E"/>
+                </a:solidFill>
+              </a:rPr>
+              <a:t>Design Review</a:t>
+            </a:r>
+            <a:endParaRPr lang="en-US" sz="1000" dirty="0"/>
+          </a:p>
+        </p:txBody>
+      </p:sp>
+      <p:sp>
+        <p:nvSpPr>
+          <p:cNvPr id="41" name="Text 39"/>
+          <p:cNvSpPr/>
+          <p:nvPr/>
+        </p:nvSpPr>
+        <p:spPr>
+          <a:xfrm>
+            <a:off x="2651760" y="4059936"/>
+            <a:ext cx="2542032" cy="429768"/>
+          </a:xfrm>
+          <a:prstGeom prst="rect">
+            <a:avLst/>
+          </a:prstGeom>
+          <a:noFill/>
+          <a:ln/>
+        </p:spPr>
+        <p:txBody>
+          <a:bodyPr wrap="square" lIns="0" tIns="0" rIns="0" bIns="0" rtlCol="0" anchor="ctr"/>
+          <a:lstStyle/>
+          <a:p>
+            <a:pPr indent="0" marL="0">
+              <a:buNone/>
+            </a:pPr>
+            <a:r>
+              <a:rPr lang="en-US" sz="950" dirty="0">
                 <a:solidFill>
                   <a:srgbClr val="D4E4F0"/>
                 </a:solidFill>
               </a:rPr>
-              <a:t>Human-in-the-Loop: a design gate requiring human approval before irreversible action</a:t>
-            </a:r>
-            <a:endParaRPr lang="en-US" sz="1050" dirty="0"/>
-          </a:p>
-        </p:txBody>
-      </p:sp>
-      <p:sp>
-        <p:nvSpPr>
-          <p:cNvPr id="15" name="Shape 13"/>
-          <p:cNvSpPr/>
-          <p:nvPr/>
-        </p:nvSpPr>
-        <p:spPr>
-          <a:xfrm>
-            <a:off x="320040" y="3785616"/>
-            <a:ext cx="4206240" cy="868680"/>
+              <a:t>Read proposal + codebase, find issues</a:t>
+            </a:r>
+            <a:endParaRPr lang="en-US" sz="950" dirty="0"/>
+          </a:p>
+        </p:txBody>
+      </p:sp>
+      <p:sp>
+        <p:nvSpPr>
+          <p:cNvPr id="42" name="Text 40"/>
+          <p:cNvSpPr/>
+          <p:nvPr/>
+        </p:nvSpPr>
+        <p:spPr>
+          <a:xfrm>
+            <a:off x="5285232" y="4059936"/>
+            <a:ext cx="3429000" cy="429768"/>
+          </a:xfrm>
+          <a:prstGeom prst="rect">
+            <a:avLst/>
+          </a:prstGeom>
+          <a:noFill/>
+          <a:ln/>
+        </p:spPr>
+        <p:txBody>
+          <a:bodyPr wrap="square" lIns="0" tIns="0" rIns="0" bIns="0" rtlCol="0" anchor="ctr"/>
+          <a:lstStyle/>
+          <a:p>
+            <a:pPr indent="0" marL="0">
+              <a:buNone/>
+            </a:pPr>
+            <a:r>
+              <a:rPr lang="en-US" sz="900" i="1" dirty="0">
+                <a:solidFill>
+                  <a:srgbClr val="7A90A8"/>
+                </a:solidFill>
+              </a:rPr>
+              <a:t>"What does this architecture break in the current system?"</a:t>
+            </a:r>
+            <a:endParaRPr lang="en-US" sz="900" dirty="0"/>
+          </a:p>
+        </p:txBody>
+      </p:sp>
+      <p:sp>
+        <p:nvSpPr>
+          <p:cNvPr id="43" name="Shape 41"/>
+          <p:cNvSpPr/>
+          <p:nvPr/>
+        </p:nvSpPr>
+        <p:spPr>
+          <a:xfrm>
+            <a:off x="320040" y="4507992"/>
+            <a:ext cx="8503920" cy="429768"/>
+          </a:xfrm>
+          <a:prstGeom prst="rect">
+            <a:avLst/>
+          </a:prstGeom>
+          <a:solidFill>
+            <a:srgbClr val="1E3D5A">
+              <a:alpha val="65000"/>
+            </a:srgbClr>
+          </a:solidFill>
+          <a:ln/>
+        </p:spPr>
+      </p:sp>
+      <p:sp>
+        <p:nvSpPr>
+          <p:cNvPr id="44" name="Shape 42"/>
+          <p:cNvSpPr/>
+          <p:nvPr/>
+        </p:nvSpPr>
+        <p:spPr>
+          <a:xfrm>
+            <a:off x="320040" y="4507992"/>
+            <a:ext cx="54864" cy="429768"/>
+          </a:xfrm>
+          <a:prstGeom prst="rect">
+            <a:avLst/>
+          </a:prstGeom>
+          <a:solidFill>
+            <a:srgbClr val="5B8DB8"/>
+          </a:solidFill>
+          <a:ln/>
+        </p:spPr>
+      </p:sp>
+      <p:sp>
+        <p:nvSpPr>
+          <p:cNvPr id="45" name="Text 43"/>
+          <p:cNvSpPr/>
+          <p:nvPr/>
+        </p:nvSpPr>
+        <p:spPr>
+          <a:xfrm>
+            <a:off x="457200" y="4507992"/>
+            <a:ext cx="2121408" cy="429768"/>
+          </a:xfrm>
+          <a:prstGeom prst="rect">
+            <a:avLst/>
+          </a:prstGeom>
+          <a:noFill/>
+          <a:ln/>
+        </p:spPr>
+        <p:txBody>
+          <a:bodyPr wrap="square" lIns="0" tIns="0" rIns="0" bIns="0" rtlCol="0" anchor="ctr"/>
+          <a:lstStyle/>
+          <a:p>
+            <a:pPr indent="0" marL="0">
+              <a:buNone/>
+            </a:pPr>
+            <a:r>
+              <a:rPr lang="en-US" sz="1000" b="1" dirty="0">
+                <a:solidFill>
+                  <a:srgbClr val="5B8DB8"/>
+                </a:solidFill>
+              </a:rPr>
+              <a:t>Documentation &amp; Education</a:t>
+            </a:r>
+            <a:endParaRPr lang="en-US" sz="1000" dirty="0"/>
+          </a:p>
+        </p:txBody>
+      </p:sp>
+      <p:sp>
+        <p:nvSpPr>
+          <p:cNvPr id="46" name="Text 44"/>
+          <p:cNvSpPr/>
+          <p:nvPr/>
+        </p:nvSpPr>
+        <p:spPr>
+          <a:xfrm>
+            <a:off x="2651760" y="4507992"/>
+            <a:ext cx="2542032" cy="429768"/>
+          </a:xfrm>
+          <a:prstGeom prst="rect">
+            <a:avLst/>
+          </a:prstGeom>
+          <a:noFill/>
+          <a:ln/>
+        </p:spPr>
+        <p:txBody>
+          <a:bodyPr wrap="square" lIns="0" tIns="0" rIns="0" bIns="0" rtlCol="0" anchor="ctr"/>
+          <a:lstStyle/>
+          <a:p>
+            <a:pPr indent="0" marL="0">
+              <a:buNone/>
+            </a:pPr>
+            <a:r>
+              <a:rPr lang="en-US" sz="950" dirty="0">
+                <a:solidFill>
+                  <a:srgbClr val="D4E4F0"/>
+                </a:solidFill>
+              </a:rPr>
+              <a:t>Update docs, explain codebase to team</a:t>
+            </a:r>
+            <a:endParaRPr lang="en-US" sz="950" dirty="0"/>
+          </a:p>
+        </p:txBody>
+      </p:sp>
+      <p:sp>
+        <p:nvSpPr>
+          <p:cNvPr id="47" name="Text 45"/>
+          <p:cNvSpPr/>
+          <p:nvPr/>
+        </p:nvSpPr>
+        <p:spPr>
+          <a:xfrm>
+            <a:off x="5285232" y="4507992"/>
+            <a:ext cx="3429000" cy="429768"/>
+          </a:xfrm>
+          <a:prstGeom prst="rect">
+            <a:avLst/>
+          </a:prstGeom>
+          <a:noFill/>
+          <a:ln/>
+        </p:spPr>
+        <p:txBody>
+          <a:bodyPr wrap="square" lIns="0" tIns="0" rIns="0" bIns="0" rtlCol="0" anchor="ctr"/>
+          <a:lstStyle/>
+          <a:p>
+            <a:pPr indent="0" marL="0">
+              <a:buNone/>
+            </a:pPr>
+            <a:r>
+              <a:rPr lang="en-US" sz="900" i="1" dirty="0">
+                <a:solidFill>
+                  <a:srgbClr val="7A90A8"/>
+                </a:solidFill>
+              </a:rPr>
+              <a:t>"Compare API docs to implementation — what's out of date?"</a:t>
+            </a:r>
+            <a:endParaRPr lang="en-US" sz="900" dirty="0"/>
+          </a:p>
+        </p:txBody>
+      </p:sp>
+      <p:sp>
+        <p:nvSpPr>
+          <p:cNvPr id="48" name="Shape 46"/>
+          <p:cNvSpPr/>
+          <p:nvPr/>
+        </p:nvSpPr>
+        <p:spPr>
+          <a:xfrm>
+            <a:off x="320040" y="4956048"/>
+            <a:ext cx="8503920" cy="429768"/>
           </a:xfrm>
           <a:prstGeom prst="rect">
             <a:avLst/>
           </a:prstGeom>
           <a:solidFill>
             <a:srgbClr val="2E5073">
-              <a:alpha val="85000"/>
+              <a:alpha val="65000"/>
             </a:srgbClr>
           </a:solidFill>
           <a:ln/>
@@ -2686,549 +3708,165 @@
       </p:sp>
       <p:sp>
         <p:nvSpPr>
-          <p:cNvPr id="16" name="Shape 14"/>
-          <p:cNvSpPr/>
-          <p:nvPr/>
-        </p:nvSpPr>
-        <p:spPr>
-          <a:xfrm>
-            <a:off x="320040" y="3785616"/>
-            <a:ext cx="54864" cy="868680"/>
-          </a:xfrm>
-          <a:prstGeom prst="rect">
-            <a:avLst/>
-          </a:prstGeom>
-          <a:solidFill>
-            <a:srgbClr val="3A7DC9"/>
-          </a:solidFill>
-          <a:ln/>
-        </p:spPr>
-      </p:sp>
-      <p:sp>
-        <p:nvSpPr>
-          <p:cNvPr id="17" name="Text 15"/>
-          <p:cNvSpPr/>
-          <p:nvPr/>
-        </p:nvSpPr>
-        <p:spPr>
-          <a:xfrm>
-            <a:off x="466344" y="3840480"/>
-            <a:ext cx="3931920" cy="292608"/>
-          </a:xfrm>
-          <a:prstGeom prst="rect">
-            <a:avLst/>
-          </a:prstGeom>
-          <a:noFill/>
-          <a:ln/>
-        </p:spPr>
-        <p:txBody>
-          <a:bodyPr wrap="square" lIns="0" tIns="0" rIns="0" bIns="0" rtlCol="0" anchor="ctr"/>
-          <a:lstStyle/>
-          <a:p>
-            <a:pPr indent="0" marL="0">
-              <a:buNone/>
-            </a:pPr>
-            <a:r>
-              <a:rPr lang="en-US" sz="1300" b="1" dirty="0">
-                <a:solidFill>
-                  <a:srgbClr val="3A7DC9"/>
-                </a:solidFill>
-              </a:rPr>
-              <a:t>Agent Loop</a:t>
-            </a:r>
-            <a:endParaRPr lang="en-US" sz="1300" dirty="0"/>
-          </a:p>
-        </p:txBody>
-      </p:sp>
-      <p:sp>
-        <p:nvSpPr>
-          <p:cNvPr id="18" name="Text 16"/>
-          <p:cNvSpPr/>
-          <p:nvPr/>
-        </p:nvSpPr>
-        <p:spPr>
-          <a:xfrm>
-            <a:off x="466344" y="4169664"/>
-            <a:ext cx="3931920" cy="420624"/>
-          </a:xfrm>
-          <a:prstGeom prst="rect">
-            <a:avLst/>
-          </a:prstGeom>
-          <a:noFill/>
-          <a:ln/>
-        </p:spPr>
-        <p:txBody>
-          <a:bodyPr wrap="square" lIns="0" tIns="0" rIns="0" bIns="0" rtlCol="0" anchor="ctr"/>
-          <a:lstStyle/>
-          <a:p>
-            <a:pPr indent="0" marL="0">
-              <a:buNone/>
-            </a:pPr>
-            <a:r>
-              <a:rPr lang="en-US" sz="1050" dirty="0">
+          <p:cNvPr id="49" name="Shape 47"/>
+          <p:cNvSpPr/>
+          <p:nvPr/>
+        </p:nvSpPr>
+        <p:spPr>
+          <a:xfrm>
+            <a:off x="320040" y="4956048"/>
+            <a:ext cx="54864" cy="429768"/>
+          </a:xfrm>
+          <a:prstGeom prst="rect">
+            <a:avLst/>
+          </a:prstGeom>
+          <a:solidFill>
+            <a:srgbClr val="000000"/>
+          </a:solidFill>
+          <a:ln/>
+        </p:spPr>
+      </p:sp>
+      <p:sp>
+        <p:nvSpPr>
+          <p:cNvPr id="50" name="Text 48"/>
+          <p:cNvSpPr/>
+          <p:nvPr/>
+        </p:nvSpPr>
+        <p:spPr>
+          <a:xfrm>
+            <a:off x="457200" y="4956048"/>
+            <a:ext cx="2121408" cy="429768"/>
+          </a:xfrm>
+          <a:prstGeom prst="rect">
+            <a:avLst/>
+          </a:prstGeom>
+          <a:noFill/>
+          <a:ln/>
+        </p:spPr>
+        <p:txBody>
+          <a:bodyPr wrap="square" lIns="0" tIns="0" rIns="0" bIns="0" rtlCol="0" anchor="ctr"/>
+          <a:lstStyle/>
+          <a:p>
+            <a:pPr indent="0" marL="0">
+              <a:buNone/>
+            </a:pPr>
+            <a:r>
+              <a:rPr lang="en-US" sz="1000" b="1" dirty="0">
+                <a:solidFill>
+                  <a:srgbClr val="000000"/>
+                </a:solidFill>
+              </a:rPr>
+              <a:t>Operations &amp; Hygiene</a:t>
+            </a:r>
+            <a:endParaRPr lang="en-US" sz="1000" dirty="0"/>
+          </a:p>
+        </p:txBody>
+      </p:sp>
+      <p:sp>
+        <p:nvSpPr>
+          <p:cNvPr id="51" name="Text 49"/>
+          <p:cNvSpPr/>
+          <p:nvPr/>
+        </p:nvSpPr>
+        <p:spPr>
+          <a:xfrm>
+            <a:off x="2651760" y="4956048"/>
+            <a:ext cx="2542032" cy="429768"/>
+          </a:xfrm>
+          <a:prstGeom prst="rect">
+            <a:avLst/>
+          </a:prstGeom>
+          <a:noFill/>
+          <a:ln/>
+        </p:spPr>
+        <p:txBody>
+          <a:bodyPr wrap="square" lIns="0" tIns="0" rIns="0" bIns="0" rtlCol="0" anchor="ctr"/>
+          <a:lstStyle/>
+          <a:p>
+            <a:pPr indent="0" marL="0">
+              <a:buNone/>
+            </a:pPr>
+            <a:r>
+              <a:rPr lang="en-US" sz="950" dirty="0">
                 <a:solidFill>
                   <a:srgbClr val="D4E4F0"/>
                 </a:solidFill>
               </a:rPr>
-              <a:t>Gather Context → Take Action → Verify Work → Repeat</a:t>
-            </a:r>
-            <a:endParaRPr lang="en-US" sz="1050" dirty="0"/>
-          </a:p>
-        </p:txBody>
-      </p:sp>
-      <p:sp>
-        <p:nvSpPr>
-          <p:cNvPr id="19" name="Shape 17"/>
-          <p:cNvSpPr/>
-          <p:nvPr/>
-        </p:nvSpPr>
-        <p:spPr>
-          <a:xfrm>
-            <a:off x="4709160" y="822960"/>
-            <a:ext cx="4206240" cy="868680"/>
-          </a:xfrm>
-          <a:prstGeom prst="rect">
-            <a:avLst/>
-          </a:prstGeom>
-          <a:solidFill>
-            <a:srgbClr val="2E5073">
-              <a:alpha val="85000"/>
-            </a:srgbClr>
-          </a:solidFill>
-          <a:ln/>
-        </p:spPr>
-      </p:sp>
-      <p:sp>
-        <p:nvSpPr>
-          <p:cNvPr id="20" name="Shape 18"/>
-          <p:cNvSpPr/>
-          <p:nvPr/>
-        </p:nvSpPr>
-        <p:spPr>
-          <a:xfrm>
-            <a:off x="4709160" y="822960"/>
-            <a:ext cx="54864" cy="868680"/>
-          </a:xfrm>
-          <a:prstGeom prst="rect">
-            <a:avLst/>
-          </a:prstGeom>
-          <a:solidFill>
-            <a:srgbClr val="3A7DC9"/>
-          </a:solidFill>
-          <a:ln/>
-        </p:spPr>
-      </p:sp>
-      <p:sp>
-        <p:nvSpPr>
-          <p:cNvPr id="21" name="Text 19"/>
-          <p:cNvSpPr/>
-          <p:nvPr/>
-        </p:nvSpPr>
-        <p:spPr>
-          <a:xfrm>
-            <a:off x="4855464" y="877824"/>
-            <a:ext cx="3931920" cy="292608"/>
-          </a:xfrm>
-          <a:prstGeom prst="rect">
-            <a:avLst/>
-          </a:prstGeom>
-          <a:noFill/>
-          <a:ln/>
-        </p:spPr>
-        <p:txBody>
-          <a:bodyPr wrap="square" lIns="0" tIns="0" rIns="0" bIns="0" rtlCol="0" anchor="ctr"/>
-          <a:lstStyle/>
-          <a:p>
-            <a:pPr indent="0" marL="0">
-              <a:buNone/>
-            </a:pPr>
-            <a:r>
-              <a:rPr lang="en-US" sz="1300" b="1" dirty="0">
-                <a:solidFill>
-                  <a:srgbClr val="3A7DC9"/>
-                </a:solidFill>
-              </a:rPr>
-              <a:t>Subagent</a:t>
-            </a:r>
-            <a:endParaRPr lang="en-US" sz="1300" dirty="0"/>
-          </a:p>
-        </p:txBody>
-      </p:sp>
-      <p:sp>
-        <p:nvSpPr>
-          <p:cNvPr id="22" name="Text 20"/>
-          <p:cNvSpPr/>
-          <p:nvPr/>
-        </p:nvSpPr>
-        <p:spPr>
-          <a:xfrm>
-            <a:off x="4855464" y="1207008"/>
-            <a:ext cx="3931920" cy="420624"/>
-          </a:xfrm>
-          <a:prstGeom prst="rect">
-            <a:avLst/>
-          </a:prstGeom>
-          <a:noFill/>
-          <a:ln/>
-        </p:spPr>
-        <p:txBody>
-          <a:bodyPr wrap="square" lIns="0" tIns="0" rIns="0" bIns="0" rtlCol="0" anchor="ctr"/>
-          <a:lstStyle/>
-          <a:p>
-            <a:pPr indent="0" marL="0">
-              <a:buNone/>
-            </a:pPr>
-            <a:r>
-              <a:rPr lang="en-US" sz="1050" dirty="0">
-                <a:solidFill>
-                  <a:srgbClr val="D4E4F0"/>
-                </a:solidFill>
-              </a:rPr>
-              <a:t>A child agent spawned by an orchestrator for parallel or specialized work</a:t>
-            </a:r>
-            <a:endParaRPr lang="en-US" sz="1050" dirty="0"/>
-          </a:p>
-        </p:txBody>
-      </p:sp>
-      <p:sp>
-        <p:nvSpPr>
-          <p:cNvPr id="23" name="Shape 21"/>
-          <p:cNvSpPr/>
-          <p:nvPr/>
-        </p:nvSpPr>
-        <p:spPr>
-          <a:xfrm>
-            <a:off x="4709160" y="1810512"/>
-            <a:ext cx="4206240" cy="868680"/>
-          </a:xfrm>
-          <a:prstGeom prst="rect">
-            <a:avLst/>
-          </a:prstGeom>
-          <a:solidFill>
-            <a:srgbClr val="2E5073">
-              <a:alpha val="85000"/>
-            </a:srgbClr>
-          </a:solidFill>
-          <a:ln/>
-        </p:spPr>
-      </p:sp>
-      <p:sp>
-        <p:nvSpPr>
-          <p:cNvPr id="24" name="Shape 22"/>
-          <p:cNvSpPr/>
-          <p:nvPr/>
-        </p:nvSpPr>
-        <p:spPr>
-          <a:xfrm>
-            <a:off x="4709160" y="1810512"/>
-            <a:ext cx="54864" cy="868680"/>
-          </a:xfrm>
-          <a:prstGeom prst="rect">
-            <a:avLst/>
-          </a:prstGeom>
-          <a:solidFill>
-            <a:srgbClr val="3A7DC9"/>
-          </a:solidFill>
-          <a:ln/>
-        </p:spPr>
-      </p:sp>
-      <p:sp>
-        <p:nvSpPr>
-          <p:cNvPr id="25" name="Text 23"/>
-          <p:cNvSpPr/>
-          <p:nvPr/>
-        </p:nvSpPr>
-        <p:spPr>
-          <a:xfrm>
-            <a:off x="4855464" y="1865376"/>
-            <a:ext cx="3931920" cy="292608"/>
-          </a:xfrm>
-          <a:prstGeom prst="rect">
-            <a:avLst/>
-          </a:prstGeom>
-          <a:noFill/>
-          <a:ln/>
-        </p:spPr>
-        <p:txBody>
-          <a:bodyPr wrap="square" lIns="0" tIns="0" rIns="0" bIns="0" rtlCol="0" anchor="ctr"/>
-          <a:lstStyle/>
-          <a:p>
-            <a:pPr indent="0" marL="0">
-              <a:buNone/>
-            </a:pPr>
-            <a:r>
-              <a:rPr lang="en-US" sz="1300" b="1" dirty="0">
-                <a:solidFill>
-                  <a:srgbClr val="3A7DC9"/>
-                </a:solidFill>
-              </a:rPr>
-              <a:t>Orchestrator</a:t>
-            </a:r>
-            <a:endParaRPr lang="en-US" sz="1300" dirty="0"/>
-          </a:p>
-        </p:txBody>
-      </p:sp>
-      <p:sp>
-        <p:nvSpPr>
-          <p:cNvPr id="26" name="Text 24"/>
-          <p:cNvSpPr/>
-          <p:nvPr/>
-        </p:nvSpPr>
-        <p:spPr>
-          <a:xfrm>
-            <a:off x="4855464" y="2194560"/>
-            <a:ext cx="3931920" cy="420624"/>
-          </a:xfrm>
-          <a:prstGeom prst="rect">
-            <a:avLst/>
-          </a:prstGeom>
-          <a:noFill/>
-          <a:ln/>
-        </p:spPr>
-        <p:txBody>
-          <a:bodyPr wrap="square" lIns="0" tIns="0" rIns="0" bIns="0" rtlCol="0" anchor="ctr"/>
-          <a:lstStyle/>
-          <a:p>
-            <a:pPr indent="0" marL="0">
-              <a:buNone/>
-            </a:pPr>
-            <a:r>
-              <a:rPr lang="en-US" sz="1050" dirty="0">
-                <a:solidFill>
-                  <a:srgbClr val="D4E4F0"/>
-                </a:solidFill>
-              </a:rPr>
-              <a:t>A lead agent that coordinates subagents, assigns subtasks, and merges results</a:t>
-            </a:r>
-            <a:endParaRPr lang="en-US" sz="1050" dirty="0"/>
-          </a:p>
-        </p:txBody>
-      </p:sp>
-      <p:sp>
-        <p:nvSpPr>
-          <p:cNvPr id="27" name="Shape 25"/>
-          <p:cNvSpPr/>
-          <p:nvPr/>
-        </p:nvSpPr>
-        <p:spPr>
-          <a:xfrm>
-            <a:off x="4709160" y="2798064"/>
-            <a:ext cx="4206240" cy="868680"/>
-          </a:xfrm>
-          <a:prstGeom prst="rect">
-            <a:avLst/>
-          </a:prstGeom>
-          <a:solidFill>
-            <a:srgbClr val="2E5073">
-              <a:alpha val="85000"/>
-            </a:srgbClr>
-          </a:solidFill>
-          <a:ln/>
-        </p:spPr>
-      </p:sp>
-      <p:sp>
-        <p:nvSpPr>
-          <p:cNvPr id="28" name="Shape 26"/>
-          <p:cNvSpPr/>
-          <p:nvPr/>
-        </p:nvSpPr>
-        <p:spPr>
-          <a:xfrm>
-            <a:off x="4709160" y="2798064"/>
-            <a:ext cx="54864" cy="868680"/>
-          </a:xfrm>
-          <a:prstGeom prst="rect">
-            <a:avLst/>
-          </a:prstGeom>
-          <a:solidFill>
-            <a:srgbClr val="3A7DC9"/>
-          </a:solidFill>
-          <a:ln/>
-        </p:spPr>
-      </p:sp>
-      <p:sp>
-        <p:nvSpPr>
-          <p:cNvPr id="29" name="Text 27"/>
-          <p:cNvSpPr/>
-          <p:nvPr/>
-        </p:nvSpPr>
-        <p:spPr>
-          <a:xfrm>
-            <a:off x="4855464" y="2852928"/>
-            <a:ext cx="3931920" cy="292608"/>
-          </a:xfrm>
-          <a:prstGeom prst="rect">
-            <a:avLst/>
-          </a:prstGeom>
-          <a:noFill/>
-          <a:ln/>
-        </p:spPr>
-        <p:txBody>
-          <a:bodyPr wrap="square" lIns="0" tIns="0" rIns="0" bIns="0" rtlCol="0" anchor="ctr"/>
-          <a:lstStyle/>
-          <a:p>
-            <a:pPr indent="0" marL="0">
-              <a:buNone/>
-            </a:pPr>
-            <a:r>
-              <a:rPr lang="en-US" sz="1300" b="1" dirty="0">
-                <a:solidFill>
-                  <a:srgbClr val="3A7DC9"/>
-                </a:solidFill>
-              </a:rPr>
-              <a:t>Supervised Dev</a:t>
-            </a:r>
-            <a:endParaRPr lang="en-US" sz="1300" dirty="0"/>
-          </a:p>
-        </p:txBody>
-      </p:sp>
-      <p:sp>
-        <p:nvSpPr>
-          <p:cNvPr id="30" name="Text 28"/>
-          <p:cNvSpPr/>
-          <p:nvPr/>
-        </p:nvSpPr>
-        <p:spPr>
-          <a:xfrm>
-            <a:off x="4855464" y="3182112"/>
-            <a:ext cx="3931920" cy="420624"/>
-          </a:xfrm>
-          <a:prstGeom prst="rect">
-            <a:avLst/>
-          </a:prstGeom>
-          <a:noFill/>
-          <a:ln/>
-        </p:spPr>
-        <p:txBody>
-          <a:bodyPr wrap="square" lIns="0" tIns="0" rIns="0" bIns="0" rtlCol="0" anchor="ctr"/>
-          <a:lstStyle/>
-          <a:p>
-            <a:pPr indent="0" marL="0">
-              <a:buNone/>
-            </a:pPr>
-            <a:r>
-              <a:rPr lang="en-US" sz="1050" dirty="0">
-                <a:solidFill>
-                  <a:srgbClr val="D4E4F0"/>
-                </a:solidFill>
-              </a:rPr>
-              <a:t>Spotify's model: engineers set intent and review output; agents write the code</a:t>
-            </a:r>
-            <a:endParaRPr lang="en-US" sz="1050" dirty="0"/>
-          </a:p>
-        </p:txBody>
-      </p:sp>
-      <p:sp>
-        <p:nvSpPr>
-          <p:cNvPr id="31" name="Shape 29"/>
-          <p:cNvSpPr/>
-          <p:nvPr/>
-        </p:nvSpPr>
-        <p:spPr>
-          <a:xfrm>
-            <a:off x="4709160" y="3785616"/>
-            <a:ext cx="4206240" cy="868680"/>
-          </a:xfrm>
-          <a:prstGeom prst="rect">
-            <a:avLst/>
-          </a:prstGeom>
-          <a:solidFill>
-            <a:srgbClr val="2E5073">
-              <a:alpha val="85000"/>
-            </a:srgbClr>
-          </a:solidFill>
-          <a:ln/>
-        </p:spPr>
-      </p:sp>
-      <p:sp>
-        <p:nvSpPr>
-          <p:cNvPr id="32" name="Shape 30"/>
-          <p:cNvSpPr/>
-          <p:nvPr/>
-        </p:nvSpPr>
-        <p:spPr>
-          <a:xfrm>
-            <a:off x="4709160" y="3785616"/>
-            <a:ext cx="54864" cy="868680"/>
-          </a:xfrm>
-          <a:prstGeom prst="rect">
-            <a:avLst/>
-          </a:prstGeom>
-          <a:solidFill>
-            <a:srgbClr val="3A7DC9"/>
-          </a:solidFill>
-          <a:ln/>
-        </p:spPr>
-      </p:sp>
-      <p:sp>
-        <p:nvSpPr>
-          <p:cNvPr id="33" name="Text 31"/>
-          <p:cNvSpPr/>
-          <p:nvPr/>
-        </p:nvSpPr>
-        <p:spPr>
-          <a:xfrm>
-            <a:off x="4855464" y="3840480"/>
-            <a:ext cx="3931920" cy="292608"/>
-          </a:xfrm>
-          <a:prstGeom prst="rect">
-            <a:avLst/>
-          </a:prstGeom>
-          <a:noFill/>
-          <a:ln/>
-        </p:spPr>
-        <p:txBody>
-          <a:bodyPr wrap="square" lIns="0" tIns="0" rIns="0" bIns="0" rtlCol="0" anchor="ctr"/>
-          <a:lstStyle/>
-          <a:p>
-            <a:pPr indent="0" marL="0">
-              <a:buNone/>
-            </a:pPr>
-            <a:r>
-              <a:rPr lang="en-US" sz="1300" b="1" dirty="0">
-                <a:solidFill>
-                  <a:srgbClr val="3A7DC9"/>
-                </a:solidFill>
-              </a:rPr>
-              <a:t>MCP</a:t>
-            </a:r>
-            <a:endParaRPr lang="en-US" sz="1300" dirty="0"/>
-          </a:p>
-        </p:txBody>
-      </p:sp>
-      <p:sp>
-        <p:nvSpPr>
-          <p:cNvPr id="34" name="Text 32"/>
-          <p:cNvSpPr/>
-          <p:nvPr/>
-        </p:nvSpPr>
-        <p:spPr>
-          <a:xfrm>
-            <a:off x="4855464" y="4169664"/>
-            <a:ext cx="3931920" cy="420624"/>
-          </a:xfrm>
-          <a:prstGeom prst="rect">
-            <a:avLst/>
-          </a:prstGeom>
-          <a:noFill/>
-          <a:ln/>
-        </p:spPr>
-        <p:txBody>
-          <a:bodyPr wrap="square" lIns="0" tIns="0" rIns="0" bIns="0" rtlCol="0" anchor="ctr"/>
-          <a:lstStyle/>
-          <a:p>
-            <a:pPr indent="0" marL="0">
-              <a:buNone/>
-            </a:pPr>
-            <a:r>
-              <a:rPr lang="en-US" sz="1050" dirty="0">
-                <a:solidFill>
-                  <a:srgbClr val="D4E4F0"/>
-                </a:solidFill>
-              </a:rPr>
-              <a:t>Model Context Protocol — standard for agent-to-tool and agent-to-service integration</a:t>
-            </a:r>
-            <a:endParaRPr lang="en-US" sz="1050" dirty="0"/>
+              <a:t>Dep updates, security scans, debt</a:t>
+            </a:r>
+            <a:endParaRPr lang="en-US" sz="950" dirty="0"/>
+          </a:p>
+        </p:txBody>
+      </p:sp>
+      <p:sp>
+        <p:nvSpPr>
+          <p:cNvPr id="52" name="Text 50"/>
+          <p:cNvSpPr/>
+          <p:nvPr/>
+        </p:nvSpPr>
+        <p:spPr>
+          <a:xfrm>
+            <a:off x="5285232" y="4956048"/>
+            <a:ext cx="3429000" cy="429768"/>
+          </a:xfrm>
+          <a:prstGeom prst="rect">
+            <a:avLst/>
+          </a:prstGeom>
+          <a:noFill/>
+          <a:ln/>
+        </p:spPr>
+        <p:txBody>
+          <a:bodyPr wrap="square" lIns="0" tIns="0" rIns="0" bIns="0" rtlCol="0" anchor="ctr"/>
+          <a:lstStyle/>
+          <a:p>
+            <a:pPr indent="0" marL="0">
+              <a:buNone/>
+            </a:pPr>
+            <a:r>
+              <a:rPr lang="en-US" sz="900" i="1" dirty="0">
+                <a:solidFill>
+                  <a:srgbClr val="7A90A8"/>
+                </a:solidFill>
+              </a:rPr>
+              <a:t>Nightly run: scan deps, open low-risk update PRs</a:t>
+            </a:r>
+            <a:endParaRPr lang="en-US" sz="900" dirty="0"/>
+          </a:p>
+        </p:txBody>
+      </p:sp>
+      <p:sp>
+        <p:nvSpPr>
+          <p:cNvPr id="53" name="Text 51"/>
+          <p:cNvSpPr/>
+          <p:nvPr/>
+        </p:nvSpPr>
+        <p:spPr>
+          <a:xfrm>
+            <a:off x="320040" y="4956048"/>
+            <a:ext cx="8503920" cy="228600"/>
+          </a:xfrm>
+          <a:prstGeom prst="rect">
+            <a:avLst/>
+          </a:prstGeom>
+          <a:noFill/>
+          <a:ln/>
+        </p:spPr>
+        <p:txBody>
+          <a:bodyPr wrap="square" lIns="0" tIns="0" rIns="0" bIns="0" rtlCol="0" anchor="ctr"/>
+          <a:lstStyle/>
+          <a:p>
+            <a:pPr algn="ctr" indent="0" marL="0">
+              <a:buNone/>
+            </a:pPr>
+            <a:r>
+              <a:rPr lang="en-US" sz="950" i="1" dirty="0">
+                <a:solidFill>
+                  <a:srgbClr val="5B8DB8"/>
+                </a:solidFill>
+              </a:rPr>
+              <a:t>Most teams start with implementation only. The highest-value gains are often at ideation, design review, and operations — where quality problems are cheapest to fix.</a:t>
+            </a:r>
+            <a:endParaRPr lang="en-US" sz="950" dirty="0"/>
           </a:p>
         </p:txBody>
       </p:sp>
@@ -3314,7 +3952,7 @@
                   <a:srgbClr val="FFFFFF"/>
                 </a:solidFill>
               </a:rPr>
-              <a:t>LAB EXERCISE  ·  20 MINUTES</a:t>
+              <a:t>LAB EXERCISE  ·  25 MINUTES</a:t>
             </a:r>
             <a:endParaRPr lang="en-US" sz="1300" dirty="0"/>
           </a:p>
@@ -3328,31 +3966,31 @@
         </p:nvSpPr>
         <p:spPr>
           <a:xfrm>
-            <a:off x="365760" y="896112"/>
-            <a:ext cx="8412480" cy="457200"/>
-          </a:xfrm>
-          <a:prstGeom prst="rect">
-            <a:avLst/>
-          </a:prstGeom>
-          <a:noFill/>
-          <a:ln/>
-        </p:spPr>
-        <p:txBody>
-          <a:bodyPr wrap="square" lIns="0" tIns="0" rIns="0" bIns="0" rtlCol="0" anchor="ctr"/>
-          <a:lstStyle/>
-          <a:p>
-            <a:pPr indent="0" marL="0">
-              <a:buNone/>
-            </a:pPr>
-            <a:r>
-              <a:rPr lang="en-US" sz="2000" b="1" dirty="0">
+            <a:off x="365760" y="822960"/>
+            <a:ext cx="8412480" cy="365760"/>
+          </a:xfrm>
+          <a:prstGeom prst="rect">
+            <a:avLst/>
+          </a:prstGeom>
+          <a:noFill/>
+          <a:ln/>
+        </p:spPr>
+        <p:txBody>
+          <a:bodyPr wrap="square" lIns="0" tIns="0" rIns="0" bIns="0" rtlCol="0" anchor="ctr"/>
+          <a:lstStyle/>
+          <a:p>
+            <a:pPr indent="0" marL="0">
+              <a:buNone/>
+            </a:pPr>
+            <a:r>
+              <a:rPr lang="en-US" sz="1500" b="1" dirty="0">
                 <a:solidFill>
                   <a:srgbClr val="1C3557"/>
                 </a:solidFill>
               </a:rPr>
-              <a:t>Map Your Current Tools to the Autonomy Spectrum</a:t>
-            </a:r>
-            <a:endParaRPr lang="en-US" sz="2000" dirty="0"/>
+              <a:t>Map Scenarios to the Spectrum  ·  Audit Your Own Team's SDLC Coverage</a:t>
+            </a:r>
+            <a:endParaRPr lang="en-US" sz="1500" dirty="0"/>
           </a:p>
         </p:txBody>
       </p:sp>
@@ -3364,35 +4002,8 @@
         </p:nvSpPr>
         <p:spPr>
           <a:xfrm>
-            <a:off x="320040" y="1463040"/>
-            <a:ext cx="8503920" cy="777240"/>
-          </a:xfrm>
-          <a:prstGeom prst="rect">
-            <a:avLst/>
-          </a:prstGeom>
-          <a:solidFill>
-            <a:srgbClr val="F3F6F9"/>
-          </a:solidFill>
-          <a:ln/>
-          <a:effectLst>
-            <a:outerShdw sx="100000" sy="100000" kx="0" ky="0" algn="bl" rotWithShape="0" blurRad="101600" dist="38100" dir="8100000">
-              <a:srgbClr val="000000">
-                <a:alpha val="15000"/>
-              </a:srgbClr>
-            </a:outerShdw>
-          </a:effectLst>
-        </p:spPr>
-      </p:sp>
-      <p:sp>
-        <p:nvSpPr>
-          <p:cNvPr id="6" name="Shape 4"/>
-          <p:cNvSpPr/>
-          <p:nvPr/>
-        </p:nvSpPr>
-        <p:spPr>
-          <a:xfrm>
-            <a:off x="320040" y="1463040"/>
-            <a:ext cx="475488" cy="777240"/>
+            <a:off x="320040" y="1298448"/>
+            <a:ext cx="8503920" cy="347472"/>
           </a:xfrm>
           <a:prstGeom prst="rect">
             <a:avLst/>
@@ -3405,14 +4016,72 @@
       </p:sp>
       <p:sp>
         <p:nvSpPr>
-          <p:cNvPr id="7" name="Text 5"/>
-          <p:cNvSpPr/>
-          <p:nvPr/>
-        </p:nvSpPr>
-        <p:spPr>
-          <a:xfrm>
-            <a:off x="320040" y="1463040"/>
-            <a:ext cx="475488" cy="777240"/>
+          <p:cNvPr id="6" name="Text 4"/>
+          <p:cNvSpPr/>
+          <p:nvPr/>
+        </p:nvSpPr>
+        <p:spPr>
+          <a:xfrm>
+            <a:off x="384048" y="1298448"/>
+            <a:ext cx="8321040" cy="347472"/>
+          </a:xfrm>
+          <a:prstGeom prst="rect">
+            <a:avLst/>
+          </a:prstGeom>
+          <a:noFill/>
+          <a:ln/>
+        </p:spPr>
+        <p:txBody>
+          <a:bodyPr wrap="square" lIns="0" tIns="0" rIns="0" bIns="0" rtlCol="0" anchor="ctr"/>
+          <a:lstStyle/>
+          <a:p>
+            <a:pPr indent="0" marL="0">
+              <a:buNone/>
+            </a:pPr>
+            <a:r>
+              <a:rPr lang="en-US" sz="1200" b="1" dirty="0">
+                <a:solidFill>
+                  <a:srgbClr val="FFFFFF"/>
+                </a:solidFill>
+              </a:rPr>
+              <a:t>PART 1  ·  Map to the Spectrum  (12 min)</a:t>
+            </a:r>
+            <a:endParaRPr lang="en-US" sz="1200" dirty="0"/>
+          </a:p>
+        </p:txBody>
+      </p:sp>
+      <p:sp>
+        <p:nvSpPr>
+          <p:cNvPr id="7" name="Shape 5"/>
+          <p:cNvSpPr/>
+          <p:nvPr/>
+        </p:nvSpPr>
+        <p:spPr>
+          <a:xfrm>
+            <a:off x="320040" y="1719072"/>
+            <a:ext cx="347472" cy="347472"/>
+          </a:xfrm>
+          <a:prstGeom prst="rect">
+            <a:avLst/>
+          </a:prstGeom>
+          <a:solidFill>
+            <a:srgbClr val="3A7DC9">
+              <a:alpha val="80000"/>
+            </a:srgbClr>
+          </a:solidFill>
+          <a:ln/>
+        </p:spPr>
+      </p:sp>
+      <p:sp>
+        <p:nvSpPr>
+          <p:cNvPr id="8" name="Text 6"/>
+          <p:cNvSpPr/>
+          <p:nvPr/>
+        </p:nvSpPr>
+        <p:spPr>
+          <a:xfrm>
+            <a:off x="320040" y="1719072"/>
+            <a:ext cx="347472" cy="347472"/>
           </a:xfrm>
           <a:prstGeom prst="rect">
             <a:avLst/>
@@ -3428,693 +4097,552 @@
               <a:buNone/>
             </a:pPr>
             <a:r>
-              <a:rPr lang="en-US" sz="2200" b="1" dirty="0">
+              <a:rPr lang="en-US" sz="1300" b="1" dirty="0">
+                <a:solidFill>
+                  <a:srgbClr val="3A7DC9"/>
+                </a:solidFill>
+              </a:rPr>
+              <a:t>1</a:t>
+            </a:r>
+            <a:endParaRPr lang="en-US" sz="1300" dirty="0"/>
+          </a:p>
+        </p:txBody>
+      </p:sp>
+      <p:sp>
+        <p:nvSpPr>
+          <p:cNvPr id="9" name="Text 7"/>
+          <p:cNvSpPr/>
+          <p:nvPr/>
+        </p:nvSpPr>
+        <p:spPr>
+          <a:xfrm>
+            <a:off x="749808" y="1719072"/>
+            <a:ext cx="7955280" cy="347472"/>
+          </a:xfrm>
+          <a:prstGeom prst="rect">
+            <a:avLst/>
+          </a:prstGeom>
+          <a:noFill/>
+          <a:ln/>
+        </p:spPr>
+        <p:txBody>
+          <a:bodyPr wrap="square" lIns="0" tIns="0" rIns="0" bIns="0" rtlCol="0" anchor="ctr"/>
+          <a:lstStyle/>
+          <a:p>
+            <a:pPr indent="0" marL="0">
+              <a:buNone/>
+            </a:pPr>
+            <a:r>
+              <a:rPr lang="en-US" sz="1100" dirty="0">
+                <a:solidFill>
+                  <a:srgbClr val="1E2D3D"/>
+                </a:solidFill>
+              </a:rPr>
+              <a:t>A developer asks Copilot Chat to explain why the AuthService uses a refresh token pattern</a:t>
+            </a:r>
+            <a:endParaRPr lang="en-US" sz="1100" dirty="0"/>
+          </a:p>
+        </p:txBody>
+      </p:sp>
+      <p:sp>
+        <p:nvSpPr>
+          <p:cNvPr id="10" name="Shape 8"/>
+          <p:cNvSpPr/>
+          <p:nvPr/>
+        </p:nvSpPr>
+        <p:spPr>
+          <a:xfrm>
+            <a:off x="320040" y="2121408"/>
+            <a:ext cx="347472" cy="347472"/>
+          </a:xfrm>
+          <a:prstGeom prst="rect">
+            <a:avLst/>
+          </a:prstGeom>
+          <a:solidFill>
+            <a:srgbClr val="3A7DC9">
+              <a:alpha val="80000"/>
+            </a:srgbClr>
+          </a:solidFill>
+          <a:ln/>
+        </p:spPr>
+      </p:sp>
+      <p:sp>
+        <p:nvSpPr>
+          <p:cNvPr id="11" name="Text 9"/>
+          <p:cNvSpPr/>
+          <p:nvPr/>
+        </p:nvSpPr>
+        <p:spPr>
+          <a:xfrm>
+            <a:off x="320040" y="2121408"/>
+            <a:ext cx="347472" cy="347472"/>
+          </a:xfrm>
+          <a:prstGeom prst="rect">
+            <a:avLst/>
+          </a:prstGeom>
+          <a:noFill/>
+          <a:ln/>
+        </p:spPr>
+        <p:txBody>
+          <a:bodyPr wrap="square" lIns="0" tIns="0" rIns="0" bIns="0" rtlCol="0" anchor="ctr"/>
+          <a:lstStyle/>
+          <a:p>
+            <a:pPr algn="ctr" indent="0" marL="0">
+              <a:buNone/>
+            </a:pPr>
+            <a:r>
+              <a:rPr lang="en-US" sz="1300" b="1" dirty="0">
+                <a:solidFill>
+                  <a:srgbClr val="3A7DC9"/>
+                </a:solidFill>
+              </a:rPr>
+              <a:t>2</a:t>
+            </a:r>
+            <a:endParaRPr lang="en-US" sz="1300" dirty="0"/>
+          </a:p>
+        </p:txBody>
+      </p:sp>
+      <p:sp>
+        <p:nvSpPr>
+          <p:cNvPr id="12" name="Text 10"/>
+          <p:cNvSpPr/>
+          <p:nvPr/>
+        </p:nvSpPr>
+        <p:spPr>
+          <a:xfrm>
+            <a:off x="749808" y="2121408"/>
+            <a:ext cx="7955280" cy="347472"/>
+          </a:xfrm>
+          <a:prstGeom prst="rect">
+            <a:avLst/>
+          </a:prstGeom>
+          <a:noFill/>
+          <a:ln/>
+        </p:spPr>
+        <p:txBody>
+          <a:bodyPr wrap="square" lIns="0" tIns="0" rIns="0" bIns="0" rtlCol="0" anchor="ctr"/>
+          <a:lstStyle/>
+          <a:p>
+            <a:pPr indent="0" marL="0">
+              <a:buNone/>
+            </a:pPr>
+            <a:r>
+              <a:rPr lang="en-US" sz="1100" dirty="0">
+                <a:solidFill>
+                  <a:srgbClr val="1E2D3D"/>
+                </a:solidFill>
+              </a:rPr>
+              <a:t>Claude Code reviews a proposed database schema in a Jira ticket against the existing data model</a:t>
+            </a:r>
+            <a:endParaRPr lang="en-US" sz="1100" dirty="0"/>
+          </a:p>
+        </p:txBody>
+      </p:sp>
+      <p:sp>
+        <p:nvSpPr>
+          <p:cNvPr id="13" name="Shape 11"/>
+          <p:cNvSpPr/>
+          <p:nvPr/>
+        </p:nvSpPr>
+        <p:spPr>
+          <a:xfrm>
+            <a:off x="320040" y="2523744"/>
+            <a:ext cx="347472" cy="347472"/>
+          </a:xfrm>
+          <a:prstGeom prst="rect">
+            <a:avLst/>
+          </a:prstGeom>
+          <a:solidFill>
+            <a:srgbClr val="3A7DC9">
+              <a:alpha val="80000"/>
+            </a:srgbClr>
+          </a:solidFill>
+          <a:ln/>
+        </p:spPr>
+      </p:sp>
+      <p:sp>
+        <p:nvSpPr>
+          <p:cNvPr id="14" name="Text 12"/>
+          <p:cNvSpPr/>
+          <p:nvPr/>
+        </p:nvSpPr>
+        <p:spPr>
+          <a:xfrm>
+            <a:off x="320040" y="2523744"/>
+            <a:ext cx="347472" cy="347472"/>
+          </a:xfrm>
+          <a:prstGeom prst="rect">
+            <a:avLst/>
+          </a:prstGeom>
+          <a:noFill/>
+          <a:ln/>
+        </p:spPr>
+        <p:txBody>
+          <a:bodyPr wrap="square" lIns="0" tIns="0" rIns="0" bIns="0" rtlCol="0" anchor="ctr"/>
+          <a:lstStyle/>
+          <a:p>
+            <a:pPr algn="ctr" indent="0" marL="0">
+              <a:buNone/>
+            </a:pPr>
+            <a:r>
+              <a:rPr lang="en-US" sz="1300" b="1" dirty="0">
+                <a:solidFill>
+                  <a:srgbClr val="3A7DC9"/>
+                </a:solidFill>
+              </a:rPr>
+              <a:t>3</a:t>
+            </a:r>
+            <a:endParaRPr lang="en-US" sz="1300" dirty="0"/>
+          </a:p>
+        </p:txBody>
+      </p:sp>
+      <p:sp>
+        <p:nvSpPr>
+          <p:cNvPr id="15" name="Text 13"/>
+          <p:cNvSpPr/>
+          <p:nvPr/>
+        </p:nvSpPr>
+        <p:spPr>
+          <a:xfrm>
+            <a:off x="749808" y="2523744"/>
+            <a:ext cx="7955280" cy="347472"/>
+          </a:xfrm>
+          <a:prstGeom prst="rect">
+            <a:avLst/>
+          </a:prstGeom>
+          <a:noFill/>
+          <a:ln/>
+        </p:spPr>
+        <p:txBody>
+          <a:bodyPr wrap="square" lIns="0" tIns="0" rIns="0" bIns="0" rtlCol="0" anchor="ctr"/>
+          <a:lstStyle/>
+          <a:p>
+            <a:pPr indent="0" marL="0">
+              <a:buNone/>
+            </a:pPr>
+            <a:r>
+              <a:rPr lang="en-US" sz="1100" dirty="0">
+                <a:solidFill>
+                  <a:srgbClr val="1E2D3D"/>
+                </a:solidFill>
+              </a:rPr>
+              <a:t>A developer runs claude "implement task 4 from TASKS.md, write tests, open a PR" in their terminal</a:t>
+            </a:r>
+            <a:endParaRPr lang="en-US" sz="1100" dirty="0"/>
+          </a:p>
+        </p:txBody>
+      </p:sp>
+      <p:sp>
+        <p:nvSpPr>
+          <p:cNvPr id="16" name="Shape 14"/>
+          <p:cNvSpPr/>
+          <p:nvPr/>
+        </p:nvSpPr>
+        <p:spPr>
+          <a:xfrm>
+            <a:off x="320040" y="2926080"/>
+            <a:ext cx="347472" cy="347472"/>
+          </a:xfrm>
+          <a:prstGeom prst="rect">
+            <a:avLst/>
+          </a:prstGeom>
+          <a:solidFill>
+            <a:srgbClr val="3A7DC9">
+              <a:alpha val="80000"/>
+            </a:srgbClr>
+          </a:solidFill>
+          <a:ln/>
+        </p:spPr>
+      </p:sp>
+      <p:sp>
+        <p:nvSpPr>
+          <p:cNvPr id="17" name="Text 15"/>
+          <p:cNvSpPr/>
+          <p:nvPr/>
+        </p:nvSpPr>
+        <p:spPr>
+          <a:xfrm>
+            <a:off x="320040" y="2926080"/>
+            <a:ext cx="347472" cy="347472"/>
+          </a:xfrm>
+          <a:prstGeom prst="rect">
+            <a:avLst/>
+          </a:prstGeom>
+          <a:noFill/>
+          <a:ln/>
+        </p:spPr>
+        <p:txBody>
+          <a:bodyPr wrap="square" lIns="0" tIns="0" rIns="0" bIns="0" rtlCol="0" anchor="ctr"/>
+          <a:lstStyle/>
+          <a:p>
+            <a:pPr algn="ctr" indent="0" marL="0">
+              <a:buNone/>
+            </a:pPr>
+            <a:r>
+              <a:rPr lang="en-US" sz="1300" b="1" dirty="0">
+                <a:solidFill>
+                  <a:srgbClr val="3A7DC9"/>
+                </a:solidFill>
+              </a:rPr>
+              <a:t>4</a:t>
+            </a:r>
+            <a:endParaRPr lang="en-US" sz="1300" dirty="0"/>
+          </a:p>
+        </p:txBody>
+      </p:sp>
+      <p:sp>
+        <p:nvSpPr>
+          <p:cNvPr id="18" name="Text 16"/>
+          <p:cNvSpPr/>
+          <p:nvPr/>
+        </p:nvSpPr>
+        <p:spPr>
+          <a:xfrm>
+            <a:off x="749808" y="2926080"/>
+            <a:ext cx="7955280" cy="347472"/>
+          </a:xfrm>
+          <a:prstGeom prst="rect">
+            <a:avLst/>
+          </a:prstGeom>
+          <a:noFill/>
+          <a:ln/>
+        </p:spPr>
+        <p:txBody>
+          <a:bodyPr wrap="square" lIns="0" tIns="0" rIns="0" bIns="0" rtlCol="0" anchor="ctr"/>
+          <a:lstStyle/>
+          <a:p>
+            <a:pPr indent="0" marL="0">
+              <a:buNone/>
+            </a:pPr>
+            <a:r>
+              <a:rPr lang="en-US" sz="1100" dirty="0">
+                <a:solidFill>
+                  <a:srgbClr val="1E2D3D"/>
+                </a:solidFill>
+              </a:rPr>
+              <a:t>Claude Code triggers nightly: scan for dependency vulnerabilities, open PRs for Tier-1 updates</a:t>
+            </a:r>
+            <a:endParaRPr lang="en-US" sz="1100" dirty="0"/>
+          </a:p>
+        </p:txBody>
+      </p:sp>
+      <p:sp>
+        <p:nvSpPr>
+          <p:cNvPr id="19" name="Shape 17"/>
+          <p:cNvSpPr/>
+          <p:nvPr/>
+        </p:nvSpPr>
+        <p:spPr>
+          <a:xfrm>
+            <a:off x="320040" y="3328416"/>
+            <a:ext cx="347472" cy="347472"/>
+          </a:xfrm>
+          <a:prstGeom prst="rect">
+            <a:avLst/>
+          </a:prstGeom>
+          <a:solidFill>
+            <a:srgbClr val="3A7DC9">
+              <a:alpha val="80000"/>
+            </a:srgbClr>
+          </a:solidFill>
+          <a:ln/>
+        </p:spPr>
+      </p:sp>
+      <p:sp>
+        <p:nvSpPr>
+          <p:cNvPr id="20" name="Text 18"/>
+          <p:cNvSpPr/>
+          <p:nvPr/>
+        </p:nvSpPr>
+        <p:spPr>
+          <a:xfrm>
+            <a:off x="320040" y="3328416"/>
+            <a:ext cx="347472" cy="347472"/>
+          </a:xfrm>
+          <a:prstGeom prst="rect">
+            <a:avLst/>
+          </a:prstGeom>
+          <a:noFill/>
+          <a:ln/>
+        </p:spPr>
+        <p:txBody>
+          <a:bodyPr wrap="square" lIns="0" tIns="0" rIns="0" bIns="0" rtlCol="0" anchor="ctr"/>
+          <a:lstStyle/>
+          <a:p>
+            <a:pPr algn="ctr" indent="0" marL="0">
+              <a:buNone/>
+            </a:pPr>
+            <a:r>
+              <a:rPr lang="en-US" sz="1300" b="1" dirty="0">
+                <a:solidFill>
+                  <a:srgbClr val="3A7DC9"/>
+                </a:solidFill>
+              </a:rPr>
+              <a:t>5</a:t>
+            </a:r>
+            <a:endParaRPr lang="en-US" sz="1300" dirty="0"/>
+          </a:p>
+        </p:txBody>
+      </p:sp>
+      <p:sp>
+        <p:nvSpPr>
+          <p:cNvPr id="21" name="Text 19"/>
+          <p:cNvSpPr/>
+          <p:nvPr/>
+        </p:nvSpPr>
+        <p:spPr>
+          <a:xfrm>
+            <a:off x="749808" y="3328416"/>
+            <a:ext cx="7955280" cy="347472"/>
+          </a:xfrm>
+          <a:prstGeom prst="rect">
+            <a:avLst/>
+          </a:prstGeom>
+          <a:noFill/>
+          <a:ln/>
+        </p:spPr>
+        <p:txBody>
+          <a:bodyPr wrap="square" lIns="0" tIns="0" rIns="0" bIns="0" rtlCol="0" anchor="ctr"/>
+          <a:lstStyle/>
+          <a:p>
+            <a:pPr indent="0" marL="0">
+              <a:buNone/>
+            </a:pPr>
+            <a:r>
+              <a:rPr lang="en-US" sz="1100" dirty="0">
+                <a:solidFill>
+                  <a:srgbClr val="1E2D3D"/>
+                </a:solidFill>
+              </a:rPr>
+              <a:t>Claude Code walks a new team member through the payment flow — files to read, design rationale, constraints</a:t>
+            </a:r>
+            <a:endParaRPr lang="en-US" sz="1100" dirty="0"/>
+          </a:p>
+        </p:txBody>
+      </p:sp>
+      <p:sp>
+        <p:nvSpPr>
+          <p:cNvPr id="22" name="Text 20"/>
+          <p:cNvSpPr/>
+          <p:nvPr/>
+        </p:nvSpPr>
+        <p:spPr>
+          <a:xfrm>
+            <a:off x="320040" y="3767328"/>
+            <a:ext cx="8503920" cy="256032"/>
+          </a:xfrm>
+          <a:prstGeom prst="rect">
+            <a:avLst/>
+          </a:prstGeom>
+          <a:noFill/>
+          <a:ln/>
+        </p:spPr>
+        <p:txBody>
+          <a:bodyPr wrap="square" lIns="0" tIns="0" rIns="0" bIns="0" rtlCol="0" anchor="ctr"/>
+          <a:lstStyle/>
+          <a:p>
+            <a:pPr indent="0" marL="0">
+              <a:buNone/>
+            </a:pPr>
+            <a:r>
+              <a:rPr lang="en-US" sz="1050" b="1" i="1" dirty="0">
+                <a:solidFill>
+                  <a:srgbClr val="4A7FA8"/>
+                </a:solidFill>
+              </a:rPr>
+              <a:t>For each: Where on the spectrum? Which tool fits best? Where is the human?</a:t>
+            </a:r>
+            <a:endParaRPr lang="en-US" sz="1050" dirty="0"/>
+          </a:p>
+        </p:txBody>
+      </p:sp>
+      <p:sp>
+        <p:nvSpPr>
+          <p:cNvPr id="23" name="Shape 21"/>
+          <p:cNvSpPr/>
+          <p:nvPr/>
+        </p:nvSpPr>
+        <p:spPr>
+          <a:xfrm>
+            <a:off x="320040" y="4078224"/>
+            <a:ext cx="8503920" cy="347472"/>
+          </a:xfrm>
+          <a:prstGeom prst="rect">
+            <a:avLst/>
+          </a:prstGeom>
+          <a:solidFill>
+            <a:srgbClr val="1C3557"/>
+          </a:solidFill>
+          <a:ln/>
+        </p:spPr>
+      </p:sp>
+      <p:sp>
+        <p:nvSpPr>
+          <p:cNvPr id="24" name="Text 22"/>
+          <p:cNvSpPr/>
+          <p:nvPr/>
+        </p:nvSpPr>
+        <p:spPr>
+          <a:xfrm>
+            <a:off x="384048" y="4078224"/>
+            <a:ext cx="8321040" cy="347472"/>
+          </a:xfrm>
+          <a:prstGeom prst="rect">
+            <a:avLst/>
+          </a:prstGeom>
+          <a:noFill/>
+          <a:ln/>
+        </p:spPr>
+        <p:txBody>
+          <a:bodyPr wrap="square" lIns="0" tIns="0" rIns="0" bIns="0" rtlCol="0" anchor="ctr"/>
+          <a:lstStyle/>
+          <a:p>
+            <a:pPr indent="0" marL="0">
+              <a:buNone/>
+            </a:pPr>
+            <a:r>
+              <a:rPr lang="en-US" sz="1200" b="1" dirty="0">
                 <a:solidFill>
                   <a:srgbClr val="FFFFFF"/>
                 </a:solidFill>
               </a:rPr>
-              <a:t>1</a:t>
-            </a:r>
-            <a:endParaRPr lang="en-US" sz="2200" dirty="0"/>
-          </a:p>
-        </p:txBody>
-      </p:sp>
-      <p:sp>
-        <p:nvSpPr>
-          <p:cNvPr id="8" name="Text 6"/>
-          <p:cNvSpPr/>
-          <p:nvPr/>
-        </p:nvSpPr>
-        <p:spPr>
-          <a:xfrm>
-            <a:off x="896112" y="1517904"/>
-            <a:ext cx="1097280" cy="292608"/>
-          </a:xfrm>
-          <a:prstGeom prst="rect">
-            <a:avLst/>
-          </a:prstGeom>
-          <a:noFill/>
-          <a:ln/>
-        </p:spPr>
-        <p:txBody>
-          <a:bodyPr wrap="square" lIns="0" tIns="0" rIns="0" bIns="0" rtlCol="0" anchor="ctr"/>
-          <a:lstStyle/>
-          <a:p>
-            <a:pPr indent="0" marL="0">
-              <a:buNone/>
-            </a:pPr>
-            <a:r>
-              <a:rPr lang="en-US" sz="1300" b="1" dirty="0">
-                <a:solidFill>
-                  <a:srgbClr val="4A7FA8"/>
-                </a:solidFill>
-              </a:rPr>
-              <a:t>Inventory</a:t>
-            </a:r>
-            <a:endParaRPr lang="en-US" sz="1300" dirty="0"/>
-          </a:p>
-        </p:txBody>
-      </p:sp>
-      <p:sp>
-        <p:nvSpPr>
-          <p:cNvPr id="9" name="Text 7"/>
-          <p:cNvSpPr/>
-          <p:nvPr/>
-        </p:nvSpPr>
-        <p:spPr>
-          <a:xfrm>
-            <a:off x="1993392" y="1517904"/>
-            <a:ext cx="822960" cy="292608"/>
-          </a:xfrm>
-          <a:prstGeom prst="rect">
-            <a:avLst/>
-          </a:prstGeom>
-          <a:noFill/>
-          <a:ln/>
-        </p:spPr>
-        <p:txBody>
-          <a:bodyPr wrap="square" lIns="0" tIns="0" rIns="0" bIns="0" rtlCol="0" anchor="ctr"/>
-          <a:lstStyle/>
-          <a:p>
-            <a:pPr indent="0" marL="0">
-              <a:buNone/>
-            </a:pPr>
-            <a:r>
-              <a:rPr lang="en-US" sz="1100" i="1" dirty="0">
+              <a:t>PART 2  ·  Audit Your Team's SDLC Coverage  (13 min)</a:t>
+            </a:r>
+            <a:endParaRPr lang="en-US" sz="1200" dirty="0"/>
+          </a:p>
+        </p:txBody>
+      </p:sp>
+      <p:sp>
+        <p:nvSpPr>
+          <p:cNvPr id="25" name="Text 23"/>
+          <p:cNvSpPr/>
+          <p:nvPr/>
+        </p:nvSpPr>
+        <p:spPr>
+          <a:xfrm>
+            <a:off x="384048" y="4480560"/>
+            <a:ext cx="8321040" cy="548640"/>
+          </a:xfrm>
+          <a:prstGeom prst="rect">
+            <a:avLst/>
+          </a:prstGeom>
+          <a:noFill/>
+          <a:ln/>
+        </p:spPr>
+        <p:txBody>
+          <a:bodyPr wrap="square" lIns="0" tIns="0" rIns="0" bIns="0" rtlCol="0" anchor="ctr"/>
+          <a:lstStyle/>
+          <a:p>
+            <a:pPr indent="0" marL="0">
+              <a:buNone/>
+            </a:pPr>
+            <a:r>
+              <a:rPr lang="en-US" sz="1100" dirty="0">
                 <a:solidFill>
                   <a:srgbClr val="7A90A8"/>
                 </a:solidFill>
               </a:rPr>
-              <a:t>(5 min)</a:t>
-            </a:r>
-            <a:endParaRPr lang="en-US" sz="1100" dirty="0"/>
-          </a:p>
-        </p:txBody>
-      </p:sp>
-      <p:sp>
-        <p:nvSpPr>
-          <p:cNvPr id="10" name="Text 8"/>
-          <p:cNvSpPr/>
-          <p:nvPr/>
-        </p:nvSpPr>
-        <p:spPr>
-          <a:xfrm>
-            <a:off x="896112" y="1847088"/>
-            <a:ext cx="7818120" cy="347472"/>
-          </a:xfrm>
-          <a:prstGeom prst="rect">
-            <a:avLst/>
-          </a:prstGeom>
-          <a:noFill/>
-          <a:ln/>
-        </p:spPr>
-        <p:txBody>
-          <a:bodyPr wrap="square" lIns="0" tIns="0" rIns="0" bIns="0" rtlCol="0" anchor="ctr"/>
-          <a:lstStyle/>
-          <a:p>
-            <a:pPr indent="0" marL="0">
-              <a:buNone/>
-            </a:pPr>
-            <a:r>
-              <a:rPr lang="en-US" sz="1100" dirty="0">
-                <a:solidFill>
-                  <a:srgbClr val="7A90A8"/>
-                </a:solidFill>
-              </a:rPr>
-              <a:t>List 5–8 development tasks you performed last week. Be specific (e.g., 'added null check to payment handler', 'reviewed PR #2341').</a:t>
-            </a:r>
-            <a:endParaRPr lang="en-US" sz="1100" dirty="0"/>
-          </a:p>
-        </p:txBody>
-      </p:sp>
-      <p:sp>
-        <p:nvSpPr>
-          <p:cNvPr id="11" name="Shape 9"/>
-          <p:cNvSpPr/>
-          <p:nvPr/>
-        </p:nvSpPr>
-        <p:spPr>
-          <a:xfrm>
-            <a:off x="320040" y="2331720"/>
-            <a:ext cx="8503920" cy="777240"/>
-          </a:xfrm>
-          <a:prstGeom prst="rect">
-            <a:avLst/>
-          </a:prstGeom>
-          <a:solidFill>
-            <a:srgbClr val="F3F6F9"/>
-          </a:solidFill>
-          <a:ln/>
-          <a:effectLst>
-            <a:outerShdw sx="100000" sy="100000" kx="0" ky="0" algn="bl" rotWithShape="0" blurRad="101600" dist="38100" dir="8100000">
-              <a:srgbClr val="000000">
-                <a:alpha val="15000"/>
-              </a:srgbClr>
-            </a:outerShdw>
-          </a:effectLst>
-        </p:spPr>
-      </p:sp>
-      <p:sp>
-        <p:nvSpPr>
-          <p:cNvPr id="12" name="Shape 10"/>
-          <p:cNvSpPr/>
-          <p:nvPr/>
-        </p:nvSpPr>
-        <p:spPr>
-          <a:xfrm>
-            <a:off x="320040" y="2331720"/>
-            <a:ext cx="475488" cy="777240"/>
-          </a:xfrm>
-          <a:prstGeom prst="rect">
-            <a:avLst/>
-          </a:prstGeom>
-          <a:solidFill>
-            <a:srgbClr val="4A7FA8"/>
-          </a:solidFill>
-          <a:ln/>
-        </p:spPr>
-      </p:sp>
-      <p:sp>
-        <p:nvSpPr>
-          <p:cNvPr id="13" name="Text 11"/>
-          <p:cNvSpPr/>
-          <p:nvPr/>
-        </p:nvSpPr>
-        <p:spPr>
-          <a:xfrm>
-            <a:off x="320040" y="2331720"/>
-            <a:ext cx="475488" cy="777240"/>
-          </a:xfrm>
-          <a:prstGeom prst="rect">
-            <a:avLst/>
-          </a:prstGeom>
-          <a:noFill/>
-          <a:ln/>
-        </p:spPr>
-        <p:txBody>
-          <a:bodyPr wrap="square" lIns="0" tIns="0" rIns="0" bIns="0" rtlCol="0" anchor="ctr"/>
-          <a:lstStyle/>
-          <a:p>
-            <a:pPr algn="ctr" indent="0" marL="0">
-              <a:buNone/>
-            </a:pPr>
-            <a:r>
-              <a:rPr lang="en-US" sz="2200" b="1" dirty="0">
-                <a:solidFill>
-                  <a:srgbClr val="FFFFFF"/>
-                </a:solidFill>
-              </a:rPr>
-              <a:t>2</a:t>
-            </a:r>
-            <a:endParaRPr lang="en-US" sz="2200" dirty="0"/>
-          </a:p>
-        </p:txBody>
-      </p:sp>
-      <p:sp>
-        <p:nvSpPr>
-          <p:cNvPr id="14" name="Text 12"/>
-          <p:cNvSpPr/>
-          <p:nvPr/>
-        </p:nvSpPr>
-        <p:spPr>
-          <a:xfrm>
-            <a:off x="896112" y="2386584"/>
-            <a:ext cx="1097280" cy="292608"/>
-          </a:xfrm>
-          <a:prstGeom prst="rect">
-            <a:avLst/>
-          </a:prstGeom>
-          <a:noFill/>
-          <a:ln/>
-        </p:spPr>
-        <p:txBody>
-          <a:bodyPr wrap="square" lIns="0" tIns="0" rIns="0" bIns="0" rtlCol="0" anchor="ctr"/>
-          <a:lstStyle/>
-          <a:p>
-            <a:pPr indent="0" marL="0">
-              <a:buNone/>
-            </a:pPr>
-            <a:r>
-              <a:rPr lang="en-US" sz="1300" b="1" dirty="0">
-                <a:solidFill>
-                  <a:srgbClr val="4A7FA8"/>
-                </a:solidFill>
-              </a:rPr>
-              <a:t>Classify</a:t>
-            </a:r>
-            <a:endParaRPr lang="en-US" sz="1300" dirty="0"/>
-          </a:p>
-        </p:txBody>
-      </p:sp>
-      <p:sp>
-        <p:nvSpPr>
-          <p:cNvPr id="15" name="Text 13"/>
-          <p:cNvSpPr/>
-          <p:nvPr/>
-        </p:nvSpPr>
-        <p:spPr>
-          <a:xfrm>
-            <a:off x="1993392" y="2386584"/>
-            <a:ext cx="822960" cy="292608"/>
-          </a:xfrm>
-          <a:prstGeom prst="rect">
-            <a:avLst/>
-          </a:prstGeom>
-          <a:noFill/>
-          <a:ln/>
-        </p:spPr>
-        <p:txBody>
-          <a:bodyPr wrap="square" lIns="0" tIns="0" rIns="0" bIns="0" rtlCol="0" anchor="ctr"/>
-          <a:lstStyle/>
-          <a:p>
-            <a:pPr indent="0" marL="0">
-              <a:buNone/>
-            </a:pPr>
-            <a:r>
-              <a:rPr lang="en-US" sz="1100" i="1" dirty="0">
-                <a:solidFill>
-                  <a:srgbClr val="7A90A8"/>
-                </a:solidFill>
-              </a:rPr>
-              <a:t>(7 min)</a:t>
-            </a:r>
-            <a:endParaRPr lang="en-US" sz="1100" dirty="0"/>
-          </a:p>
-        </p:txBody>
-      </p:sp>
-      <p:sp>
-        <p:nvSpPr>
-          <p:cNvPr id="16" name="Text 14"/>
-          <p:cNvSpPr/>
-          <p:nvPr/>
-        </p:nvSpPr>
-        <p:spPr>
-          <a:xfrm>
-            <a:off x="896112" y="2715768"/>
-            <a:ext cx="7818120" cy="347472"/>
-          </a:xfrm>
-          <a:prstGeom prst="rect">
-            <a:avLst/>
-          </a:prstGeom>
-          <a:noFill/>
-          <a:ln/>
-        </p:spPr>
-        <p:txBody>
-          <a:bodyPr wrap="square" lIns="0" tIns="0" rIns="0" bIns="0" rtlCol="0" anchor="ctr"/>
-          <a:lstStyle/>
-          <a:p>
-            <a:pPr indent="0" marL="0">
-              <a:buNone/>
-            </a:pPr>
-            <a:r>
-              <a:rPr lang="en-US" sz="1100" dirty="0">
-                <a:solidFill>
-                  <a:srgbClr val="7A90A8"/>
-                </a:solidFill>
-              </a:rPr>
-              <a:t>Place each task on the autonomy spectrum: Tier 1 (fully automate), Tier 2 (supervised), or Tier 3 (human-directed). Justify your reasoning.</a:t>
-            </a:r>
-            <a:endParaRPr lang="en-US" sz="1100" dirty="0"/>
-          </a:p>
-        </p:txBody>
-      </p:sp>
-      <p:sp>
-        <p:nvSpPr>
-          <p:cNvPr id="17" name="Shape 15"/>
-          <p:cNvSpPr/>
-          <p:nvPr/>
-        </p:nvSpPr>
-        <p:spPr>
-          <a:xfrm>
-            <a:off x="320040" y="3200400"/>
-            <a:ext cx="8503920" cy="777240"/>
-          </a:xfrm>
-          <a:prstGeom prst="rect">
-            <a:avLst/>
-          </a:prstGeom>
-          <a:solidFill>
-            <a:srgbClr val="F3F6F9"/>
-          </a:solidFill>
-          <a:ln/>
-          <a:effectLst>
-            <a:outerShdw sx="100000" sy="100000" kx="0" ky="0" algn="bl" rotWithShape="0" blurRad="101600" dist="38100" dir="8100000">
-              <a:srgbClr val="000000">
-                <a:alpha val="15000"/>
-              </a:srgbClr>
-            </a:outerShdw>
-          </a:effectLst>
-        </p:spPr>
-      </p:sp>
-      <p:sp>
-        <p:nvSpPr>
-          <p:cNvPr id="18" name="Shape 16"/>
-          <p:cNvSpPr/>
-          <p:nvPr/>
-        </p:nvSpPr>
-        <p:spPr>
-          <a:xfrm>
-            <a:off x="320040" y="3200400"/>
-            <a:ext cx="475488" cy="777240"/>
-          </a:xfrm>
-          <a:prstGeom prst="rect">
-            <a:avLst/>
-          </a:prstGeom>
-          <a:solidFill>
-            <a:srgbClr val="4A7FA8"/>
-          </a:solidFill>
-          <a:ln/>
-        </p:spPr>
-      </p:sp>
-      <p:sp>
-        <p:nvSpPr>
-          <p:cNvPr id="19" name="Text 17"/>
-          <p:cNvSpPr/>
-          <p:nvPr/>
-        </p:nvSpPr>
-        <p:spPr>
-          <a:xfrm>
-            <a:off x="320040" y="3200400"/>
-            <a:ext cx="475488" cy="777240"/>
-          </a:xfrm>
-          <a:prstGeom prst="rect">
-            <a:avLst/>
-          </a:prstGeom>
-          <a:noFill/>
-          <a:ln/>
-        </p:spPr>
-        <p:txBody>
-          <a:bodyPr wrap="square" lIns="0" tIns="0" rIns="0" bIns="0" rtlCol="0" anchor="ctr"/>
-          <a:lstStyle/>
-          <a:p>
-            <a:pPr algn="ctr" indent="0" marL="0">
-              <a:buNone/>
-            </a:pPr>
-            <a:r>
-              <a:rPr lang="en-US" sz="2200" b="1" dirty="0">
-                <a:solidFill>
-                  <a:srgbClr val="FFFFFF"/>
-                </a:solidFill>
-              </a:rPr>
-              <a:t>3</a:t>
-            </a:r>
-            <a:endParaRPr lang="en-US" sz="2200" dirty="0"/>
-          </a:p>
-        </p:txBody>
-      </p:sp>
-      <p:sp>
-        <p:nvSpPr>
-          <p:cNvPr id="20" name="Text 18"/>
-          <p:cNvSpPr/>
-          <p:nvPr/>
-        </p:nvSpPr>
-        <p:spPr>
-          <a:xfrm>
-            <a:off x="896112" y="3255264"/>
-            <a:ext cx="1097280" cy="292608"/>
-          </a:xfrm>
-          <a:prstGeom prst="rect">
-            <a:avLst/>
-          </a:prstGeom>
-          <a:noFill/>
-          <a:ln/>
-        </p:spPr>
-        <p:txBody>
-          <a:bodyPr wrap="square" lIns="0" tIns="0" rIns="0" bIns="0" rtlCol="0" anchor="ctr"/>
-          <a:lstStyle/>
-          <a:p>
-            <a:pPr indent="0" marL="0">
-              <a:buNone/>
-            </a:pPr>
-            <a:r>
-              <a:rPr lang="en-US" sz="1300" b="1" dirty="0">
-                <a:solidFill>
-                  <a:srgbClr val="4A7FA8"/>
-                </a:solidFill>
-              </a:rPr>
-              <a:t>Identify</a:t>
-            </a:r>
-            <a:endParaRPr lang="en-US" sz="1300" dirty="0"/>
-          </a:p>
-        </p:txBody>
-      </p:sp>
-      <p:sp>
-        <p:nvSpPr>
-          <p:cNvPr id="21" name="Text 19"/>
-          <p:cNvSpPr/>
-          <p:nvPr/>
-        </p:nvSpPr>
-        <p:spPr>
-          <a:xfrm>
-            <a:off x="1993392" y="3255264"/>
-            <a:ext cx="822960" cy="292608"/>
-          </a:xfrm>
-          <a:prstGeom prst="rect">
-            <a:avLst/>
-          </a:prstGeom>
-          <a:noFill/>
-          <a:ln/>
-        </p:spPr>
-        <p:txBody>
-          <a:bodyPr wrap="square" lIns="0" tIns="0" rIns="0" bIns="0" rtlCol="0" anchor="ctr"/>
-          <a:lstStyle/>
-          <a:p>
-            <a:pPr indent="0" marL="0">
-              <a:buNone/>
-            </a:pPr>
-            <a:r>
-              <a:rPr lang="en-US" sz="1100" i="1" dirty="0">
-                <a:solidFill>
-                  <a:srgbClr val="7A90A8"/>
-                </a:solidFill>
-              </a:rPr>
-              <a:t>(5 min)</a:t>
-            </a:r>
-            <a:endParaRPr lang="en-US" sz="1100" dirty="0"/>
-          </a:p>
-        </p:txBody>
-      </p:sp>
-      <p:sp>
-        <p:nvSpPr>
-          <p:cNvPr id="22" name="Text 20"/>
-          <p:cNvSpPr/>
-          <p:nvPr/>
-        </p:nvSpPr>
-        <p:spPr>
-          <a:xfrm>
-            <a:off x="896112" y="3584448"/>
-            <a:ext cx="7818120" cy="347472"/>
-          </a:xfrm>
-          <a:prstGeom prst="rect">
-            <a:avLst/>
-          </a:prstGeom>
-          <a:noFill/>
-          <a:ln/>
-        </p:spPr>
-        <p:txBody>
-          <a:bodyPr wrap="square" lIns="0" tIns="0" rIns="0" bIns="0" rtlCol="0" anchor="ctr"/>
-          <a:lstStyle/>
-          <a:p>
-            <a:pPr indent="0" marL="0">
-              <a:buNone/>
-            </a:pPr>
-            <a:r>
-              <a:rPr lang="en-US" sz="1100" dirty="0">
-                <a:solidFill>
-                  <a:srgbClr val="7A90A8"/>
-                </a:solidFill>
-              </a:rPr>
-              <a:t>For your Tier 1 and 2 tasks: what context (files, specs, rules) would an agent need to complete them reliably?</a:t>
-            </a:r>
-            <a:endParaRPr lang="en-US" sz="1100" dirty="0"/>
-          </a:p>
-        </p:txBody>
-      </p:sp>
-      <p:sp>
-        <p:nvSpPr>
-          <p:cNvPr id="23" name="Shape 21"/>
-          <p:cNvSpPr/>
-          <p:nvPr/>
-        </p:nvSpPr>
-        <p:spPr>
-          <a:xfrm>
-            <a:off x="320040" y="4069080"/>
-            <a:ext cx="8503920" cy="777240"/>
-          </a:xfrm>
-          <a:prstGeom prst="rect">
-            <a:avLst/>
-          </a:prstGeom>
-          <a:solidFill>
-            <a:srgbClr val="F3F6F9"/>
-          </a:solidFill>
-          <a:ln/>
-          <a:effectLst>
-            <a:outerShdw sx="100000" sy="100000" kx="0" ky="0" algn="bl" rotWithShape="0" blurRad="101600" dist="38100" dir="8100000">
-              <a:srgbClr val="000000">
-                <a:alpha val="15000"/>
-              </a:srgbClr>
-            </a:outerShdw>
-          </a:effectLst>
-        </p:spPr>
-      </p:sp>
-      <p:sp>
-        <p:nvSpPr>
-          <p:cNvPr id="24" name="Shape 22"/>
-          <p:cNvSpPr/>
-          <p:nvPr/>
-        </p:nvSpPr>
-        <p:spPr>
-          <a:xfrm>
-            <a:off x="320040" y="4069080"/>
-            <a:ext cx="475488" cy="777240"/>
-          </a:xfrm>
-          <a:prstGeom prst="rect">
-            <a:avLst/>
-          </a:prstGeom>
-          <a:solidFill>
-            <a:srgbClr val="4A7FA8"/>
-          </a:solidFill>
-          <a:ln/>
-        </p:spPr>
-      </p:sp>
-      <p:sp>
-        <p:nvSpPr>
-          <p:cNvPr id="25" name="Text 23"/>
-          <p:cNvSpPr/>
-          <p:nvPr/>
-        </p:nvSpPr>
-        <p:spPr>
-          <a:xfrm>
-            <a:off x="320040" y="4069080"/>
-            <a:ext cx="475488" cy="777240"/>
-          </a:xfrm>
-          <a:prstGeom prst="rect">
-            <a:avLst/>
-          </a:prstGeom>
-          <a:noFill/>
-          <a:ln/>
-        </p:spPr>
-        <p:txBody>
-          <a:bodyPr wrap="square" lIns="0" tIns="0" rIns="0" bIns="0" rtlCol="0" anchor="ctr"/>
-          <a:lstStyle/>
-          <a:p>
-            <a:pPr algn="ctr" indent="0" marL="0">
-              <a:buNone/>
-            </a:pPr>
-            <a:r>
-              <a:rPr lang="en-US" sz="2200" b="1" dirty="0">
-                <a:solidFill>
-                  <a:srgbClr val="FFFFFF"/>
-                </a:solidFill>
-              </a:rPr>
-              <a:t>4</a:t>
-            </a:r>
-            <a:endParaRPr lang="en-US" sz="2200" dirty="0"/>
-          </a:p>
-        </p:txBody>
-      </p:sp>
-      <p:sp>
-        <p:nvSpPr>
-          <p:cNvPr id="26" name="Text 24"/>
-          <p:cNvSpPr/>
-          <p:nvPr/>
-        </p:nvSpPr>
-        <p:spPr>
-          <a:xfrm>
-            <a:off x="896112" y="4123944"/>
-            <a:ext cx="1097280" cy="292608"/>
-          </a:xfrm>
-          <a:prstGeom prst="rect">
-            <a:avLst/>
-          </a:prstGeom>
-          <a:noFill/>
-          <a:ln/>
-        </p:spPr>
-        <p:txBody>
-          <a:bodyPr wrap="square" lIns="0" tIns="0" rIns="0" bIns="0" rtlCol="0" anchor="ctr"/>
-          <a:lstStyle/>
-          <a:p>
-            <a:pPr indent="0" marL="0">
-              <a:buNone/>
-            </a:pPr>
-            <a:r>
-              <a:rPr lang="en-US" sz="1300" b="1" dirty="0">
-                <a:solidFill>
-                  <a:srgbClr val="4A7FA8"/>
-                </a:solidFill>
-              </a:rPr>
-              <a:t>Share</a:t>
-            </a:r>
-            <a:endParaRPr lang="en-US" sz="1300" dirty="0"/>
-          </a:p>
-        </p:txBody>
-      </p:sp>
-      <p:sp>
-        <p:nvSpPr>
-          <p:cNvPr id="27" name="Text 25"/>
-          <p:cNvSpPr/>
-          <p:nvPr/>
-        </p:nvSpPr>
-        <p:spPr>
-          <a:xfrm>
-            <a:off x="1993392" y="4123944"/>
-            <a:ext cx="822960" cy="292608"/>
-          </a:xfrm>
-          <a:prstGeom prst="rect">
-            <a:avLst/>
-          </a:prstGeom>
-          <a:noFill/>
-          <a:ln/>
-        </p:spPr>
-        <p:txBody>
-          <a:bodyPr wrap="square" lIns="0" tIns="0" rIns="0" bIns="0" rtlCol="0" anchor="ctr"/>
-          <a:lstStyle/>
-          <a:p>
-            <a:pPr indent="0" marL="0">
-              <a:buNone/>
-            </a:pPr>
-            <a:r>
-              <a:rPr lang="en-US" sz="1100" i="1" dirty="0">
-                <a:solidFill>
-                  <a:srgbClr val="7A90A8"/>
-                </a:solidFill>
-              </a:rPr>
-              <a:t>(3 min)</a:t>
-            </a:r>
-            <a:endParaRPr lang="en-US" sz="1100" dirty="0"/>
-          </a:p>
-        </p:txBody>
-      </p:sp>
-      <p:sp>
-        <p:nvSpPr>
-          <p:cNvPr id="28" name="Text 26"/>
-          <p:cNvSpPr/>
-          <p:nvPr/>
-        </p:nvSpPr>
-        <p:spPr>
-          <a:xfrm>
-            <a:off x="896112" y="4453128"/>
-            <a:ext cx="7818120" cy="347472"/>
-          </a:xfrm>
-          <a:prstGeom prst="rect">
-            <a:avLst/>
-          </a:prstGeom>
-          <a:noFill/>
-          <a:ln/>
-        </p:spPr>
-        <p:txBody>
-          <a:bodyPr wrap="square" lIns="0" tIns="0" rIns="0" bIns="0" rtlCol="0" anchor="ctr"/>
-          <a:lstStyle/>
-          <a:p>
-            <a:pPr indent="0" marL="0">
-              <a:buNone/>
-            </a:pPr>
-            <a:r>
-              <a:rPr lang="en-US" sz="1100" dirty="0">
-                <a:solidFill>
-                  <a:srgbClr val="7A90A8"/>
-                </a:solidFill>
-              </a:rPr>
-              <a:t>Share one surprising classification with the group. Where did your intuition and your classification disagree?</a:t>
+              <a:t>Look at the SDLC phase table (slide 10). For each row: Is your team using a coding agent here? If not — what would it take? If yes — how supervised? Share your map with a peer: where are the biggest gaps?</a:t>
             </a:r>
             <a:endParaRPr lang="en-US" sz="1100" dirty="0"/>
           </a:p>
@@ -4345,7 +4873,7 @@
                   <a:srgbClr val="D4E4F0"/>
                 </a:solidFill>
               </a:rPr>
-              <a:t>Q2.  What's one task in your domain that's clearly Tier 1? What makes it safe to automate?</a:t>
+              <a:t>Q2.  Look at the SDLC phase table. Which phase beyond code generation could deliver the biggest value for your team?</a:t>
             </a:r>
             <a:endParaRPr lang="en-US" sz="1150" dirty="0"/>
           </a:p>
@@ -4385,7 +4913,7 @@
                   <a:srgbClr val="D4E4F0"/>
                 </a:solidFill>
               </a:rPr>
-              <a:t>Q4.  How does your organization's risk culture affect where you set your HITL gates?</a:t>
+              <a:t>Q4.  How does your organisation's risk culture affect where you set your HITL gates?</a:t>
             </a:r>
             <a:endParaRPr lang="en-US" sz="1150" dirty="0"/>
           </a:p>
@@ -4548,7 +5076,7 @@
                   <a:srgbClr val="D4E4F0"/>
                 </a:solidFill>
               </a:rPr>
-              <a:t>· Match autonomy level to risk — use the spectrum</a:t>
+              <a:t>· Coding agents vs. production agents — know the scope</a:t>
             </a:r>
             <a:endParaRPr lang="en-US" sz="1150" dirty="0"/>
           </a:p>
@@ -4568,27 +5096,47 @@
                   <a:srgbClr val="D4E4F0"/>
                 </a:solidFill>
               </a:rPr>
+              <a:t>· Coding agents add value at every SDLC phase</a:t>
+            </a:r>
+            <a:endParaRPr lang="en-US" sz="1150" dirty="0"/>
+          </a:p>
+          <a:p>
+            <a:pPr indent="0" marL="0">
+              <a:buNone/>
+            </a:pPr>
+            <a:endParaRPr lang="en-US" sz="1150" dirty="0"/>
+          </a:p>
+          <a:p>
+            <a:pPr indent="0" marL="0">
+              <a:buNone/>
+            </a:pPr>
+            <a:r>
+              <a:rPr lang="en-US" sz="1150" dirty="0">
+                <a:solidFill>
+                  <a:srgbClr val="D4E4F0"/>
+                </a:solidFill>
+              </a:rPr>
+              <a:t>· Match mode to risk — supervised is the enterprise default</a:t>
+            </a:r>
+            <a:endParaRPr lang="en-US" sz="1150" dirty="0"/>
+          </a:p>
+          <a:p>
+            <a:pPr indent="0" marL="0">
+              <a:buNone/>
+            </a:pPr>
+            <a:endParaRPr lang="en-US" sz="1150" dirty="0"/>
+          </a:p>
+          <a:p>
+            <a:pPr indent="0" marL="0">
+              <a:buNone/>
+            </a:pPr>
+            <a:r>
+              <a:rPr lang="en-US" sz="1150" dirty="0">
+                <a:solidFill>
+                  <a:srgbClr val="D4E4F0"/>
+                </a:solidFill>
+              </a:rPr>
               <a:t>· Your role shifts: intent + oversight, not typing</a:t>
-            </a:r>
-            <a:endParaRPr lang="en-US" sz="1150" dirty="0"/>
-          </a:p>
-          <a:p>
-            <a:pPr indent="0" marL="0">
-              <a:buNone/>
-            </a:pPr>
-            <a:endParaRPr lang="en-US" sz="1150" dirty="0"/>
-          </a:p>
-          <a:p>
-            <a:pPr indent="0" marL="0">
-              <a:buNone/>
-            </a:pPr>
-            <a:r>
-              <a:rPr lang="en-US" sz="1150" dirty="0">
-                <a:solidFill>
-                  <a:srgbClr val="D4E4F0"/>
-                </a:solidFill>
-              </a:rPr>
-              <a:t>· Spotify's senior engineers now supervise, not code</a:t>
             </a:r>
             <a:endParaRPr lang="en-US" sz="1150" dirty="0"/>
           </a:p>
@@ -4749,7 +5297,7 @@
         <p:spPr>
           <a:xfrm>
             <a:off x="320040" y="960120"/>
-            <a:ext cx="4160520" cy="1691640"/>
+            <a:ext cx="4160520" cy="1536192"/>
           </a:xfrm>
           <a:prstGeom prst="rect">
             <a:avLst/>
@@ -4776,7 +5324,7 @@
         <p:spPr>
           <a:xfrm>
             <a:off x="320040" y="960120"/>
-            <a:ext cx="64008" cy="1691640"/>
+            <a:ext cx="64008" cy="1536192"/>
           </a:xfrm>
           <a:prstGeom prst="rect">
             <a:avLst/>
@@ -4803,7 +5351,7 @@
         </p:blipFill>
         <p:spPr>
           <a:xfrm>
-            <a:off x="484632" y="1143000"/>
+            <a:off x="484632" y="1124712"/>
             <a:ext cx="384048" cy="384048"/>
           </a:xfrm>
           <a:prstGeom prst="rect">
@@ -4819,8 +5367,8 @@
         </p:nvSpPr>
         <p:spPr>
           <a:xfrm>
-            <a:off x="960120" y="1106424"/>
-            <a:ext cx="3383280" cy="438912"/>
+            <a:off x="960120" y="1088136"/>
+            <a:ext cx="3383280" cy="384048"/>
           </a:xfrm>
           <a:prstGeom prst="rect">
             <a:avLst/>
@@ -4855,31 +5403,31 @@
         </p:nvSpPr>
         <p:spPr>
           <a:xfrm>
-            <a:off x="960120" y="1563624"/>
-            <a:ext cx="3383280" cy="914400"/>
-          </a:xfrm>
-          <a:prstGeom prst="rect">
-            <a:avLst/>
-          </a:prstGeom>
-          <a:noFill/>
-          <a:ln/>
-        </p:spPr>
-        <p:txBody>
-          <a:bodyPr wrap="square" lIns="0" tIns="0" rIns="0" bIns="0" rtlCol="0" anchor="ctr"/>
-          <a:lstStyle/>
-          <a:p>
-            <a:pPr indent="0" marL="0">
-              <a:buNone/>
-            </a:pPr>
-            <a:r>
-              <a:rPr lang="en-US" sz="1150" dirty="0">
+            <a:off x="960120" y="1490472"/>
+            <a:ext cx="3383280" cy="822960"/>
+          </a:xfrm>
+          <a:prstGeom prst="rect">
+            <a:avLst/>
+          </a:prstGeom>
+          <a:noFill/>
+          <a:ln/>
+        </p:spPr>
+        <p:txBody>
+          <a:bodyPr wrap="square" lIns="0" tIns="0" rIns="0" bIns="0" rtlCol="0" anchor="ctr"/>
+          <a:lstStyle/>
+          <a:p>
+            <a:pPr indent="0" marL="0">
+              <a:buNone/>
+            </a:pPr>
+            <a:r>
+              <a:rPr lang="en-US" sz="1100" dirty="0">
                 <a:solidFill>
                   <a:srgbClr val="7A90A8"/>
                 </a:solidFill>
               </a:rPr>
               <a:t>Define reactive AI, prompt-response cycles, and why chat has limits for enterprise work.</a:t>
             </a:r>
-            <a:endParaRPr lang="en-US" sz="1150" dirty="0"/>
+            <a:endParaRPr lang="en-US" sz="1100" dirty="0"/>
           </a:p>
         </p:txBody>
       </p:sp>
@@ -4892,7 +5440,7 @@
         <p:spPr>
           <a:xfrm>
             <a:off x="4663440" y="960120"/>
-            <a:ext cx="4160520" cy="1691640"/>
+            <a:ext cx="4160520" cy="1536192"/>
           </a:xfrm>
           <a:prstGeom prst="rect">
             <a:avLst/>
@@ -4919,7 +5467,7 @@
         <p:spPr>
           <a:xfrm>
             <a:off x="4663440" y="960120"/>
-            <a:ext cx="64008" cy="1691640"/>
+            <a:ext cx="64008" cy="1536192"/>
           </a:xfrm>
           <a:prstGeom prst="rect">
             <a:avLst/>
@@ -4946,7 +5494,7 @@
         </p:blipFill>
         <p:spPr>
           <a:xfrm>
-            <a:off x="4828032" y="1143000"/>
+            <a:off x="4828032" y="1124712"/>
             <a:ext cx="384048" cy="384048"/>
           </a:xfrm>
           <a:prstGeom prst="rect">
@@ -4962,8 +5510,8 @@
         </p:nvSpPr>
         <p:spPr>
           <a:xfrm>
-            <a:off x="5303520" y="1106424"/>
-            <a:ext cx="3383280" cy="438912"/>
+            <a:off x="5303520" y="1088136"/>
+            <a:ext cx="3383280" cy="384048"/>
           </a:xfrm>
           <a:prstGeom prst="rect">
             <a:avLst/>
@@ -4998,31 +5546,31 @@
         </p:nvSpPr>
         <p:spPr>
           <a:xfrm>
-            <a:off x="5303520" y="1563624"/>
-            <a:ext cx="3383280" cy="914400"/>
-          </a:xfrm>
-          <a:prstGeom prst="rect">
-            <a:avLst/>
-          </a:prstGeom>
-          <a:noFill/>
-          <a:ln/>
-        </p:spPr>
-        <p:txBody>
-          <a:bodyPr wrap="square" lIns="0" tIns="0" rIns="0" bIns="0" rtlCol="0" anchor="ctr"/>
-          <a:lstStyle/>
-          <a:p>
-            <a:pPr indent="0" marL="0">
-              <a:buNone/>
-            </a:pPr>
-            <a:r>
-              <a:rPr lang="en-US" sz="1150" dirty="0">
+            <a:off x="5303520" y="1490472"/>
+            <a:ext cx="3383280" cy="822960"/>
+          </a:xfrm>
+          <a:prstGeom prst="rect">
+            <a:avLst/>
+          </a:prstGeom>
+          <a:noFill/>
+          <a:ln/>
+        </p:spPr>
+        <p:txBody>
+          <a:bodyPr wrap="square" lIns="0" tIns="0" rIns="0" bIns="0" rtlCol="0" anchor="ctr"/>
+          <a:lstStyle/>
+          <a:p>
+            <a:pPr indent="0" marL="0">
+              <a:buNone/>
+            </a:pPr>
+            <a:r>
+              <a:rPr lang="en-US" sz="1100" dirty="0">
                 <a:solidFill>
                   <a:srgbClr val="7A90A8"/>
                 </a:solidFill>
               </a:rPr>
               <a:t>Articulate what makes an AI system an agent: autonomy, tools, memory, and feedback loops.</a:t>
             </a:r>
-            <a:endParaRPr lang="en-US" sz="1150" dirty="0"/>
+            <a:endParaRPr lang="en-US" sz="1100" dirty="0"/>
           </a:p>
         </p:txBody>
       </p:sp>
@@ -5034,8 +5582,8 @@
         </p:nvSpPr>
         <p:spPr>
           <a:xfrm>
-            <a:off x="320040" y="2880360"/>
-            <a:ext cx="4160520" cy="1691640"/>
+            <a:off x="320040" y="2651760"/>
+            <a:ext cx="4160520" cy="1536192"/>
           </a:xfrm>
           <a:prstGeom prst="rect">
             <a:avLst/>
@@ -5061,8 +5609,8 @@
         </p:nvSpPr>
         <p:spPr>
           <a:xfrm>
-            <a:off x="320040" y="2880360"/>
-            <a:ext cx="64008" cy="1691640"/>
+            <a:off x="320040" y="2651760"/>
+            <a:ext cx="64008" cy="1536192"/>
           </a:xfrm>
           <a:prstGeom prst="rect">
             <a:avLst/>
@@ -5089,7 +5637,7 @@
         </p:blipFill>
         <p:spPr>
           <a:xfrm>
-            <a:off x="484632" y="3063240"/>
+            <a:off x="484632" y="2816352"/>
             <a:ext cx="384048" cy="384048"/>
           </a:xfrm>
           <a:prstGeom prst="rect">
@@ -5105,8 +5653,8 @@
         </p:nvSpPr>
         <p:spPr>
           <a:xfrm>
-            <a:off x="960120" y="3026664"/>
-            <a:ext cx="3383280" cy="438912"/>
+            <a:off x="960120" y="2779776"/>
+            <a:ext cx="3383280" cy="384048"/>
           </a:xfrm>
           <a:prstGeom prst="rect">
             <a:avLst/>
@@ -5141,31 +5689,31 @@
         </p:nvSpPr>
         <p:spPr>
           <a:xfrm>
-            <a:off x="960120" y="3483864"/>
-            <a:ext cx="3383280" cy="914400"/>
-          </a:xfrm>
-          <a:prstGeom prst="rect">
-            <a:avLst/>
-          </a:prstGeom>
-          <a:noFill/>
-          <a:ln/>
-        </p:spPr>
-        <p:txBody>
-          <a:bodyPr wrap="square" lIns="0" tIns="0" rIns="0" bIns="0" rtlCol="0" anchor="ctr"/>
-          <a:lstStyle/>
-          <a:p>
-            <a:pPr indent="0" marL="0">
-              <a:buNone/>
-            </a:pPr>
-            <a:r>
-              <a:rPr lang="en-US" sz="1150" dirty="0">
+            <a:off x="960120" y="3182112"/>
+            <a:ext cx="3383280" cy="822960"/>
+          </a:xfrm>
+          <a:prstGeom prst="rect">
+            <a:avLst/>
+          </a:prstGeom>
+          <a:noFill/>
+          <a:ln/>
+        </p:spPr>
+        <p:txBody>
+          <a:bodyPr wrap="square" lIns="0" tIns="0" rIns="0" bIns="0" rtlCol="0" anchor="ctr"/>
+          <a:lstStyle/>
+          <a:p>
+            <a:pPr indent="0" marL="0">
+              <a:buNone/>
+            </a:pPr>
+            <a:r>
+              <a:rPr lang="en-US" sz="1100" dirty="0">
                 <a:solidFill>
                   <a:srgbClr val="7A90A8"/>
                 </a:solidFill>
               </a:rPr>
-              <a:t>Apply IBM's three-tier model to classify agent deployments by risk and human oversight.</a:t>
-            </a:r>
-            <a:endParaRPr lang="en-US" sz="1150" dirty="0"/>
+              <a:t>Apply the three-tier model to classify agent deployments by risk and human oversight.</a:t>
+            </a:r>
+            <a:endParaRPr lang="en-US" sz="1100" dirty="0"/>
           </a:p>
         </p:txBody>
       </p:sp>
@@ -5177,8 +5725,8 @@
         </p:nvSpPr>
         <p:spPr>
           <a:xfrm>
-            <a:off x="4663440" y="2880360"/>
-            <a:ext cx="4160520" cy="1691640"/>
+            <a:off x="4663440" y="2651760"/>
+            <a:ext cx="4160520" cy="1536192"/>
           </a:xfrm>
           <a:prstGeom prst="rect">
             <a:avLst/>
@@ -5204,8 +5752,8 @@
         </p:nvSpPr>
         <p:spPr>
           <a:xfrm>
-            <a:off x="4663440" y="2880360"/>
-            <a:ext cx="64008" cy="1691640"/>
+            <a:off x="4663440" y="2651760"/>
+            <a:ext cx="64008" cy="1536192"/>
           </a:xfrm>
           <a:prstGeom prst="rect">
             <a:avLst/>
@@ -5232,7 +5780,7 @@
         </p:blipFill>
         <p:spPr>
           <a:xfrm>
-            <a:off x="4828032" y="3063240"/>
+            <a:off x="4828032" y="2816352"/>
             <a:ext cx="384048" cy="384048"/>
           </a:xfrm>
           <a:prstGeom prst="rect">
@@ -5248,8 +5796,8 @@
         </p:nvSpPr>
         <p:spPr>
           <a:xfrm>
-            <a:off x="5303520" y="3026664"/>
-            <a:ext cx="3383280" cy="438912"/>
+            <a:off x="5303520" y="2779776"/>
+            <a:ext cx="3383280" cy="384048"/>
           </a:xfrm>
           <a:prstGeom prst="rect">
             <a:avLst/>
@@ -5284,37 +5832,180 @@
         </p:nvSpPr>
         <p:spPr>
           <a:xfrm>
-            <a:off x="5303520" y="3483864"/>
-            <a:ext cx="3383280" cy="914400"/>
-          </a:xfrm>
-          <a:prstGeom prst="rect">
-            <a:avLst/>
-          </a:prstGeom>
-          <a:noFill/>
-          <a:ln/>
-        </p:spPr>
-        <p:txBody>
-          <a:bodyPr wrap="square" lIns="0" tIns="0" rIns="0" bIns="0" rtlCol="0" anchor="ctr"/>
-          <a:lstStyle/>
-          <a:p>
-            <a:pPr indent="0" marL="0">
-              <a:buNone/>
-            </a:pPr>
-            <a:r>
-              <a:rPr lang="en-US" sz="1150" dirty="0">
+            <a:off x="5303520" y="3182112"/>
+            <a:ext cx="3383280" cy="822960"/>
+          </a:xfrm>
+          <a:prstGeom prst="rect">
+            <a:avLst/>
+          </a:prstGeom>
+          <a:noFill/>
+          <a:ln/>
+        </p:spPr>
+        <p:txBody>
+          <a:bodyPr wrap="square" lIns="0" tIns="0" rIns="0" bIns="0" rtlCol="0" anchor="ctr"/>
+          <a:lstStyle/>
+          <a:p>
+            <a:pPr indent="0" marL="0">
+              <a:buNone/>
+            </a:pPr>
+            <a:r>
+              <a:rPr lang="en-US" sz="1100" dirty="0">
                 <a:solidFill>
                   <a:srgbClr val="7A90A8"/>
                 </a:solidFill>
               </a:rPr>
               <a:t>Describe the engineer's new role as intent-setter and reviewer rather than code author.</a:t>
             </a:r>
-            <a:endParaRPr lang="en-US" sz="1150" dirty="0"/>
-          </a:p>
-        </p:txBody>
-      </p:sp>
-      <p:sp>
-        <p:nvSpPr>
-          <p:cNvPr id="24" name="Text 18"/>
+            <a:endParaRPr lang="en-US" sz="1100" dirty="0"/>
+          </a:p>
+        </p:txBody>
+      </p:sp>
+      <p:sp>
+        <p:nvSpPr>
+          <p:cNvPr id="24" name="Shape 18"/>
+          <p:cNvSpPr/>
+          <p:nvPr/>
+        </p:nvSpPr>
+        <p:spPr>
+          <a:xfrm>
+            <a:off x="320040" y="4297680"/>
+            <a:ext cx="8503920" cy="621792"/>
+          </a:xfrm>
+          <a:prstGeom prst="rect">
+            <a:avLst/>
+          </a:prstGeom>
+          <a:solidFill>
+            <a:srgbClr val="FFFFFF"/>
+          </a:solidFill>
+          <a:ln/>
+          <a:effectLst>
+            <a:outerShdw sx="100000" sy="100000" kx="0" ky="0" algn="bl" rotWithShape="0" blurRad="101600" dist="38100" dir="8100000">
+              <a:srgbClr val="000000">
+                <a:alpha val="15000"/>
+              </a:srgbClr>
+            </a:outerShdw>
+          </a:effectLst>
+        </p:spPr>
+      </p:sp>
+      <p:sp>
+        <p:nvSpPr>
+          <p:cNvPr id="25" name="Shape 19"/>
+          <p:cNvSpPr/>
+          <p:nvPr/>
+        </p:nvSpPr>
+        <p:spPr>
+          <a:xfrm>
+            <a:off x="320040" y="4297680"/>
+            <a:ext cx="64008" cy="621792"/>
+          </a:xfrm>
+          <a:prstGeom prst="rect">
+            <a:avLst/>
+          </a:prstGeom>
+          <a:solidFill>
+            <a:srgbClr val="3A7E6E"/>
+          </a:solidFill>
+          <a:ln/>
+        </p:spPr>
+      </p:sp>
+      <p:pic>
+        <p:nvPicPr>
+          <p:cNvPr id="26" name="Image 4" descr="preencoded.png">    </p:cNvPr>
+          <p:cNvPicPr>
+            <a:picLocks noChangeAspect="1"/>
+          </p:cNvPicPr>
+          <p:nvPr/>
+        </p:nvPicPr>
+        <p:blipFill>
+          <a:blip r:embed="rId5"/>
+          <a:stretch>
+            <a:fillRect/>
+          </a:stretch>
+        </p:blipFill>
+        <p:spPr>
+          <a:xfrm>
+            <a:off x="484632" y="4416552"/>
+            <a:ext cx="347472" cy="347472"/>
+          </a:xfrm>
+          <a:prstGeom prst="rect">
+            <a:avLst/>
+          </a:prstGeom>
+        </p:spPr>
+      </p:pic>
+      <p:sp>
+        <p:nvSpPr>
+          <p:cNvPr id="27" name="Text 20"/>
+          <p:cNvSpPr/>
+          <p:nvPr/>
+        </p:nvSpPr>
+        <p:spPr>
+          <a:xfrm>
+            <a:off x="941832" y="4389120"/>
+            <a:ext cx="3200400" cy="320040"/>
+          </a:xfrm>
+          <a:prstGeom prst="rect">
+            <a:avLst/>
+          </a:prstGeom>
+          <a:noFill/>
+          <a:ln/>
+        </p:spPr>
+        <p:txBody>
+          <a:bodyPr wrap="square" lIns="0" tIns="0" rIns="0" bIns="0" rtlCol="0" anchor="ctr"/>
+          <a:lstStyle/>
+          <a:p>
+            <a:pPr indent="0" marL="0">
+              <a:buNone/>
+            </a:pPr>
+            <a:r>
+              <a:rPr lang="en-US" sz="1300" b="1" dirty="0">
+                <a:solidFill>
+                  <a:srgbClr val="1E2D3D"/>
+                </a:solidFill>
+              </a:rPr>
+              <a:t>Map Coding Agents Across the SDLC</a:t>
+            </a:r>
+            <a:endParaRPr lang="en-US" sz="1300" dirty="0"/>
+          </a:p>
+        </p:txBody>
+      </p:sp>
+      <p:sp>
+        <p:nvSpPr>
+          <p:cNvPr id="28" name="Text 21"/>
+          <p:cNvSpPr/>
+          <p:nvPr/>
+        </p:nvSpPr>
+        <p:spPr>
+          <a:xfrm>
+            <a:off x="941832" y="4626864"/>
+            <a:ext cx="7680960" cy="237744"/>
+          </a:xfrm>
+          <a:prstGeom prst="rect">
+            <a:avLst/>
+          </a:prstGeom>
+          <a:noFill/>
+          <a:ln/>
+        </p:spPr>
+        <p:txBody>
+          <a:bodyPr wrap="square" lIns="0" tIns="0" rIns="0" bIns="0" rtlCol="0" anchor="ctr"/>
+          <a:lstStyle/>
+          <a:p>
+            <a:pPr indent="0" marL="0">
+              <a:buNone/>
+            </a:pPr>
+            <a:r>
+              <a:rPr lang="en-US" sz="1100" dirty="0">
+                <a:solidFill>
+                  <a:srgbClr val="7A90A8"/>
+                </a:solidFill>
+              </a:rPr>
+              <a:t>Show where coding agents add value beyond code generation — at every phase from ideation to ops.</a:t>
+            </a:r>
+            <a:endParaRPr lang="en-US" sz="1100" dirty="0"/>
+          </a:p>
+        </p:txBody>
+      </p:sp>
+      <p:sp>
+        <p:nvSpPr>
+          <p:cNvPr id="29" name="Text 22"/>
           <p:cNvSpPr/>
           <p:nvPr/>
         </p:nvSpPr>
@@ -9999,7 +10690,7 @@
         </p:nvSpPr>
         <p:spPr>
           <a:xfrm>
-            <a:off x="365760" y="256032"/>
+            <a:off x="365760" y="182880"/>
             <a:ext cx="8229600" cy="411480"/>
           </a:xfrm>
           <a:prstGeom prst="rect">
@@ -10021,7 +10712,7 @@
                   <a:srgbClr val="5B8DB8"/>
                 </a:solidFill>
               </a:rPr>
-              <a:t>THE AUTONOMY SPECTRUM</a:t>
+              <a:t>CHOOSING THE RIGHT MODE</a:t>
             </a:r>
             <a:endParaRPr lang="en-US" sz="1300" dirty="0"/>
           </a:p>
@@ -10035,31 +10726,31 @@
         </p:nvSpPr>
         <p:spPr>
           <a:xfrm>
-            <a:off x="365760" y="713232"/>
-            <a:ext cx="8229600" cy="347472"/>
-          </a:xfrm>
-          <a:prstGeom prst="rect">
-            <a:avLst/>
-          </a:prstGeom>
-          <a:noFill/>
-          <a:ln/>
-        </p:spPr>
-        <p:txBody>
-          <a:bodyPr wrap="square" lIns="0" tIns="0" rIns="0" bIns="0" rtlCol="0" anchor="ctr"/>
-          <a:lstStyle/>
-          <a:p>
-            <a:pPr indent="0" marL="0">
-              <a:buNone/>
-            </a:pPr>
-            <a:r>
-              <a:rPr lang="en-US" sz="1400" i="1" dirty="0">
+            <a:off x="365760" y="621792"/>
+            <a:ext cx="8229600" cy="320040"/>
+          </a:xfrm>
+          <a:prstGeom prst="rect">
+            <a:avLst/>
+          </a:prstGeom>
+          <a:noFill/>
+          <a:ln/>
+        </p:spPr>
+        <p:txBody>
+          <a:bodyPr wrap="square" lIns="0" tIns="0" rIns="0" bIns="0" rtlCol="0" anchor="ctr"/>
+          <a:lstStyle/>
+          <a:p>
+            <a:pPr indent="0" marL="0">
+              <a:buNone/>
+            </a:pPr>
+            <a:r>
+              <a:rPr lang="en-US" sz="1300" i="1" dirty="0">
                 <a:solidFill>
                   <a:srgbClr val="FFFFFF"/>
                 </a:solidFill>
               </a:rPr>
-              <a:t>Not all agents are equal — match autonomy to risk  (IBM three-tier model)</a:t>
-            </a:r>
-            <a:endParaRPr lang="en-US" sz="1400" dirty="0"/>
+              <a:t>Use the simplest mode that works — match autonomy to the task and risk level</a:t>
+            </a:r>
+            <a:endParaRPr lang="en-US" sz="1300" dirty="0"/>
           </a:p>
         </p:txBody>
       </p:sp>
@@ -10071,37 +10762,1658 @@
         </p:nvSpPr>
         <p:spPr>
           <a:xfrm>
+            <a:off x="320040" y="1005840"/>
+            <a:ext cx="8503920" cy="320040"/>
+          </a:xfrm>
+          <a:prstGeom prst="rect">
+            <a:avLst/>
+          </a:prstGeom>
+          <a:solidFill>
+            <a:srgbClr val="2E5073"/>
+          </a:solidFill>
+          <a:ln/>
+        </p:spPr>
+      </p:sp>
+      <p:sp>
+        <p:nvSpPr>
+          <p:cNvPr id="5" name="Text 3"/>
+          <p:cNvSpPr/>
+          <p:nvPr/>
+        </p:nvSpPr>
+        <p:spPr>
+          <a:xfrm>
+            <a:off x="384048" y="1005840"/>
+            <a:ext cx="3657600" cy="320040"/>
+          </a:xfrm>
+          <a:prstGeom prst="rect">
+            <a:avLst/>
+          </a:prstGeom>
+          <a:noFill/>
+          <a:ln/>
+        </p:spPr>
+        <p:txBody>
+          <a:bodyPr wrap="square" lIns="0" tIns="0" rIns="0" bIns="0" rtlCol="0" anchor="ctr"/>
+          <a:lstStyle/>
+          <a:p>
+            <a:pPr indent="0" marL="0">
+              <a:buNone/>
+            </a:pPr>
+            <a:r>
+              <a:rPr lang="en-US" sz="950" b="1" spc="100" kern="0" dirty="0">
+                <a:solidFill>
+                  <a:srgbClr val="5B8DB8"/>
+                </a:solidFill>
+              </a:rPr>
+              <a:t>TASK</a:t>
+            </a:r>
+            <a:endParaRPr lang="en-US" sz="950" dirty="0"/>
+          </a:p>
+        </p:txBody>
+      </p:sp>
+      <p:sp>
+        <p:nvSpPr>
+          <p:cNvPr id="6" name="Text 4"/>
+          <p:cNvSpPr/>
+          <p:nvPr/>
+        </p:nvSpPr>
+        <p:spPr>
+          <a:xfrm>
+            <a:off x="4114800" y="1005840"/>
+            <a:ext cx="2560320" cy="320040"/>
+          </a:xfrm>
+          <a:prstGeom prst="rect">
+            <a:avLst/>
+          </a:prstGeom>
+          <a:noFill/>
+          <a:ln/>
+        </p:spPr>
+        <p:txBody>
+          <a:bodyPr wrap="square" lIns="0" tIns="0" rIns="0" bIns="0" rtlCol="0" anchor="ctr"/>
+          <a:lstStyle/>
+          <a:p>
+            <a:pPr indent="0" marL="0">
+              <a:buNone/>
+            </a:pPr>
+            <a:r>
+              <a:rPr lang="en-US" sz="950" b="1" spc="100" kern="0" dirty="0">
+                <a:solidFill>
+                  <a:srgbClr val="5B8DB8"/>
+                </a:solidFill>
+              </a:rPr>
+              <a:t>RECOMMENDED MODE</a:t>
+            </a:r>
+            <a:endParaRPr lang="en-US" sz="950" dirty="0"/>
+          </a:p>
+        </p:txBody>
+      </p:sp>
+      <p:sp>
+        <p:nvSpPr>
+          <p:cNvPr id="7" name="Text 5"/>
+          <p:cNvSpPr/>
+          <p:nvPr/>
+        </p:nvSpPr>
+        <p:spPr>
+          <a:xfrm>
+            <a:off x="6748272" y="1005840"/>
+            <a:ext cx="2011680" cy="320040"/>
+          </a:xfrm>
+          <a:prstGeom prst="rect">
+            <a:avLst/>
+          </a:prstGeom>
+          <a:noFill/>
+          <a:ln/>
+        </p:spPr>
+        <p:txBody>
+          <a:bodyPr wrap="square" lIns="0" tIns="0" rIns="0" bIns="0" rtlCol="0" anchor="ctr"/>
+          <a:lstStyle/>
+          <a:p>
+            <a:pPr indent="0" marL="0">
+              <a:buNone/>
+            </a:pPr>
+            <a:r>
+              <a:rPr lang="en-US" sz="950" b="1" spc="100" kern="0" dirty="0">
+                <a:solidFill>
+                  <a:srgbClr val="5B8DB8"/>
+                </a:solidFill>
+              </a:rPr>
+              <a:t>TOOL</a:t>
+            </a:r>
+            <a:endParaRPr lang="en-US" sz="950" dirty="0"/>
+          </a:p>
+        </p:txBody>
+      </p:sp>
+      <p:sp>
+        <p:nvSpPr>
+          <p:cNvPr id="8" name="Shape 6"/>
+          <p:cNvSpPr/>
+          <p:nvPr/>
+        </p:nvSpPr>
+        <p:spPr>
+          <a:xfrm>
             <a:off x="320040" y="1325880"/>
-            <a:ext cx="2697480" cy="3520440"/>
+            <a:ext cx="8503920" cy="329184"/>
           </a:xfrm>
           <a:prstGeom prst="rect">
             <a:avLst/>
           </a:prstGeom>
           <a:solidFill>
             <a:srgbClr val="2E5073">
-              <a:alpha val="80000"/>
+              <a:alpha val="60000"/>
             </a:srgbClr>
           </a:solidFill>
           <a:ln/>
-          <a:effectLst>
-            <a:outerShdw sx="100000" sy="100000" kx="0" ky="0" algn="bl" rotWithShape="0" blurRad="101600" dist="38100" dir="8100000">
-              <a:srgbClr val="000000">
-                <a:alpha val="15000"/>
-              </a:srgbClr>
-            </a:outerShdw>
-          </a:effectLst>
-        </p:spPr>
-      </p:sp>
-      <p:sp>
-        <p:nvSpPr>
-          <p:cNvPr id="5" name="Shape 3"/>
+        </p:spPr>
+      </p:sp>
+      <p:sp>
+        <p:nvSpPr>
+          <p:cNvPr id="9" name="Shape 7"/>
           <p:cNvSpPr/>
           <p:nvPr/>
         </p:nvSpPr>
         <p:spPr>
           <a:xfrm>
             <a:off x="320040" y="1325880"/>
-            <a:ext cx="2697480" cy="548640"/>
+            <a:ext cx="45720" cy="329184"/>
+          </a:xfrm>
+          <a:prstGeom prst="rect">
+            <a:avLst/>
+          </a:prstGeom>
+          <a:solidFill>
+            <a:srgbClr val="000000"/>
+          </a:solidFill>
+          <a:ln/>
+        </p:spPr>
+      </p:sp>
+      <p:sp>
+        <p:nvSpPr>
+          <p:cNvPr id="10" name="Text 8"/>
+          <p:cNvSpPr/>
+          <p:nvPr/>
+        </p:nvSpPr>
+        <p:spPr>
+          <a:xfrm>
+            <a:off x="438912" y="1325880"/>
+            <a:ext cx="3602736" cy="329184"/>
+          </a:xfrm>
+          <a:prstGeom prst="rect">
+            <a:avLst/>
+          </a:prstGeom>
+          <a:noFill/>
+          <a:ln/>
+        </p:spPr>
+        <p:txBody>
+          <a:bodyPr wrap="square" lIns="0" tIns="0" rIns="0" bIns="0" rtlCol="0" anchor="ctr"/>
+          <a:lstStyle/>
+          <a:p>
+            <a:pPr indent="0" marL="0">
+              <a:buNone/>
+            </a:pPr>
+            <a:r>
+              <a:rPr lang="en-US" sz="1000" dirty="0">
+                <a:solidFill>
+                  <a:srgbClr val="D4E4F0"/>
+                </a:solidFill>
+              </a:rPr>
+              <a:t>Look up a syntax question</a:t>
+            </a:r>
+            <a:endParaRPr lang="en-US" sz="1000" dirty="0"/>
+          </a:p>
+        </p:txBody>
+      </p:sp>
+      <p:sp>
+        <p:nvSpPr>
+          <p:cNvPr id="11" name="Text 9"/>
+          <p:cNvSpPr/>
+          <p:nvPr/>
+        </p:nvSpPr>
+        <p:spPr>
+          <a:xfrm>
+            <a:off x="4114800" y="1325880"/>
+            <a:ext cx="2542032" cy="329184"/>
+          </a:xfrm>
+          <a:prstGeom prst="rect">
+            <a:avLst/>
+          </a:prstGeom>
+          <a:noFill/>
+          <a:ln/>
+        </p:spPr>
+        <p:txBody>
+          <a:bodyPr wrap="square" lIns="0" tIns="0" rIns="0" bIns="0" rtlCol="0" anchor="ctr"/>
+          <a:lstStyle/>
+          <a:p>
+            <a:pPr indent="0" marL="0">
+              <a:buNone/>
+            </a:pPr>
+            <a:r>
+              <a:rPr lang="en-US" sz="1000" b="1" dirty="0">
+                <a:solidFill>
+                  <a:srgbClr val="000000"/>
+                </a:solidFill>
+              </a:rPr>
+              <a:t>None — use search / docs</a:t>
+            </a:r>
+            <a:endParaRPr lang="en-US" sz="1000" dirty="0"/>
+          </a:p>
+        </p:txBody>
+      </p:sp>
+      <p:sp>
+        <p:nvSpPr>
+          <p:cNvPr id="12" name="Text 10"/>
+          <p:cNvSpPr/>
+          <p:nvPr/>
+        </p:nvSpPr>
+        <p:spPr>
+          <a:xfrm>
+            <a:off x="6748272" y="1325880"/>
+            <a:ext cx="1993392" cy="329184"/>
+          </a:xfrm>
+          <a:prstGeom prst="rect">
+            <a:avLst/>
+          </a:prstGeom>
+          <a:noFill/>
+          <a:ln/>
+        </p:spPr>
+        <p:txBody>
+          <a:bodyPr wrap="square" lIns="0" tIns="0" rIns="0" bIns="0" rtlCol="0" anchor="ctr"/>
+          <a:lstStyle/>
+          <a:p>
+            <a:pPr indent="0" marL="0">
+              <a:buNone/>
+            </a:pPr>
+            <a:r>
+              <a:rPr lang="en-US" sz="950" i="1" dirty="0">
+                <a:solidFill>
+                  <a:srgbClr val="7A90A8"/>
+                </a:solidFill>
+              </a:rPr>
+              <a:t>—</a:t>
+            </a:r>
+            <a:endParaRPr lang="en-US" sz="950" dirty="0"/>
+          </a:p>
+        </p:txBody>
+      </p:sp>
+      <p:sp>
+        <p:nvSpPr>
+          <p:cNvPr id="13" name="Shape 11"/>
+          <p:cNvSpPr/>
+          <p:nvPr/>
+        </p:nvSpPr>
+        <p:spPr>
+          <a:xfrm>
+            <a:off x="320040" y="1673352"/>
+            <a:ext cx="8503920" cy="329184"/>
+          </a:xfrm>
+          <a:prstGeom prst="rect">
+            <a:avLst/>
+          </a:prstGeom>
+          <a:solidFill>
+            <a:srgbClr val="1E3D5A">
+              <a:alpha val="60000"/>
+            </a:srgbClr>
+          </a:solidFill>
+          <a:ln/>
+        </p:spPr>
+      </p:sp>
+      <p:sp>
+        <p:nvSpPr>
+          <p:cNvPr id="14" name="Shape 12"/>
+          <p:cNvSpPr/>
+          <p:nvPr/>
+        </p:nvSpPr>
+        <p:spPr>
+          <a:xfrm>
+            <a:off x="320040" y="1673352"/>
+            <a:ext cx="45720" cy="329184"/>
+          </a:xfrm>
+          <a:prstGeom prst="rect">
+            <a:avLst/>
+          </a:prstGeom>
+          <a:solidFill>
+            <a:srgbClr val="4A7FA8"/>
+          </a:solidFill>
+          <a:ln/>
+        </p:spPr>
+      </p:sp>
+      <p:sp>
+        <p:nvSpPr>
+          <p:cNvPr id="15" name="Text 13"/>
+          <p:cNvSpPr/>
+          <p:nvPr/>
+        </p:nvSpPr>
+        <p:spPr>
+          <a:xfrm>
+            <a:off x="438912" y="1673352"/>
+            <a:ext cx="3602736" cy="329184"/>
+          </a:xfrm>
+          <a:prstGeom prst="rect">
+            <a:avLst/>
+          </a:prstGeom>
+          <a:noFill/>
+          <a:ln/>
+        </p:spPr>
+        <p:txBody>
+          <a:bodyPr wrap="square" lIns="0" tIns="0" rIns="0" bIns="0" rtlCol="0" anchor="ctr"/>
+          <a:lstStyle/>
+          <a:p>
+            <a:pPr indent="0" marL="0">
+              <a:buNone/>
+            </a:pPr>
+            <a:r>
+              <a:rPr lang="en-US" sz="1000" dirty="0">
+                <a:solidFill>
+                  <a:srgbClr val="D4E4F0"/>
+                </a:solidFill>
+              </a:rPr>
+              <a:t>Explain a function or decision</a:t>
+            </a:r>
+            <a:endParaRPr lang="en-US" sz="1000" dirty="0"/>
+          </a:p>
+        </p:txBody>
+      </p:sp>
+      <p:sp>
+        <p:nvSpPr>
+          <p:cNvPr id="16" name="Text 14"/>
+          <p:cNvSpPr/>
+          <p:nvPr/>
+        </p:nvSpPr>
+        <p:spPr>
+          <a:xfrm>
+            <a:off x="4114800" y="1673352"/>
+            <a:ext cx="2542032" cy="329184"/>
+          </a:xfrm>
+          <a:prstGeom prst="rect">
+            <a:avLst/>
+          </a:prstGeom>
+          <a:noFill/>
+          <a:ln/>
+        </p:spPr>
+        <p:txBody>
+          <a:bodyPr wrap="square" lIns="0" tIns="0" rIns="0" bIns="0" rtlCol="0" anchor="ctr"/>
+          <a:lstStyle/>
+          <a:p>
+            <a:pPr indent="0" marL="0">
+              <a:buNone/>
+            </a:pPr>
+            <a:r>
+              <a:rPr lang="en-US" sz="1000" b="1" dirty="0">
+                <a:solidFill>
+                  <a:srgbClr val="4A7FA8"/>
+                </a:solidFill>
+              </a:rPr>
+              <a:t>Augmented chat</a:t>
+            </a:r>
+            <a:endParaRPr lang="en-US" sz="1000" dirty="0"/>
+          </a:p>
+        </p:txBody>
+      </p:sp>
+      <p:sp>
+        <p:nvSpPr>
+          <p:cNvPr id="17" name="Text 15"/>
+          <p:cNvSpPr/>
+          <p:nvPr/>
+        </p:nvSpPr>
+        <p:spPr>
+          <a:xfrm>
+            <a:off x="6748272" y="1673352"/>
+            <a:ext cx="1993392" cy="329184"/>
+          </a:xfrm>
+          <a:prstGeom prst="rect">
+            <a:avLst/>
+          </a:prstGeom>
+          <a:noFill/>
+          <a:ln/>
+        </p:spPr>
+        <p:txBody>
+          <a:bodyPr wrap="square" lIns="0" tIns="0" rIns="0" bIns="0" rtlCol="0" anchor="ctr"/>
+          <a:lstStyle/>
+          <a:p>
+            <a:pPr indent="0" marL="0">
+              <a:buNone/>
+            </a:pPr>
+            <a:r>
+              <a:rPr lang="en-US" sz="950" i="1" dirty="0">
+                <a:solidFill>
+                  <a:srgbClr val="7A90A8"/>
+                </a:solidFill>
+              </a:rPr>
+              <a:t>Copilot Chat / Claude chat</a:t>
+            </a:r>
+            <a:endParaRPr lang="en-US" sz="950" dirty="0"/>
+          </a:p>
+        </p:txBody>
+      </p:sp>
+      <p:sp>
+        <p:nvSpPr>
+          <p:cNvPr id="18" name="Shape 16"/>
+          <p:cNvSpPr/>
+          <p:nvPr/>
+        </p:nvSpPr>
+        <p:spPr>
+          <a:xfrm>
+            <a:off x="320040" y="2020824"/>
+            <a:ext cx="8503920" cy="329184"/>
+          </a:xfrm>
+          <a:prstGeom prst="rect">
+            <a:avLst/>
+          </a:prstGeom>
+          <a:solidFill>
+            <a:srgbClr val="2E5073">
+              <a:alpha val="60000"/>
+            </a:srgbClr>
+          </a:solidFill>
+          <a:ln/>
+        </p:spPr>
+      </p:sp>
+      <p:sp>
+        <p:nvSpPr>
+          <p:cNvPr id="19" name="Shape 17"/>
+          <p:cNvSpPr/>
+          <p:nvPr/>
+        </p:nvSpPr>
+        <p:spPr>
+          <a:xfrm>
+            <a:off x="320040" y="2020824"/>
+            <a:ext cx="45720" cy="329184"/>
+          </a:xfrm>
+          <a:prstGeom prst="rect">
+            <a:avLst/>
+          </a:prstGeom>
+          <a:solidFill>
+            <a:srgbClr val="4A7FA8"/>
+          </a:solidFill>
+          <a:ln/>
+        </p:spPr>
+      </p:sp>
+      <p:sp>
+        <p:nvSpPr>
+          <p:cNvPr id="20" name="Text 18"/>
+          <p:cNvSpPr/>
+          <p:nvPr/>
+        </p:nvSpPr>
+        <p:spPr>
+          <a:xfrm>
+            <a:off x="438912" y="2020824"/>
+            <a:ext cx="3602736" cy="329184"/>
+          </a:xfrm>
+          <a:prstGeom prst="rect">
+            <a:avLst/>
+          </a:prstGeom>
+          <a:noFill/>
+          <a:ln/>
+        </p:spPr>
+        <p:txBody>
+          <a:bodyPr wrap="square" lIns="0" tIns="0" rIns="0" bIns="0" rtlCol="0" anchor="ctr"/>
+          <a:lstStyle/>
+          <a:p>
+            <a:pPr indent="0" marL="0">
+              <a:buNone/>
+            </a:pPr>
+            <a:r>
+              <a:rPr lang="en-US" sz="1000" dirty="0">
+                <a:solidFill>
+                  <a:srgbClr val="D4E4F0"/>
+                </a:solidFill>
+              </a:rPr>
+              <a:t>Inline code completion</a:t>
+            </a:r>
+            <a:endParaRPr lang="en-US" sz="1000" dirty="0"/>
+          </a:p>
+        </p:txBody>
+      </p:sp>
+      <p:sp>
+        <p:nvSpPr>
+          <p:cNvPr id="21" name="Text 19"/>
+          <p:cNvSpPr/>
+          <p:nvPr/>
+        </p:nvSpPr>
+        <p:spPr>
+          <a:xfrm>
+            <a:off x="4114800" y="2020824"/>
+            <a:ext cx="2542032" cy="329184"/>
+          </a:xfrm>
+          <a:prstGeom prst="rect">
+            <a:avLst/>
+          </a:prstGeom>
+          <a:noFill/>
+          <a:ln/>
+        </p:spPr>
+        <p:txBody>
+          <a:bodyPr wrap="square" lIns="0" tIns="0" rIns="0" bIns="0" rtlCol="0" anchor="ctr"/>
+          <a:lstStyle/>
+          <a:p>
+            <a:pPr indent="0" marL="0">
+              <a:buNone/>
+            </a:pPr>
+            <a:r>
+              <a:rPr lang="en-US" sz="1000" b="1" dirty="0">
+                <a:solidFill>
+                  <a:srgbClr val="4A7FA8"/>
+                </a:solidFill>
+              </a:rPr>
+              <a:t>Augmented chat</a:t>
+            </a:r>
+            <a:endParaRPr lang="en-US" sz="1000" dirty="0"/>
+          </a:p>
+        </p:txBody>
+      </p:sp>
+      <p:sp>
+        <p:nvSpPr>
+          <p:cNvPr id="22" name="Text 20"/>
+          <p:cNvSpPr/>
+          <p:nvPr/>
+        </p:nvSpPr>
+        <p:spPr>
+          <a:xfrm>
+            <a:off x="6748272" y="2020824"/>
+            <a:ext cx="1993392" cy="329184"/>
+          </a:xfrm>
+          <a:prstGeom prst="rect">
+            <a:avLst/>
+          </a:prstGeom>
+          <a:noFill/>
+          <a:ln/>
+        </p:spPr>
+        <p:txBody>
+          <a:bodyPr wrap="square" lIns="0" tIns="0" rIns="0" bIns="0" rtlCol="0" anchor="ctr"/>
+          <a:lstStyle/>
+          <a:p>
+            <a:pPr indent="0" marL="0">
+              <a:buNone/>
+            </a:pPr>
+            <a:r>
+              <a:rPr lang="en-US" sz="950" i="1" dirty="0">
+                <a:solidFill>
+                  <a:srgbClr val="7A90A8"/>
+                </a:solidFill>
+              </a:rPr>
+              <a:t>GitHub Copilot inline</a:t>
+            </a:r>
+            <a:endParaRPr lang="en-US" sz="950" dirty="0"/>
+          </a:p>
+        </p:txBody>
+      </p:sp>
+      <p:sp>
+        <p:nvSpPr>
+          <p:cNvPr id="23" name="Shape 21"/>
+          <p:cNvSpPr/>
+          <p:nvPr/>
+        </p:nvSpPr>
+        <p:spPr>
+          <a:xfrm>
+            <a:off x="320040" y="2368296"/>
+            <a:ext cx="8503920" cy="329184"/>
+          </a:xfrm>
+          <a:prstGeom prst="rect">
+            <a:avLst/>
+          </a:prstGeom>
+          <a:solidFill>
+            <a:srgbClr val="1E3D5A">
+              <a:alpha val="60000"/>
+            </a:srgbClr>
+          </a:solidFill>
+          <a:ln/>
+        </p:spPr>
+      </p:sp>
+      <p:sp>
+        <p:nvSpPr>
+          <p:cNvPr id="24" name="Shape 22"/>
+          <p:cNvSpPr/>
+          <p:nvPr/>
+        </p:nvSpPr>
+        <p:spPr>
+          <a:xfrm>
+            <a:off x="320040" y="2368296"/>
+            <a:ext cx="45720" cy="329184"/>
+          </a:xfrm>
+          <a:prstGeom prst="rect">
+            <a:avLst/>
+          </a:prstGeom>
+          <a:solidFill>
+            <a:srgbClr val="4A7FA8"/>
+          </a:solidFill>
+          <a:ln/>
+        </p:spPr>
+      </p:sp>
+      <p:sp>
+        <p:nvSpPr>
+          <p:cNvPr id="25" name="Text 23"/>
+          <p:cNvSpPr/>
+          <p:nvPr/>
+        </p:nvSpPr>
+        <p:spPr>
+          <a:xfrm>
+            <a:off x="438912" y="2368296"/>
+            <a:ext cx="3602736" cy="329184"/>
+          </a:xfrm>
+          <a:prstGeom prst="rect">
+            <a:avLst/>
+          </a:prstGeom>
+          <a:noFill/>
+          <a:ln/>
+        </p:spPr>
+        <p:txBody>
+          <a:bodyPr wrap="square" lIns="0" tIns="0" rIns="0" bIns="0" rtlCol="0" anchor="ctr"/>
+          <a:lstStyle/>
+          <a:p>
+            <a:pPr indent="0" marL="0">
+              <a:buNone/>
+            </a:pPr>
+            <a:r>
+              <a:rPr lang="en-US" sz="1000" dirty="0">
+                <a:solidFill>
+                  <a:srgbClr val="D4E4F0"/>
+                </a:solidFill>
+              </a:rPr>
+              <a:t>Explore a design option or ideation</a:t>
+            </a:r>
+            <a:endParaRPr lang="en-US" sz="1000" dirty="0"/>
+          </a:p>
+        </p:txBody>
+      </p:sp>
+      <p:sp>
+        <p:nvSpPr>
+          <p:cNvPr id="26" name="Text 24"/>
+          <p:cNvSpPr/>
+          <p:nvPr/>
+        </p:nvSpPr>
+        <p:spPr>
+          <a:xfrm>
+            <a:off x="4114800" y="2368296"/>
+            <a:ext cx="2542032" cy="329184"/>
+          </a:xfrm>
+          <a:prstGeom prst="rect">
+            <a:avLst/>
+          </a:prstGeom>
+          <a:noFill/>
+          <a:ln/>
+        </p:spPr>
+        <p:txBody>
+          <a:bodyPr wrap="square" lIns="0" tIns="0" rIns="0" bIns="0" rtlCol="0" anchor="ctr"/>
+          <a:lstStyle/>
+          <a:p>
+            <a:pPr indent="0" marL="0">
+              <a:buNone/>
+            </a:pPr>
+            <a:r>
+              <a:rPr lang="en-US" sz="1000" b="1" dirty="0">
+                <a:solidFill>
+                  <a:srgbClr val="4A7FA8"/>
+                </a:solidFill>
+              </a:rPr>
+              <a:t>Augmented chat</a:t>
+            </a:r>
+            <a:endParaRPr lang="en-US" sz="1000" dirty="0"/>
+          </a:p>
+        </p:txBody>
+      </p:sp>
+      <p:sp>
+        <p:nvSpPr>
+          <p:cNvPr id="27" name="Text 25"/>
+          <p:cNvSpPr/>
+          <p:nvPr/>
+        </p:nvSpPr>
+        <p:spPr>
+          <a:xfrm>
+            <a:off x="6748272" y="2368296"/>
+            <a:ext cx="1993392" cy="329184"/>
+          </a:xfrm>
+          <a:prstGeom prst="rect">
+            <a:avLst/>
+          </a:prstGeom>
+          <a:noFill/>
+          <a:ln/>
+        </p:spPr>
+        <p:txBody>
+          <a:bodyPr wrap="square" lIns="0" tIns="0" rIns="0" bIns="0" rtlCol="0" anchor="ctr"/>
+          <a:lstStyle/>
+          <a:p>
+            <a:pPr indent="0" marL="0">
+              <a:buNone/>
+            </a:pPr>
+            <a:r>
+              <a:rPr lang="en-US" sz="950" i="1" dirty="0">
+                <a:solidFill>
+                  <a:srgbClr val="7A90A8"/>
+                </a:solidFill>
+              </a:rPr>
+              <a:t>Claude chat + codebase context</a:t>
+            </a:r>
+            <a:endParaRPr lang="en-US" sz="950" dirty="0"/>
+          </a:p>
+        </p:txBody>
+      </p:sp>
+      <p:sp>
+        <p:nvSpPr>
+          <p:cNvPr id="28" name="Shape 26"/>
+          <p:cNvSpPr/>
+          <p:nvPr/>
+        </p:nvSpPr>
+        <p:spPr>
+          <a:xfrm>
+            <a:off x="320040" y="2715768"/>
+            <a:ext cx="8503920" cy="329184"/>
+          </a:xfrm>
+          <a:prstGeom prst="rect">
+            <a:avLst/>
+          </a:prstGeom>
+          <a:solidFill>
+            <a:srgbClr val="2E5073">
+              <a:alpha val="60000"/>
+            </a:srgbClr>
+          </a:solidFill>
+          <a:ln/>
+        </p:spPr>
+      </p:sp>
+      <p:sp>
+        <p:nvSpPr>
+          <p:cNvPr id="29" name="Shape 27"/>
+          <p:cNvSpPr/>
+          <p:nvPr/>
+        </p:nvSpPr>
+        <p:spPr>
+          <a:xfrm>
+            <a:off x="320040" y="2715768"/>
+            <a:ext cx="45720" cy="329184"/>
+          </a:xfrm>
+          <a:prstGeom prst="rect">
+            <a:avLst/>
+          </a:prstGeom>
+          <a:solidFill>
+            <a:srgbClr val="3A7DC9"/>
+          </a:solidFill>
+          <a:ln/>
+        </p:spPr>
+      </p:sp>
+      <p:sp>
+        <p:nvSpPr>
+          <p:cNvPr id="30" name="Text 28"/>
+          <p:cNvSpPr/>
+          <p:nvPr/>
+        </p:nvSpPr>
+        <p:spPr>
+          <a:xfrm>
+            <a:off x="438912" y="2715768"/>
+            <a:ext cx="3602736" cy="329184"/>
+          </a:xfrm>
+          <a:prstGeom prst="rect">
+            <a:avLst/>
+          </a:prstGeom>
+          <a:noFill/>
+          <a:ln/>
+        </p:spPr>
+        <p:txBody>
+          <a:bodyPr wrap="square" lIns="0" tIns="0" rIns="0" bIns="0" rtlCol="0" anchor="ctr"/>
+          <a:lstStyle/>
+          <a:p>
+            <a:pPr indent="0" marL="0">
+              <a:buNone/>
+            </a:pPr>
+            <a:r>
+              <a:rPr lang="en-US" sz="1000" dirty="0">
+                <a:solidFill>
+                  <a:srgbClr val="D4E4F0"/>
+                </a:solidFill>
+              </a:rPr>
+              <a:t>Review a PRD for gaps</a:t>
+            </a:r>
+            <a:endParaRPr lang="en-US" sz="1000" dirty="0"/>
+          </a:p>
+        </p:txBody>
+      </p:sp>
+      <p:sp>
+        <p:nvSpPr>
+          <p:cNvPr id="31" name="Text 29"/>
+          <p:cNvSpPr/>
+          <p:nvPr/>
+        </p:nvSpPr>
+        <p:spPr>
+          <a:xfrm>
+            <a:off x="4114800" y="2715768"/>
+            <a:ext cx="2542032" cy="329184"/>
+          </a:xfrm>
+          <a:prstGeom prst="rect">
+            <a:avLst/>
+          </a:prstGeom>
+          <a:noFill/>
+          <a:ln/>
+        </p:spPr>
+        <p:txBody>
+          <a:bodyPr wrap="square" lIns="0" tIns="0" rIns="0" bIns="0" rtlCol="0" anchor="ctr"/>
+          <a:lstStyle/>
+          <a:p>
+            <a:pPr indent="0" marL="0">
+              <a:buNone/>
+            </a:pPr>
+            <a:r>
+              <a:rPr lang="en-US" sz="1000" b="1" dirty="0">
+                <a:solidFill>
+                  <a:srgbClr val="3A7DC9"/>
+                </a:solidFill>
+              </a:rPr>
+              <a:t>Supervised agent</a:t>
+            </a:r>
+            <a:endParaRPr lang="en-US" sz="1000" dirty="0"/>
+          </a:p>
+        </p:txBody>
+      </p:sp>
+      <p:sp>
+        <p:nvSpPr>
+          <p:cNvPr id="32" name="Text 30"/>
+          <p:cNvSpPr/>
+          <p:nvPr/>
+        </p:nvSpPr>
+        <p:spPr>
+          <a:xfrm>
+            <a:off x="6748272" y="2715768"/>
+            <a:ext cx="1993392" cy="329184"/>
+          </a:xfrm>
+          <a:prstGeom prst="rect">
+            <a:avLst/>
+          </a:prstGeom>
+          <a:noFill/>
+          <a:ln/>
+        </p:spPr>
+        <p:txBody>
+          <a:bodyPr wrap="square" lIns="0" tIns="0" rIns="0" bIns="0" rtlCol="0" anchor="ctr"/>
+          <a:lstStyle/>
+          <a:p>
+            <a:pPr indent="0" marL="0">
+              <a:buNone/>
+            </a:pPr>
+            <a:r>
+              <a:rPr lang="en-US" sz="950" i="1" dirty="0">
+                <a:solidFill>
+                  <a:srgbClr val="7A90A8"/>
+                </a:solidFill>
+              </a:rPr>
+              <a:t>Claude Code</a:t>
+            </a:r>
+            <a:endParaRPr lang="en-US" sz="950" dirty="0"/>
+          </a:p>
+        </p:txBody>
+      </p:sp>
+      <p:sp>
+        <p:nvSpPr>
+          <p:cNvPr id="33" name="Shape 31"/>
+          <p:cNvSpPr/>
+          <p:nvPr/>
+        </p:nvSpPr>
+        <p:spPr>
+          <a:xfrm>
+            <a:off x="320040" y="3063240"/>
+            <a:ext cx="8503920" cy="329184"/>
+          </a:xfrm>
+          <a:prstGeom prst="rect">
+            <a:avLst/>
+          </a:prstGeom>
+          <a:solidFill>
+            <a:srgbClr val="1E3D5A">
+              <a:alpha val="60000"/>
+            </a:srgbClr>
+          </a:solidFill>
+          <a:ln/>
+        </p:spPr>
+      </p:sp>
+      <p:sp>
+        <p:nvSpPr>
+          <p:cNvPr id="34" name="Shape 32"/>
+          <p:cNvSpPr/>
+          <p:nvPr/>
+        </p:nvSpPr>
+        <p:spPr>
+          <a:xfrm>
+            <a:off x="320040" y="3063240"/>
+            <a:ext cx="45720" cy="329184"/>
+          </a:xfrm>
+          <a:prstGeom prst="rect">
+            <a:avLst/>
+          </a:prstGeom>
+          <a:solidFill>
+            <a:srgbClr val="3A7DC9"/>
+          </a:solidFill>
+          <a:ln/>
+        </p:spPr>
+      </p:sp>
+      <p:sp>
+        <p:nvSpPr>
+          <p:cNvPr id="35" name="Text 33"/>
+          <p:cNvSpPr/>
+          <p:nvPr/>
+        </p:nvSpPr>
+        <p:spPr>
+          <a:xfrm>
+            <a:off x="438912" y="3063240"/>
+            <a:ext cx="3602736" cy="329184"/>
+          </a:xfrm>
+          <a:prstGeom prst="rect">
+            <a:avLst/>
+          </a:prstGeom>
+          <a:noFill/>
+          <a:ln/>
+        </p:spPr>
+        <p:txBody>
+          <a:bodyPr wrap="square" lIns="0" tIns="0" rIns="0" bIns="0" rtlCol="0" anchor="ctr"/>
+          <a:lstStyle/>
+          <a:p>
+            <a:pPr indent="0" marL="0">
+              <a:buNone/>
+            </a:pPr>
+            <a:r>
+              <a:rPr lang="en-US" sz="1000" dirty="0">
+                <a:solidFill>
+                  <a:srgbClr val="D4E4F0"/>
+                </a:solidFill>
+              </a:rPr>
+              <a:t>Review a design proposal against the codebase</a:t>
+            </a:r>
+            <a:endParaRPr lang="en-US" sz="1000" dirty="0"/>
+          </a:p>
+        </p:txBody>
+      </p:sp>
+      <p:sp>
+        <p:nvSpPr>
+          <p:cNvPr id="36" name="Text 34"/>
+          <p:cNvSpPr/>
+          <p:nvPr/>
+        </p:nvSpPr>
+        <p:spPr>
+          <a:xfrm>
+            <a:off x="4114800" y="3063240"/>
+            <a:ext cx="2542032" cy="329184"/>
+          </a:xfrm>
+          <a:prstGeom prst="rect">
+            <a:avLst/>
+          </a:prstGeom>
+          <a:noFill/>
+          <a:ln/>
+        </p:spPr>
+        <p:txBody>
+          <a:bodyPr wrap="square" lIns="0" tIns="0" rIns="0" bIns="0" rtlCol="0" anchor="ctr"/>
+          <a:lstStyle/>
+          <a:p>
+            <a:pPr indent="0" marL="0">
+              <a:buNone/>
+            </a:pPr>
+            <a:r>
+              <a:rPr lang="en-US" sz="1000" b="1" dirty="0">
+                <a:solidFill>
+                  <a:srgbClr val="3A7DC9"/>
+                </a:solidFill>
+              </a:rPr>
+              <a:t>Supervised agent</a:t>
+            </a:r>
+            <a:endParaRPr lang="en-US" sz="1000" dirty="0"/>
+          </a:p>
+        </p:txBody>
+      </p:sp>
+      <p:sp>
+        <p:nvSpPr>
+          <p:cNvPr id="37" name="Text 35"/>
+          <p:cNvSpPr/>
+          <p:nvPr/>
+        </p:nvSpPr>
+        <p:spPr>
+          <a:xfrm>
+            <a:off x="6748272" y="3063240"/>
+            <a:ext cx="1993392" cy="329184"/>
+          </a:xfrm>
+          <a:prstGeom prst="rect">
+            <a:avLst/>
+          </a:prstGeom>
+          <a:noFill/>
+          <a:ln/>
+        </p:spPr>
+        <p:txBody>
+          <a:bodyPr wrap="square" lIns="0" tIns="0" rIns="0" bIns="0" rtlCol="0" anchor="ctr"/>
+          <a:lstStyle/>
+          <a:p>
+            <a:pPr indent="0" marL="0">
+              <a:buNone/>
+            </a:pPr>
+            <a:r>
+              <a:rPr lang="en-US" sz="950" i="1" dirty="0">
+                <a:solidFill>
+                  <a:srgbClr val="7A90A8"/>
+                </a:solidFill>
+              </a:rPr>
+              <a:t>Claude Code</a:t>
+            </a:r>
+            <a:endParaRPr lang="en-US" sz="950" dirty="0"/>
+          </a:p>
+        </p:txBody>
+      </p:sp>
+      <p:sp>
+        <p:nvSpPr>
+          <p:cNvPr id="38" name="Shape 36"/>
+          <p:cNvSpPr/>
+          <p:nvPr/>
+        </p:nvSpPr>
+        <p:spPr>
+          <a:xfrm>
+            <a:off x="320040" y="3410712"/>
+            <a:ext cx="8503920" cy="329184"/>
+          </a:xfrm>
+          <a:prstGeom prst="rect">
+            <a:avLst/>
+          </a:prstGeom>
+          <a:solidFill>
+            <a:srgbClr val="2E5073">
+              <a:alpha val="60000"/>
+            </a:srgbClr>
+          </a:solidFill>
+          <a:ln/>
+        </p:spPr>
+      </p:sp>
+      <p:sp>
+        <p:nvSpPr>
+          <p:cNvPr id="39" name="Shape 37"/>
+          <p:cNvSpPr/>
+          <p:nvPr/>
+        </p:nvSpPr>
+        <p:spPr>
+          <a:xfrm>
+            <a:off x="320040" y="3410712"/>
+            <a:ext cx="45720" cy="329184"/>
+          </a:xfrm>
+          <a:prstGeom prst="rect">
+            <a:avLst/>
+          </a:prstGeom>
+          <a:solidFill>
+            <a:srgbClr val="3A7DC9"/>
+          </a:solidFill>
+          <a:ln/>
+        </p:spPr>
+      </p:sp>
+      <p:sp>
+        <p:nvSpPr>
+          <p:cNvPr id="40" name="Text 38"/>
+          <p:cNvSpPr/>
+          <p:nvPr/>
+        </p:nvSpPr>
+        <p:spPr>
+          <a:xfrm>
+            <a:off x="438912" y="3410712"/>
+            <a:ext cx="3602736" cy="329184"/>
+          </a:xfrm>
+          <a:prstGeom prst="rect">
+            <a:avLst/>
+          </a:prstGeom>
+          <a:noFill/>
+          <a:ln/>
+        </p:spPr>
+        <p:txBody>
+          <a:bodyPr wrap="square" lIns="0" tIns="0" rIns="0" bIns="0" rtlCol="0" anchor="ctr"/>
+          <a:lstStyle/>
+          <a:p>
+            <a:pPr indent="0" marL="0">
+              <a:buNone/>
+            </a:pPr>
+            <a:r>
+              <a:rPr lang="en-US" sz="1000" dirty="0">
+                <a:solidFill>
+                  <a:srgbClr val="D4E4F0"/>
+                </a:solidFill>
+              </a:rPr>
+              <a:t>Review a PR against a spec</a:t>
+            </a:r>
+            <a:endParaRPr lang="en-US" sz="1000" dirty="0"/>
+          </a:p>
+        </p:txBody>
+      </p:sp>
+      <p:sp>
+        <p:nvSpPr>
+          <p:cNvPr id="41" name="Text 39"/>
+          <p:cNvSpPr/>
+          <p:nvPr/>
+        </p:nvSpPr>
+        <p:spPr>
+          <a:xfrm>
+            <a:off x="4114800" y="3410712"/>
+            <a:ext cx="2542032" cy="329184"/>
+          </a:xfrm>
+          <a:prstGeom prst="rect">
+            <a:avLst/>
+          </a:prstGeom>
+          <a:noFill/>
+          <a:ln/>
+        </p:spPr>
+        <p:txBody>
+          <a:bodyPr wrap="square" lIns="0" tIns="0" rIns="0" bIns="0" rtlCol="0" anchor="ctr"/>
+          <a:lstStyle/>
+          <a:p>
+            <a:pPr indent="0" marL="0">
+              <a:buNone/>
+            </a:pPr>
+            <a:r>
+              <a:rPr lang="en-US" sz="1000" b="1" dirty="0">
+                <a:solidFill>
+                  <a:srgbClr val="3A7DC9"/>
+                </a:solidFill>
+              </a:rPr>
+              <a:t>Supervised agent</a:t>
+            </a:r>
+            <a:endParaRPr lang="en-US" sz="1000" dirty="0"/>
+          </a:p>
+        </p:txBody>
+      </p:sp>
+      <p:sp>
+        <p:nvSpPr>
+          <p:cNvPr id="42" name="Text 40"/>
+          <p:cNvSpPr/>
+          <p:nvPr/>
+        </p:nvSpPr>
+        <p:spPr>
+          <a:xfrm>
+            <a:off x="6748272" y="3410712"/>
+            <a:ext cx="1993392" cy="329184"/>
+          </a:xfrm>
+          <a:prstGeom prst="rect">
+            <a:avLst/>
+          </a:prstGeom>
+          <a:noFill/>
+          <a:ln/>
+        </p:spPr>
+        <p:txBody>
+          <a:bodyPr wrap="square" lIns="0" tIns="0" rIns="0" bIns="0" rtlCol="0" anchor="ctr"/>
+          <a:lstStyle/>
+          <a:p>
+            <a:pPr indent="0" marL="0">
+              <a:buNone/>
+            </a:pPr>
+            <a:r>
+              <a:rPr lang="en-US" sz="950" i="1" dirty="0">
+                <a:solidFill>
+                  <a:srgbClr val="7A90A8"/>
+                </a:solidFill>
+              </a:rPr>
+              <a:t>Claude Code</a:t>
+            </a:r>
+            <a:endParaRPr lang="en-US" sz="950" dirty="0"/>
+          </a:p>
+        </p:txBody>
+      </p:sp>
+      <p:sp>
+        <p:nvSpPr>
+          <p:cNvPr id="43" name="Shape 41"/>
+          <p:cNvSpPr/>
+          <p:nvPr/>
+        </p:nvSpPr>
+        <p:spPr>
+          <a:xfrm>
+            <a:off x="320040" y="3758184"/>
+            <a:ext cx="8503920" cy="329184"/>
+          </a:xfrm>
+          <a:prstGeom prst="rect">
+            <a:avLst/>
+          </a:prstGeom>
+          <a:solidFill>
+            <a:srgbClr val="1E3D5A">
+              <a:alpha val="60000"/>
+            </a:srgbClr>
+          </a:solidFill>
+          <a:ln/>
+        </p:spPr>
+      </p:sp>
+      <p:sp>
+        <p:nvSpPr>
+          <p:cNvPr id="44" name="Shape 42"/>
+          <p:cNvSpPr/>
+          <p:nvPr/>
+        </p:nvSpPr>
+        <p:spPr>
+          <a:xfrm>
+            <a:off x="320040" y="3758184"/>
+            <a:ext cx="45720" cy="329184"/>
+          </a:xfrm>
+          <a:prstGeom prst="rect">
+            <a:avLst/>
+          </a:prstGeom>
+          <a:solidFill>
+            <a:srgbClr val="3A7DC9"/>
+          </a:solidFill>
+          <a:ln/>
+        </p:spPr>
+      </p:sp>
+      <p:sp>
+        <p:nvSpPr>
+          <p:cNvPr id="45" name="Text 43"/>
+          <p:cNvSpPr/>
+          <p:nvPr/>
+        </p:nvSpPr>
+        <p:spPr>
+          <a:xfrm>
+            <a:off x="438912" y="3758184"/>
+            <a:ext cx="3602736" cy="329184"/>
+          </a:xfrm>
+          <a:prstGeom prst="rect">
+            <a:avLst/>
+          </a:prstGeom>
+          <a:noFill/>
+          <a:ln/>
+        </p:spPr>
+        <p:txBody>
+          <a:bodyPr wrap="square" lIns="0" tIns="0" rIns="0" bIns="0" rtlCol="0" anchor="ctr"/>
+          <a:lstStyle/>
+          <a:p>
+            <a:pPr indent="0" marL="0">
+              <a:buNone/>
+            </a:pPr>
+            <a:r>
+              <a:rPr lang="en-US" sz="1000" dirty="0">
+                <a:solidFill>
+                  <a:srgbClr val="D4E4F0"/>
+                </a:solidFill>
+              </a:rPr>
+              <a:t>Review docs for accuracy against code</a:t>
+            </a:r>
+            <a:endParaRPr lang="en-US" sz="1000" dirty="0"/>
+          </a:p>
+        </p:txBody>
+      </p:sp>
+      <p:sp>
+        <p:nvSpPr>
+          <p:cNvPr id="46" name="Text 44"/>
+          <p:cNvSpPr/>
+          <p:nvPr/>
+        </p:nvSpPr>
+        <p:spPr>
+          <a:xfrm>
+            <a:off x="4114800" y="3758184"/>
+            <a:ext cx="2542032" cy="329184"/>
+          </a:xfrm>
+          <a:prstGeom prst="rect">
+            <a:avLst/>
+          </a:prstGeom>
+          <a:noFill/>
+          <a:ln/>
+        </p:spPr>
+        <p:txBody>
+          <a:bodyPr wrap="square" lIns="0" tIns="0" rIns="0" bIns="0" rtlCol="0" anchor="ctr"/>
+          <a:lstStyle/>
+          <a:p>
+            <a:pPr indent="0" marL="0">
+              <a:buNone/>
+            </a:pPr>
+            <a:r>
+              <a:rPr lang="en-US" sz="1000" b="1" dirty="0">
+                <a:solidFill>
+                  <a:srgbClr val="3A7DC9"/>
+                </a:solidFill>
+              </a:rPr>
+              <a:t>Supervised agent</a:t>
+            </a:r>
+            <a:endParaRPr lang="en-US" sz="1000" dirty="0"/>
+          </a:p>
+        </p:txBody>
+      </p:sp>
+      <p:sp>
+        <p:nvSpPr>
+          <p:cNvPr id="47" name="Text 45"/>
+          <p:cNvSpPr/>
+          <p:nvPr/>
+        </p:nvSpPr>
+        <p:spPr>
+          <a:xfrm>
+            <a:off x="6748272" y="3758184"/>
+            <a:ext cx="1993392" cy="329184"/>
+          </a:xfrm>
+          <a:prstGeom prst="rect">
+            <a:avLst/>
+          </a:prstGeom>
+          <a:noFill/>
+          <a:ln/>
+        </p:spPr>
+        <p:txBody>
+          <a:bodyPr wrap="square" lIns="0" tIns="0" rIns="0" bIns="0" rtlCol="0" anchor="ctr"/>
+          <a:lstStyle/>
+          <a:p>
+            <a:pPr indent="0" marL="0">
+              <a:buNone/>
+            </a:pPr>
+            <a:r>
+              <a:rPr lang="en-US" sz="950" i="1" dirty="0">
+                <a:solidFill>
+                  <a:srgbClr val="7A90A8"/>
+                </a:solidFill>
+              </a:rPr>
+              <a:t>Claude Code</a:t>
+            </a:r>
+            <a:endParaRPr lang="en-US" sz="950" dirty="0"/>
+          </a:p>
+        </p:txBody>
+      </p:sp>
+      <p:sp>
+        <p:nvSpPr>
+          <p:cNvPr id="48" name="Shape 46"/>
+          <p:cNvSpPr/>
+          <p:nvPr/>
+        </p:nvSpPr>
+        <p:spPr>
+          <a:xfrm>
+            <a:off x="320040" y="4105656"/>
+            <a:ext cx="8503920" cy="329184"/>
+          </a:xfrm>
+          <a:prstGeom prst="rect">
+            <a:avLst/>
+          </a:prstGeom>
+          <a:solidFill>
+            <a:srgbClr val="2E5073">
+              <a:alpha val="60000"/>
+            </a:srgbClr>
+          </a:solidFill>
+          <a:ln/>
+        </p:spPr>
+      </p:sp>
+      <p:sp>
+        <p:nvSpPr>
+          <p:cNvPr id="49" name="Shape 47"/>
+          <p:cNvSpPr/>
+          <p:nvPr/>
+        </p:nvSpPr>
+        <p:spPr>
+          <a:xfrm>
+            <a:off x="320040" y="4105656"/>
+            <a:ext cx="45720" cy="329184"/>
+          </a:xfrm>
+          <a:prstGeom prst="rect">
+            <a:avLst/>
+          </a:prstGeom>
+          <a:solidFill>
+            <a:srgbClr val="3A7DC9"/>
+          </a:solidFill>
+          <a:ln/>
+        </p:spPr>
+      </p:sp>
+      <p:sp>
+        <p:nvSpPr>
+          <p:cNvPr id="50" name="Text 48"/>
+          <p:cNvSpPr/>
+          <p:nvPr/>
+        </p:nvSpPr>
+        <p:spPr>
+          <a:xfrm>
+            <a:off x="438912" y="4105656"/>
+            <a:ext cx="3602736" cy="329184"/>
+          </a:xfrm>
+          <a:prstGeom prst="rect">
+            <a:avLst/>
+          </a:prstGeom>
+          <a:noFill/>
+          <a:ln/>
+        </p:spPr>
+        <p:txBody>
+          <a:bodyPr wrap="square" lIns="0" tIns="0" rIns="0" bIns="0" rtlCol="0" anchor="ctr"/>
+          <a:lstStyle/>
+          <a:p>
+            <a:pPr indent="0" marL="0">
+              <a:buNone/>
+            </a:pPr>
+            <a:r>
+              <a:rPr lang="en-US" sz="1000" dirty="0">
+                <a:solidFill>
+                  <a:srgbClr val="D4E4F0"/>
+                </a:solidFill>
+              </a:rPr>
+              <a:t>Write a new feature end-to-end</a:t>
+            </a:r>
+            <a:endParaRPr lang="en-US" sz="1000" dirty="0"/>
+          </a:p>
+        </p:txBody>
+      </p:sp>
+      <p:sp>
+        <p:nvSpPr>
+          <p:cNvPr id="51" name="Text 49"/>
+          <p:cNvSpPr/>
+          <p:nvPr/>
+        </p:nvSpPr>
+        <p:spPr>
+          <a:xfrm>
+            <a:off x="4114800" y="4105656"/>
+            <a:ext cx="2542032" cy="329184"/>
+          </a:xfrm>
+          <a:prstGeom prst="rect">
+            <a:avLst/>
+          </a:prstGeom>
+          <a:noFill/>
+          <a:ln/>
+        </p:spPr>
+        <p:txBody>
+          <a:bodyPr wrap="square" lIns="0" tIns="0" rIns="0" bIns="0" rtlCol="0" anchor="ctr"/>
+          <a:lstStyle/>
+          <a:p>
+            <a:pPr indent="0" marL="0">
+              <a:buNone/>
+            </a:pPr>
+            <a:r>
+              <a:rPr lang="en-US" sz="1000" b="1" dirty="0">
+                <a:solidFill>
+                  <a:srgbClr val="3A7DC9"/>
+                </a:solidFill>
+              </a:rPr>
+              <a:t>Supervised agent</a:t>
+            </a:r>
+            <a:endParaRPr lang="en-US" sz="1000" dirty="0"/>
+          </a:p>
+        </p:txBody>
+      </p:sp>
+      <p:sp>
+        <p:nvSpPr>
+          <p:cNvPr id="52" name="Text 50"/>
+          <p:cNvSpPr/>
+          <p:nvPr/>
+        </p:nvSpPr>
+        <p:spPr>
+          <a:xfrm>
+            <a:off x="6748272" y="4105656"/>
+            <a:ext cx="1993392" cy="329184"/>
+          </a:xfrm>
+          <a:prstGeom prst="rect">
+            <a:avLst/>
+          </a:prstGeom>
+          <a:noFill/>
+          <a:ln/>
+        </p:spPr>
+        <p:txBody>
+          <a:bodyPr wrap="square" lIns="0" tIns="0" rIns="0" bIns="0" rtlCol="0" anchor="ctr"/>
+          <a:lstStyle/>
+          <a:p>
+            <a:pPr indent="0" marL="0">
+              <a:buNone/>
+            </a:pPr>
+            <a:r>
+              <a:rPr lang="en-US" sz="950" i="1" dirty="0">
+                <a:solidFill>
+                  <a:srgbClr val="7A90A8"/>
+                </a:solidFill>
+              </a:rPr>
+              <a:t>Claude Code</a:t>
+            </a:r>
+            <a:endParaRPr lang="en-US" sz="950" dirty="0"/>
+          </a:p>
+        </p:txBody>
+      </p:sp>
+      <p:sp>
+        <p:nvSpPr>
+          <p:cNvPr id="53" name="Shape 51"/>
+          <p:cNvSpPr/>
+          <p:nvPr/>
+        </p:nvSpPr>
+        <p:spPr>
+          <a:xfrm>
+            <a:off x="320040" y="4453128"/>
+            <a:ext cx="8503920" cy="329184"/>
+          </a:xfrm>
+          <a:prstGeom prst="rect">
+            <a:avLst/>
+          </a:prstGeom>
+          <a:solidFill>
+            <a:srgbClr val="1E3D5A">
+              <a:alpha val="60000"/>
+            </a:srgbClr>
+          </a:solidFill>
+          <a:ln/>
+        </p:spPr>
+      </p:sp>
+      <p:sp>
+        <p:nvSpPr>
+          <p:cNvPr id="54" name="Shape 52"/>
+          <p:cNvSpPr/>
+          <p:nvPr/>
+        </p:nvSpPr>
+        <p:spPr>
+          <a:xfrm>
+            <a:off x="320040" y="4453128"/>
+            <a:ext cx="45720" cy="329184"/>
+          </a:xfrm>
+          <a:prstGeom prst="rect">
+            <a:avLst/>
+          </a:prstGeom>
+          <a:solidFill>
+            <a:srgbClr val="4A7FA8"/>
+          </a:solidFill>
+          <a:ln/>
+        </p:spPr>
+      </p:sp>
+      <p:sp>
+        <p:nvSpPr>
+          <p:cNvPr id="55" name="Text 53"/>
+          <p:cNvSpPr/>
+          <p:nvPr/>
+        </p:nvSpPr>
+        <p:spPr>
+          <a:xfrm>
+            <a:off x="438912" y="4453128"/>
+            <a:ext cx="3602736" cy="329184"/>
+          </a:xfrm>
+          <a:prstGeom prst="rect">
+            <a:avLst/>
+          </a:prstGeom>
+          <a:noFill/>
+          <a:ln/>
+        </p:spPr>
+        <p:txBody>
+          <a:bodyPr wrap="square" lIns="0" tIns="0" rIns="0" bIns="0" rtlCol="0" anchor="ctr"/>
+          <a:lstStyle/>
+          <a:p>
+            <a:pPr indent="0" marL="0">
+              <a:buNone/>
+            </a:pPr>
+            <a:r>
+              <a:rPr lang="en-US" sz="1000" dirty="0">
+                <a:solidFill>
+                  <a:srgbClr val="D4E4F0"/>
+                </a:solidFill>
+              </a:rPr>
+              <a:t>Onboard a developer to a codebase</a:t>
+            </a:r>
+            <a:endParaRPr lang="en-US" sz="1000" dirty="0"/>
+          </a:p>
+        </p:txBody>
+      </p:sp>
+      <p:sp>
+        <p:nvSpPr>
+          <p:cNvPr id="56" name="Text 54"/>
+          <p:cNvSpPr/>
+          <p:nvPr/>
+        </p:nvSpPr>
+        <p:spPr>
+          <a:xfrm>
+            <a:off x="4114800" y="4453128"/>
+            <a:ext cx="2542032" cy="329184"/>
+          </a:xfrm>
+          <a:prstGeom prst="rect">
+            <a:avLst/>
+          </a:prstGeom>
+          <a:noFill/>
+          <a:ln/>
+        </p:spPr>
+        <p:txBody>
+          <a:bodyPr wrap="square" lIns="0" tIns="0" rIns="0" bIns="0" rtlCol="0" anchor="ctr"/>
+          <a:lstStyle/>
+          <a:p>
+            <a:pPr indent="0" marL="0">
+              <a:buNone/>
+            </a:pPr>
+            <a:r>
+              <a:rPr lang="en-US" sz="1000" b="1" dirty="0">
+                <a:solidFill>
+                  <a:srgbClr val="4A7FA8"/>
+                </a:solidFill>
+              </a:rPr>
+              <a:t>Augmented chat</a:t>
+            </a:r>
+            <a:endParaRPr lang="en-US" sz="1000" dirty="0"/>
+          </a:p>
+        </p:txBody>
+      </p:sp>
+      <p:sp>
+        <p:nvSpPr>
+          <p:cNvPr id="57" name="Text 55"/>
+          <p:cNvSpPr/>
+          <p:nvPr/>
+        </p:nvSpPr>
+        <p:spPr>
+          <a:xfrm>
+            <a:off x="6748272" y="4453128"/>
+            <a:ext cx="1993392" cy="329184"/>
+          </a:xfrm>
+          <a:prstGeom prst="rect">
+            <a:avLst/>
+          </a:prstGeom>
+          <a:noFill/>
+          <a:ln/>
+        </p:spPr>
+        <p:txBody>
+          <a:bodyPr wrap="square" lIns="0" tIns="0" rIns="0" bIns="0" rtlCol="0" anchor="ctr"/>
+          <a:lstStyle/>
+          <a:p>
+            <a:pPr indent="0" marL="0">
+              <a:buNone/>
+            </a:pPr>
+            <a:r>
+              <a:rPr lang="en-US" sz="950" i="1" dirty="0">
+                <a:solidFill>
+                  <a:srgbClr val="7A90A8"/>
+                </a:solidFill>
+              </a:rPr>
+              <a:t>Claude Code / Copilot Chat</a:t>
+            </a:r>
+            <a:endParaRPr lang="en-US" sz="950" dirty="0"/>
+          </a:p>
+        </p:txBody>
+      </p:sp>
+      <p:sp>
+        <p:nvSpPr>
+          <p:cNvPr id="58" name="Shape 56"/>
+          <p:cNvSpPr/>
+          <p:nvPr/>
+        </p:nvSpPr>
+        <p:spPr>
+          <a:xfrm>
+            <a:off x="320040" y="4800600"/>
+            <a:ext cx="8503920" cy="329184"/>
+          </a:xfrm>
+          <a:prstGeom prst="rect">
+            <a:avLst/>
+          </a:prstGeom>
+          <a:solidFill>
+            <a:srgbClr val="2E5073">
+              <a:alpha val="60000"/>
+            </a:srgbClr>
+          </a:solidFill>
+          <a:ln/>
+        </p:spPr>
+      </p:sp>
+      <p:sp>
+        <p:nvSpPr>
+          <p:cNvPr id="59" name="Shape 57"/>
+          <p:cNvSpPr/>
+          <p:nvPr/>
+        </p:nvSpPr>
+        <p:spPr>
+          <a:xfrm>
+            <a:off x="320040" y="4800600"/>
+            <a:ext cx="45720" cy="329184"/>
           </a:xfrm>
           <a:prstGeom prst="rect">
             <a:avLst/>
@@ -10114,14 +12426,272 @@
       </p:sp>
       <p:sp>
         <p:nvSpPr>
-          <p:cNvPr id="6" name="Text 4"/>
-          <p:cNvSpPr/>
-          <p:nvPr/>
-        </p:nvSpPr>
-        <p:spPr>
-          <a:xfrm>
-            <a:off x="320040" y="1325880"/>
-            <a:ext cx="2697480" cy="548640"/>
+          <p:cNvPr id="60" name="Text 58"/>
+          <p:cNvSpPr/>
+          <p:nvPr/>
+        </p:nvSpPr>
+        <p:spPr>
+          <a:xfrm>
+            <a:off x="438912" y="4800600"/>
+            <a:ext cx="3602736" cy="329184"/>
+          </a:xfrm>
+          <a:prstGeom prst="rect">
+            <a:avLst/>
+          </a:prstGeom>
+          <a:noFill/>
+          <a:ln/>
+        </p:spPr>
+        <p:txBody>
+          <a:bodyPr wrap="square" lIns="0" tIns="0" rIns="0" bIns="0" rtlCol="0" anchor="ctr"/>
+          <a:lstStyle/>
+          <a:p>
+            <a:pPr indent="0" marL="0">
+              <a:buNone/>
+            </a:pPr>
+            <a:r>
+              <a:rPr lang="en-US" sz="1000" dirty="0">
+                <a:solidFill>
+                  <a:srgbClr val="D4E4F0"/>
+                </a:solidFill>
+              </a:rPr>
+              <a:t>Nightly hygiene (deps, coverage, lint)</a:t>
+            </a:r>
+            <a:endParaRPr lang="en-US" sz="1000" dirty="0"/>
+          </a:p>
+        </p:txBody>
+      </p:sp>
+      <p:sp>
+        <p:nvSpPr>
+          <p:cNvPr id="61" name="Text 59"/>
+          <p:cNvSpPr/>
+          <p:nvPr/>
+        </p:nvSpPr>
+        <p:spPr>
+          <a:xfrm>
+            <a:off x="4114800" y="4800600"/>
+            <a:ext cx="2542032" cy="329184"/>
+          </a:xfrm>
+          <a:prstGeom prst="rect">
+            <a:avLst/>
+          </a:prstGeom>
+          <a:noFill/>
+          <a:ln/>
+        </p:spPr>
+        <p:txBody>
+          <a:bodyPr wrap="square" lIns="0" tIns="0" rIns="0" bIns="0" rtlCol="0" anchor="ctr"/>
+          <a:lstStyle/>
+          <a:p>
+            <a:pPr indent="0" marL="0">
+              <a:buNone/>
+            </a:pPr>
+            <a:r>
+              <a:rPr lang="en-US" sz="1000" b="1" dirty="0">
+                <a:solidFill>
+                  <a:srgbClr val="3A7E6E"/>
+                </a:solidFill>
+              </a:rPr>
+              <a:t>Supervised agent with review gate</a:t>
+            </a:r>
+            <a:endParaRPr lang="en-US" sz="1000" dirty="0"/>
+          </a:p>
+        </p:txBody>
+      </p:sp>
+      <p:sp>
+        <p:nvSpPr>
+          <p:cNvPr id="62" name="Text 60"/>
+          <p:cNvSpPr/>
+          <p:nvPr/>
+        </p:nvSpPr>
+        <p:spPr>
+          <a:xfrm>
+            <a:off x="6748272" y="4800600"/>
+            <a:ext cx="1993392" cy="329184"/>
+          </a:xfrm>
+          <a:prstGeom prst="rect">
+            <a:avLst/>
+          </a:prstGeom>
+          <a:noFill/>
+          <a:ln/>
+        </p:spPr>
+        <p:txBody>
+          <a:bodyPr wrap="square" lIns="0" tIns="0" rIns="0" bIns="0" rtlCol="0" anchor="ctr"/>
+          <a:lstStyle/>
+          <a:p>
+            <a:pPr indent="0" marL="0">
+              <a:buNone/>
+            </a:pPr>
+            <a:r>
+              <a:rPr lang="en-US" sz="950" i="1" dirty="0">
+                <a:solidFill>
+                  <a:srgbClr val="7A90A8"/>
+                </a:solidFill>
+              </a:rPr>
+              <a:t>Claude Code scheduled</a:t>
+            </a:r>
+            <a:endParaRPr lang="en-US" sz="950" dirty="0"/>
+          </a:p>
+        </p:txBody>
+      </p:sp>
+      <p:sp>
+        <p:nvSpPr>
+          <p:cNvPr id="63" name="Shape 61"/>
+          <p:cNvSpPr/>
+          <p:nvPr/>
+        </p:nvSpPr>
+        <p:spPr>
+          <a:xfrm>
+            <a:off x="320040" y="5148072"/>
+            <a:ext cx="8503920" cy="329184"/>
+          </a:xfrm>
+          <a:prstGeom prst="rect">
+            <a:avLst/>
+          </a:prstGeom>
+          <a:solidFill>
+            <a:srgbClr val="1E3D5A">
+              <a:alpha val="60000"/>
+            </a:srgbClr>
+          </a:solidFill>
+          <a:ln/>
+        </p:spPr>
+      </p:sp>
+      <p:sp>
+        <p:nvSpPr>
+          <p:cNvPr id="64" name="Shape 62"/>
+          <p:cNvSpPr/>
+          <p:nvPr/>
+        </p:nvSpPr>
+        <p:spPr>
+          <a:xfrm>
+            <a:off x="320040" y="5148072"/>
+            <a:ext cx="45720" cy="329184"/>
+          </a:xfrm>
+          <a:prstGeom prst="rect">
+            <a:avLst/>
+          </a:prstGeom>
+          <a:solidFill>
+            <a:srgbClr val="8096B0"/>
+          </a:solidFill>
+          <a:ln/>
+        </p:spPr>
+      </p:sp>
+      <p:sp>
+        <p:nvSpPr>
+          <p:cNvPr id="65" name="Text 63"/>
+          <p:cNvSpPr/>
+          <p:nvPr/>
+        </p:nvSpPr>
+        <p:spPr>
+          <a:xfrm>
+            <a:off x="438912" y="5148072"/>
+            <a:ext cx="3602736" cy="329184"/>
+          </a:xfrm>
+          <a:prstGeom prst="rect">
+            <a:avLst/>
+          </a:prstGeom>
+          <a:noFill/>
+          <a:ln/>
+        </p:spPr>
+        <p:txBody>
+          <a:bodyPr wrap="square" lIns="0" tIns="0" rIns="0" bIns="0" rtlCol="0" anchor="ctr"/>
+          <a:lstStyle/>
+          <a:p>
+            <a:pPr indent="0" marL="0">
+              <a:buNone/>
+            </a:pPr>
+            <a:r>
+              <a:rPr lang="en-US" sz="1000" dirty="0">
+                <a:solidFill>
+                  <a:srgbClr val="D4E4F0"/>
+                </a:solidFill>
+              </a:rPr>
+              <a:t>Fully autonomous merge without review</a:t>
+            </a:r>
+            <a:endParaRPr lang="en-US" sz="1000" dirty="0"/>
+          </a:p>
+        </p:txBody>
+      </p:sp>
+      <p:sp>
+        <p:nvSpPr>
+          <p:cNvPr id="66" name="Text 64"/>
+          <p:cNvSpPr/>
+          <p:nvPr/>
+        </p:nvSpPr>
+        <p:spPr>
+          <a:xfrm>
+            <a:off x="4114800" y="5148072"/>
+            <a:ext cx="2542032" cy="329184"/>
+          </a:xfrm>
+          <a:prstGeom prst="rect">
+            <a:avLst/>
+          </a:prstGeom>
+          <a:noFill/>
+          <a:ln/>
+        </p:spPr>
+        <p:txBody>
+          <a:bodyPr wrap="square" lIns="0" tIns="0" rIns="0" bIns="0" rtlCol="0" anchor="ctr"/>
+          <a:lstStyle/>
+          <a:p>
+            <a:pPr indent="0" marL="0">
+              <a:buNone/>
+            </a:pPr>
+            <a:r>
+              <a:rPr lang="en-US" sz="1000" b="1" dirty="0">
+                <a:solidFill>
+                  <a:srgbClr val="8096B0"/>
+                </a:solidFill>
+              </a:rPr>
+              <a:t>Do not do this</a:t>
+            </a:r>
+            <a:endParaRPr lang="en-US" sz="1000" dirty="0"/>
+          </a:p>
+        </p:txBody>
+      </p:sp>
+      <p:sp>
+        <p:nvSpPr>
+          <p:cNvPr id="67" name="Text 65"/>
+          <p:cNvSpPr/>
+          <p:nvPr/>
+        </p:nvSpPr>
+        <p:spPr>
+          <a:xfrm>
+            <a:off x="6748272" y="5148072"/>
+            <a:ext cx="1993392" cy="329184"/>
+          </a:xfrm>
+          <a:prstGeom prst="rect">
+            <a:avLst/>
+          </a:prstGeom>
+          <a:noFill/>
+          <a:ln/>
+        </p:spPr>
+        <p:txBody>
+          <a:bodyPr wrap="square" lIns="0" tIns="0" rIns="0" bIns="0" rtlCol="0" anchor="ctr"/>
+          <a:lstStyle/>
+          <a:p>
+            <a:pPr indent="0" marL="0">
+              <a:buNone/>
+            </a:pPr>
+            <a:r>
+              <a:rPr lang="en-US" sz="950" i="1" dirty="0">
+                <a:solidFill>
+                  <a:srgbClr val="7A90A8"/>
+                </a:solidFill>
+              </a:rPr>
+              <a:t>—</a:t>
+            </a:r>
+            <a:endParaRPr lang="en-US" sz="950" dirty="0"/>
+          </a:p>
+        </p:txBody>
+      </p:sp>
+      <p:sp>
+        <p:nvSpPr>
+          <p:cNvPr id="68" name="Text 66"/>
+          <p:cNvSpPr/>
+          <p:nvPr/>
+        </p:nvSpPr>
+        <p:spPr>
+          <a:xfrm>
+            <a:off x="320040" y="5029200"/>
+            <a:ext cx="8503920" cy="219456"/>
           </a:xfrm>
           <a:prstGeom prst="rect">
             <a:avLst/>
@@ -10137,1017 +12707,14 @@
               <a:buNone/>
             </a:pPr>
             <a:r>
-              <a:rPr lang="en-US" sz="1200" b="1" dirty="0">
-                <a:solidFill>
-                  <a:srgbClr val="FFFFFF"/>
-                </a:solidFill>
-              </a:rPr>
-              <a:t>TIER 1  ·  Fully Automated</a:t>
-            </a:r>
-            <a:endParaRPr lang="en-US" sz="1200" dirty="0"/>
-          </a:p>
-        </p:txBody>
-      </p:sp>
-      <p:sp>
-        <p:nvSpPr>
-          <p:cNvPr id="7" name="Text 5"/>
-          <p:cNvSpPr/>
-          <p:nvPr/>
-        </p:nvSpPr>
-        <p:spPr>
-          <a:xfrm>
-            <a:off x="457200" y="1965960"/>
-            <a:ext cx="2423160" cy="256032"/>
-          </a:xfrm>
-          <a:prstGeom prst="rect">
-            <a:avLst/>
-          </a:prstGeom>
-          <a:noFill/>
-          <a:ln/>
-        </p:spPr>
-        <p:txBody>
-          <a:bodyPr wrap="square" lIns="0" tIns="0" rIns="0" bIns="0" rtlCol="0" anchor="ctr"/>
-          <a:lstStyle/>
-          <a:p>
-            <a:pPr indent="0" marL="0">
-              <a:buNone/>
-            </a:pPr>
-            <a:r>
-              <a:rPr lang="en-US" sz="900" b="1" spc="200" kern="0" dirty="0">
-                <a:solidFill>
-                  <a:srgbClr val="3A7E6E"/>
-                </a:solidFill>
-              </a:rPr>
-              <a:t>WHEN TO USE</a:t>
-            </a:r>
-            <a:endParaRPr lang="en-US" sz="900" dirty="0"/>
-          </a:p>
-        </p:txBody>
-      </p:sp>
-      <p:sp>
-        <p:nvSpPr>
-          <p:cNvPr id="8" name="Text 6"/>
-          <p:cNvSpPr/>
-          <p:nvPr/>
-        </p:nvSpPr>
-        <p:spPr>
-          <a:xfrm>
-            <a:off x="457200" y="2221992"/>
-            <a:ext cx="2423160" cy="347472"/>
-          </a:xfrm>
-          <a:prstGeom prst="rect">
-            <a:avLst/>
-          </a:prstGeom>
-          <a:noFill/>
-          <a:ln/>
-        </p:spPr>
-        <p:txBody>
-          <a:bodyPr wrap="square" lIns="0" tIns="0" rIns="0" bIns="0" rtlCol="0" anchor="ctr"/>
-          <a:lstStyle/>
-          <a:p>
-            <a:pPr indent="0" marL="0">
-              <a:buNone/>
-            </a:pPr>
-            <a:r>
-              <a:rPr lang="en-US" sz="1150" dirty="0">
-                <a:solidFill>
-                  <a:srgbClr val="FFFFFF"/>
-                </a:solidFill>
-              </a:rPr>
-              <a:t>Low-risk, reversible tasks</a:t>
-            </a:r>
-            <a:endParaRPr lang="en-US" sz="1150" dirty="0"/>
-          </a:p>
-        </p:txBody>
-      </p:sp>
-      <p:sp>
-        <p:nvSpPr>
-          <p:cNvPr id="9" name="Text 7"/>
-          <p:cNvSpPr/>
-          <p:nvPr/>
-        </p:nvSpPr>
-        <p:spPr>
-          <a:xfrm>
-            <a:off x="457200" y="2679192"/>
-            <a:ext cx="2423160" cy="256032"/>
-          </a:xfrm>
-          <a:prstGeom prst="rect">
-            <a:avLst/>
-          </a:prstGeom>
-          <a:noFill/>
-          <a:ln/>
-        </p:spPr>
-        <p:txBody>
-          <a:bodyPr wrap="square" lIns="0" tIns="0" rIns="0" bIns="0" rtlCol="0" anchor="ctr"/>
-          <a:lstStyle/>
-          <a:p>
-            <a:pPr indent="0" marL="0">
-              <a:buNone/>
-            </a:pPr>
-            <a:r>
-              <a:rPr lang="en-US" sz="900" b="1" spc="200" kern="0" dirty="0">
-                <a:solidFill>
-                  <a:srgbClr val="3A7E6E"/>
-                </a:solidFill>
-              </a:rPr>
-              <a:t>EXAMPLES</a:t>
-            </a:r>
-            <a:endParaRPr lang="en-US" sz="900" dirty="0"/>
-          </a:p>
-        </p:txBody>
-      </p:sp>
-      <p:sp>
-        <p:nvSpPr>
-          <p:cNvPr id="10" name="Text 8"/>
-          <p:cNvSpPr/>
-          <p:nvPr/>
-        </p:nvSpPr>
-        <p:spPr>
-          <a:xfrm>
-            <a:off x="457200" y="2935224"/>
-            <a:ext cx="2423160" cy="1005840"/>
-          </a:xfrm>
-          <a:prstGeom prst="rect">
-            <a:avLst/>
-          </a:prstGeom>
-          <a:noFill/>
-          <a:ln/>
-        </p:spPr>
-        <p:txBody>
-          <a:bodyPr wrap="square" lIns="0" tIns="0" rIns="0" bIns="0" rtlCol="0" anchor="ctr"/>
-          <a:lstStyle/>
-          <a:p>
-            <a:pPr indent="0" marL="0">
-              <a:buNone/>
-            </a:pPr>
-            <a:r>
-              <a:rPr lang="en-US" sz="1100" dirty="0">
-                <a:solidFill>
-                  <a:srgbClr val="D4E4F0"/>
-                </a:solidFill>
-              </a:rPr>
-              <a:t>· Log analysis</a:t>
-            </a:r>
-            <a:endParaRPr lang="en-US" sz="1100" dirty="0"/>
-          </a:p>
-          <a:p>
-            <a:pPr indent="0" marL="0">
-              <a:buNone/>
-            </a:pPr>
-            <a:r>
-              <a:rPr lang="en-US" sz="1100" dirty="0">
-                <a:solidFill>
-                  <a:srgbClr val="D4E4F0"/>
-                </a:solidFill>
-              </a:rPr>
-              <a:t>· Test environment ops</a:t>
-            </a:r>
-            <a:endParaRPr lang="en-US" sz="1100" dirty="0"/>
-          </a:p>
-          <a:p>
-            <a:pPr indent="0" marL="0">
-              <a:buNone/>
-            </a:pPr>
-            <a:r>
-              <a:rPr lang="en-US" sz="1100" dirty="0">
-                <a:solidFill>
-                  <a:srgbClr val="D4E4F0"/>
-                </a:solidFill>
-              </a:rPr>
-              <a:t>· Dependency version bumps</a:t>
-            </a:r>
-            <a:endParaRPr lang="en-US" sz="1100" dirty="0"/>
-          </a:p>
-          <a:p>
-            <a:pPr indent="0" marL="0">
-              <a:buNone/>
-            </a:pPr>
-            <a:r>
-              <a:rPr lang="en-US" sz="1100" dirty="0">
-                <a:solidFill>
-                  <a:srgbClr val="D4E4F0"/>
-                </a:solidFill>
-              </a:rPr>
-              <a:t>· Doc generation</a:t>
-            </a:r>
-            <a:endParaRPr lang="en-US" sz="1100" dirty="0"/>
-          </a:p>
-        </p:txBody>
-      </p:sp>
-      <p:sp>
-        <p:nvSpPr>
-          <p:cNvPr id="11" name="Text 9"/>
-          <p:cNvSpPr/>
-          <p:nvPr/>
-        </p:nvSpPr>
-        <p:spPr>
-          <a:xfrm>
-            <a:off x="457200" y="4023360"/>
-            <a:ext cx="2423160" cy="228600"/>
-          </a:xfrm>
-          <a:prstGeom prst="rect">
-            <a:avLst/>
-          </a:prstGeom>
-          <a:noFill/>
-          <a:ln/>
-        </p:spPr>
-        <p:txBody>
-          <a:bodyPr wrap="square" lIns="0" tIns="0" rIns="0" bIns="0" rtlCol="0" anchor="ctr"/>
-          <a:lstStyle/>
-          <a:p>
-            <a:pPr indent="0" marL="0">
-              <a:buNone/>
-            </a:pPr>
-            <a:r>
-              <a:rPr lang="en-US" sz="900" b="1" spc="200" kern="0" dirty="0">
-                <a:solidFill>
-                  <a:srgbClr val="3A7E6E"/>
-                </a:solidFill>
-              </a:rPr>
-              <a:t>OVERSIGHT</a:t>
-            </a:r>
-            <a:endParaRPr lang="en-US" sz="900" dirty="0"/>
-          </a:p>
-        </p:txBody>
-      </p:sp>
-      <p:sp>
-        <p:nvSpPr>
-          <p:cNvPr id="12" name="Text 10"/>
-          <p:cNvSpPr/>
-          <p:nvPr/>
-        </p:nvSpPr>
-        <p:spPr>
-          <a:xfrm>
-            <a:off x="457200" y="4251960"/>
-            <a:ext cx="2423160" cy="457200"/>
-          </a:xfrm>
-          <a:prstGeom prst="rect">
-            <a:avLst/>
-          </a:prstGeom>
-          <a:noFill/>
-          <a:ln/>
-        </p:spPr>
-        <p:txBody>
-          <a:bodyPr wrap="square" lIns="0" tIns="0" rIns="0" bIns="0" rtlCol="0" anchor="ctr"/>
-          <a:lstStyle/>
-          <a:p>
-            <a:pPr indent="0" marL="0">
-              <a:buNone/>
-            </a:pPr>
-            <a:r>
-              <a:rPr lang="en-US" sz="1050" i="1" dirty="0">
-                <a:solidFill>
-                  <a:srgbClr val="D4E4F0"/>
-                </a:solidFill>
-              </a:rPr>
-              <a:t>Minimal — humans review reports, not every action</a:t>
-            </a:r>
-            <a:endParaRPr lang="en-US" sz="1050" dirty="0"/>
-          </a:p>
-        </p:txBody>
-      </p:sp>
-      <p:sp>
-        <p:nvSpPr>
-          <p:cNvPr id="13" name="Shape 11"/>
-          <p:cNvSpPr/>
-          <p:nvPr/>
-        </p:nvSpPr>
-        <p:spPr>
-          <a:xfrm>
-            <a:off x="3200400" y="1325880"/>
-            <a:ext cx="2697480" cy="3520440"/>
-          </a:xfrm>
-          <a:prstGeom prst="rect">
-            <a:avLst/>
-          </a:prstGeom>
-          <a:solidFill>
-            <a:srgbClr val="2E5073">
-              <a:alpha val="80000"/>
-            </a:srgbClr>
-          </a:solidFill>
-          <a:ln/>
-          <a:effectLst>
-            <a:outerShdw sx="100000" sy="100000" kx="0" ky="0" algn="bl" rotWithShape="0" blurRad="101600" dist="38100" dir="8100000">
-              <a:srgbClr val="000000">
-                <a:alpha val="15000"/>
-              </a:srgbClr>
-            </a:outerShdw>
-          </a:effectLst>
-        </p:spPr>
-      </p:sp>
-      <p:sp>
-        <p:nvSpPr>
-          <p:cNvPr id="14" name="Shape 12"/>
-          <p:cNvSpPr/>
-          <p:nvPr/>
-        </p:nvSpPr>
-        <p:spPr>
-          <a:xfrm>
-            <a:off x="3200400" y="1325880"/>
-            <a:ext cx="2697480" cy="548640"/>
-          </a:xfrm>
-          <a:prstGeom prst="rect">
-            <a:avLst/>
-          </a:prstGeom>
-          <a:solidFill>
-            <a:srgbClr val="3A7DC9"/>
-          </a:solidFill>
-          <a:ln/>
-        </p:spPr>
-      </p:sp>
-      <p:sp>
-        <p:nvSpPr>
-          <p:cNvPr id="15" name="Text 13"/>
-          <p:cNvSpPr/>
-          <p:nvPr/>
-        </p:nvSpPr>
-        <p:spPr>
-          <a:xfrm>
-            <a:off x="3200400" y="1325880"/>
-            <a:ext cx="2697480" cy="548640"/>
-          </a:xfrm>
-          <a:prstGeom prst="rect">
-            <a:avLst/>
-          </a:prstGeom>
-          <a:noFill/>
-          <a:ln/>
-        </p:spPr>
-        <p:txBody>
-          <a:bodyPr wrap="square" lIns="0" tIns="0" rIns="0" bIns="0" rtlCol="0" anchor="ctr"/>
-          <a:lstStyle/>
-          <a:p>
-            <a:pPr algn="ctr" indent="0" marL="0">
-              <a:buNone/>
-            </a:pPr>
-            <a:r>
-              <a:rPr lang="en-US" sz="1200" b="1" dirty="0">
-                <a:solidFill>
-                  <a:srgbClr val="FFFFFF"/>
-                </a:solidFill>
-              </a:rPr>
-              <a:t>TIER 2  ·  Supervised Execution</a:t>
-            </a:r>
-            <a:endParaRPr lang="en-US" sz="1200" dirty="0"/>
-          </a:p>
-        </p:txBody>
-      </p:sp>
-      <p:sp>
-        <p:nvSpPr>
-          <p:cNvPr id="16" name="Text 14"/>
-          <p:cNvSpPr/>
-          <p:nvPr/>
-        </p:nvSpPr>
-        <p:spPr>
-          <a:xfrm>
-            <a:off x="3337560" y="1965960"/>
-            <a:ext cx="2423160" cy="256032"/>
-          </a:xfrm>
-          <a:prstGeom prst="rect">
-            <a:avLst/>
-          </a:prstGeom>
-          <a:noFill/>
-          <a:ln/>
-        </p:spPr>
-        <p:txBody>
-          <a:bodyPr wrap="square" lIns="0" tIns="0" rIns="0" bIns="0" rtlCol="0" anchor="ctr"/>
-          <a:lstStyle/>
-          <a:p>
-            <a:pPr indent="0" marL="0">
-              <a:buNone/>
-            </a:pPr>
-            <a:r>
-              <a:rPr lang="en-US" sz="900" b="1" spc="200" kern="0" dirty="0">
-                <a:solidFill>
-                  <a:srgbClr val="3A7DC9"/>
-                </a:solidFill>
-              </a:rPr>
-              <a:t>WHEN TO USE</a:t>
-            </a:r>
-            <a:endParaRPr lang="en-US" sz="900" dirty="0"/>
-          </a:p>
-        </p:txBody>
-      </p:sp>
-      <p:sp>
-        <p:nvSpPr>
-          <p:cNvPr id="17" name="Text 15"/>
-          <p:cNvSpPr/>
-          <p:nvPr/>
-        </p:nvSpPr>
-        <p:spPr>
-          <a:xfrm>
-            <a:off x="3337560" y="2221992"/>
-            <a:ext cx="2423160" cy="347472"/>
-          </a:xfrm>
-          <a:prstGeom prst="rect">
-            <a:avLst/>
-          </a:prstGeom>
-          <a:noFill/>
-          <a:ln/>
-        </p:spPr>
-        <p:txBody>
-          <a:bodyPr wrap="square" lIns="0" tIns="0" rIns="0" bIns="0" rtlCol="0" anchor="ctr"/>
-          <a:lstStyle/>
-          <a:p>
-            <a:pPr indent="0" marL="0">
-              <a:buNone/>
-            </a:pPr>
-            <a:r>
-              <a:rPr lang="en-US" sz="1150" dirty="0">
-                <a:solidFill>
-                  <a:srgbClr val="FFFFFF"/>
-                </a:solidFill>
-              </a:rPr>
-              <a:t>Medium-risk, recoverable tasks</a:t>
-            </a:r>
-            <a:endParaRPr lang="en-US" sz="1150" dirty="0"/>
-          </a:p>
-        </p:txBody>
-      </p:sp>
-      <p:sp>
-        <p:nvSpPr>
-          <p:cNvPr id="18" name="Text 16"/>
-          <p:cNvSpPr/>
-          <p:nvPr/>
-        </p:nvSpPr>
-        <p:spPr>
-          <a:xfrm>
-            <a:off x="3337560" y="2679192"/>
-            <a:ext cx="2423160" cy="256032"/>
-          </a:xfrm>
-          <a:prstGeom prst="rect">
-            <a:avLst/>
-          </a:prstGeom>
-          <a:noFill/>
-          <a:ln/>
-        </p:spPr>
-        <p:txBody>
-          <a:bodyPr wrap="square" lIns="0" tIns="0" rIns="0" bIns="0" rtlCol="0" anchor="ctr"/>
-          <a:lstStyle/>
-          <a:p>
-            <a:pPr indent="0" marL="0">
-              <a:buNone/>
-            </a:pPr>
-            <a:r>
-              <a:rPr lang="en-US" sz="900" b="1" spc="200" kern="0" dirty="0">
-                <a:solidFill>
-                  <a:srgbClr val="3A7DC9"/>
-                </a:solidFill>
-              </a:rPr>
-              <a:t>EXAMPLES</a:t>
-            </a:r>
-            <a:endParaRPr lang="en-US" sz="900" dirty="0"/>
-          </a:p>
-        </p:txBody>
-      </p:sp>
-      <p:sp>
-        <p:nvSpPr>
-          <p:cNvPr id="19" name="Text 17"/>
-          <p:cNvSpPr/>
-          <p:nvPr/>
-        </p:nvSpPr>
-        <p:spPr>
-          <a:xfrm>
-            <a:off x="3337560" y="2935224"/>
-            <a:ext cx="2423160" cy="1005840"/>
-          </a:xfrm>
-          <a:prstGeom prst="rect">
-            <a:avLst/>
-          </a:prstGeom>
-          <a:noFill/>
-          <a:ln/>
-        </p:spPr>
-        <p:txBody>
-          <a:bodyPr wrap="square" lIns="0" tIns="0" rIns="0" bIns="0" rtlCol="0" anchor="ctr"/>
-          <a:lstStyle/>
-          <a:p>
-            <a:pPr indent="0" marL="0">
-              <a:buNone/>
-            </a:pPr>
-            <a:r>
-              <a:rPr lang="en-US" sz="1100" dirty="0">
-                <a:solidFill>
-                  <a:srgbClr val="D4E4F0"/>
-                </a:solidFill>
-              </a:rPr>
-              <a:t>· Feature PRs for review</a:t>
-            </a:r>
-            <a:endParaRPr lang="en-US" sz="1100" dirty="0"/>
-          </a:p>
-          <a:p>
-            <a:pPr indent="0" marL="0">
-              <a:buNone/>
-            </a:pPr>
-            <a:r>
-              <a:rPr lang="en-US" sz="1100" dirty="0">
-                <a:solidFill>
-                  <a:srgbClr val="D4E4F0"/>
-                </a:solidFill>
-              </a:rPr>
-              <a:t>· Data pipeline changes</a:t>
-            </a:r>
-            <a:endParaRPr lang="en-US" sz="1100" dirty="0"/>
-          </a:p>
-          <a:p>
-            <a:pPr indent="0" marL="0">
-              <a:buNone/>
-            </a:pPr>
-            <a:r>
-              <a:rPr lang="en-US" sz="1100" dirty="0">
-                <a:solidFill>
-                  <a:srgbClr val="D4E4F0"/>
-                </a:solidFill>
-              </a:rPr>
-              <a:t>· API integrations</a:t>
-            </a:r>
-            <a:endParaRPr lang="en-US" sz="1100" dirty="0"/>
-          </a:p>
-          <a:p>
-            <a:pPr indent="0" marL="0">
-              <a:buNone/>
-            </a:pPr>
-            <a:r>
-              <a:rPr lang="en-US" sz="1100" dirty="0">
-                <a:solidFill>
-                  <a:srgbClr val="D4E4F0"/>
-                </a:solidFill>
-              </a:rPr>
-              <a:t>· Content generation</a:t>
-            </a:r>
-            <a:endParaRPr lang="en-US" sz="1100" dirty="0"/>
-          </a:p>
-        </p:txBody>
-      </p:sp>
-      <p:sp>
-        <p:nvSpPr>
-          <p:cNvPr id="20" name="Text 18"/>
-          <p:cNvSpPr/>
-          <p:nvPr/>
-        </p:nvSpPr>
-        <p:spPr>
-          <a:xfrm>
-            <a:off x="3337560" y="4023360"/>
-            <a:ext cx="2423160" cy="228600"/>
-          </a:xfrm>
-          <a:prstGeom prst="rect">
-            <a:avLst/>
-          </a:prstGeom>
-          <a:noFill/>
-          <a:ln/>
-        </p:spPr>
-        <p:txBody>
-          <a:bodyPr wrap="square" lIns="0" tIns="0" rIns="0" bIns="0" rtlCol="0" anchor="ctr"/>
-          <a:lstStyle/>
-          <a:p>
-            <a:pPr indent="0" marL="0">
-              <a:buNone/>
-            </a:pPr>
-            <a:r>
-              <a:rPr lang="en-US" sz="900" b="1" spc="200" kern="0" dirty="0">
-                <a:solidFill>
-                  <a:srgbClr val="3A7DC9"/>
-                </a:solidFill>
-              </a:rPr>
-              <a:t>OVERSIGHT</a:t>
-            </a:r>
-            <a:endParaRPr lang="en-US" sz="900" dirty="0"/>
-          </a:p>
-        </p:txBody>
-      </p:sp>
-      <p:sp>
-        <p:nvSpPr>
-          <p:cNvPr id="21" name="Text 19"/>
-          <p:cNvSpPr/>
-          <p:nvPr/>
-        </p:nvSpPr>
-        <p:spPr>
-          <a:xfrm>
-            <a:off x="3337560" y="4251960"/>
-            <a:ext cx="2423160" cy="457200"/>
-          </a:xfrm>
-          <a:prstGeom prst="rect">
-            <a:avLst/>
-          </a:prstGeom>
-          <a:noFill/>
-          <a:ln/>
-        </p:spPr>
-        <p:txBody>
-          <a:bodyPr wrap="square" lIns="0" tIns="0" rIns="0" bIns="0" rtlCol="0" anchor="ctr"/>
-          <a:lstStyle/>
-          <a:p>
-            <a:pPr indent="0" marL="0">
-              <a:buNone/>
-            </a:pPr>
-            <a:r>
-              <a:rPr lang="en-US" sz="1050" i="1" dirty="0">
-                <a:solidFill>
-                  <a:srgbClr val="D4E4F0"/>
-                </a:solidFill>
-              </a:rPr>
-              <a:t>Human approves before merge/deploy</a:t>
-            </a:r>
-            <a:endParaRPr lang="en-US" sz="1050" dirty="0"/>
-          </a:p>
-        </p:txBody>
-      </p:sp>
-      <p:sp>
-        <p:nvSpPr>
-          <p:cNvPr id="22" name="Shape 20"/>
-          <p:cNvSpPr/>
-          <p:nvPr/>
-        </p:nvSpPr>
-        <p:spPr>
-          <a:xfrm>
-            <a:off x="6080760" y="1325880"/>
-            <a:ext cx="2697480" cy="3520440"/>
-          </a:xfrm>
-          <a:prstGeom prst="rect">
-            <a:avLst/>
-          </a:prstGeom>
-          <a:solidFill>
-            <a:srgbClr val="2E5073">
-              <a:alpha val="80000"/>
-            </a:srgbClr>
-          </a:solidFill>
-          <a:ln/>
-          <a:effectLst>
-            <a:outerShdw sx="100000" sy="100000" kx="0" ky="0" algn="bl" rotWithShape="0" blurRad="101600" dist="38100" dir="8100000">
-              <a:srgbClr val="000000">
-                <a:alpha val="15000"/>
-              </a:srgbClr>
-            </a:outerShdw>
-          </a:effectLst>
-        </p:spPr>
-      </p:sp>
-      <p:sp>
-        <p:nvSpPr>
-          <p:cNvPr id="23" name="Shape 21"/>
-          <p:cNvSpPr/>
-          <p:nvPr/>
-        </p:nvSpPr>
-        <p:spPr>
-          <a:xfrm>
-            <a:off x="6080760" y="1325880"/>
-            <a:ext cx="2697480" cy="548640"/>
-          </a:xfrm>
-          <a:prstGeom prst="rect">
-            <a:avLst/>
-          </a:prstGeom>
-          <a:solidFill>
-            <a:srgbClr val="8096B0"/>
-          </a:solidFill>
-          <a:ln/>
-        </p:spPr>
-      </p:sp>
-      <p:sp>
-        <p:nvSpPr>
-          <p:cNvPr id="24" name="Text 22"/>
-          <p:cNvSpPr/>
-          <p:nvPr/>
-        </p:nvSpPr>
-        <p:spPr>
-          <a:xfrm>
-            <a:off x="6080760" y="1325880"/>
-            <a:ext cx="2697480" cy="548640"/>
-          </a:xfrm>
-          <a:prstGeom prst="rect">
-            <a:avLst/>
-          </a:prstGeom>
-          <a:noFill/>
-          <a:ln/>
-        </p:spPr>
-        <p:txBody>
-          <a:bodyPr wrap="square" lIns="0" tIns="0" rIns="0" bIns="0" rtlCol="0" anchor="ctr"/>
-          <a:lstStyle/>
-          <a:p>
-            <a:pPr algn="ctr" indent="0" marL="0">
-              <a:buNone/>
-            </a:pPr>
-            <a:r>
-              <a:rPr lang="en-US" sz="1200" b="1" dirty="0">
-                <a:solidFill>
-                  <a:srgbClr val="FFFFFF"/>
-                </a:solidFill>
-              </a:rPr>
-              <a:t>TIER 3  ·  Human-Directed</a:t>
-            </a:r>
-            <a:endParaRPr lang="en-US" sz="1200" dirty="0"/>
-          </a:p>
-        </p:txBody>
-      </p:sp>
-      <p:sp>
-        <p:nvSpPr>
-          <p:cNvPr id="25" name="Text 23"/>
-          <p:cNvSpPr/>
-          <p:nvPr/>
-        </p:nvSpPr>
-        <p:spPr>
-          <a:xfrm>
-            <a:off x="6217920" y="1965960"/>
-            <a:ext cx="2423160" cy="256032"/>
-          </a:xfrm>
-          <a:prstGeom prst="rect">
-            <a:avLst/>
-          </a:prstGeom>
-          <a:noFill/>
-          <a:ln/>
-        </p:spPr>
-        <p:txBody>
-          <a:bodyPr wrap="square" lIns="0" tIns="0" rIns="0" bIns="0" rtlCol="0" anchor="ctr"/>
-          <a:lstStyle/>
-          <a:p>
-            <a:pPr indent="0" marL="0">
-              <a:buNone/>
-            </a:pPr>
-            <a:r>
-              <a:rPr lang="en-US" sz="900" b="1" spc="200" kern="0" dirty="0">
-                <a:solidFill>
-                  <a:srgbClr val="8096B0"/>
-                </a:solidFill>
-              </a:rPr>
-              <a:t>WHEN TO USE</a:t>
-            </a:r>
-            <a:endParaRPr lang="en-US" sz="900" dirty="0"/>
-          </a:p>
-        </p:txBody>
-      </p:sp>
-      <p:sp>
-        <p:nvSpPr>
-          <p:cNvPr id="26" name="Text 24"/>
-          <p:cNvSpPr/>
-          <p:nvPr/>
-        </p:nvSpPr>
-        <p:spPr>
-          <a:xfrm>
-            <a:off x="6217920" y="2221992"/>
-            <a:ext cx="2423160" cy="347472"/>
-          </a:xfrm>
-          <a:prstGeom prst="rect">
-            <a:avLst/>
-          </a:prstGeom>
-          <a:noFill/>
-          <a:ln/>
-        </p:spPr>
-        <p:txBody>
-          <a:bodyPr wrap="square" lIns="0" tIns="0" rIns="0" bIns="0" rtlCol="0" anchor="ctr"/>
-          <a:lstStyle/>
-          <a:p>
-            <a:pPr indent="0" marL="0">
-              <a:buNone/>
-            </a:pPr>
-            <a:r>
-              <a:rPr lang="en-US" sz="1150" dirty="0">
-                <a:solidFill>
-                  <a:srgbClr val="FFFFFF"/>
-                </a:solidFill>
-              </a:rPr>
-              <a:t>High-risk, irreversible tasks</a:t>
-            </a:r>
-            <a:endParaRPr lang="en-US" sz="1150" dirty="0"/>
-          </a:p>
-        </p:txBody>
-      </p:sp>
-      <p:sp>
-        <p:nvSpPr>
-          <p:cNvPr id="27" name="Text 25"/>
-          <p:cNvSpPr/>
-          <p:nvPr/>
-        </p:nvSpPr>
-        <p:spPr>
-          <a:xfrm>
-            <a:off x="6217920" y="2679192"/>
-            <a:ext cx="2423160" cy="256032"/>
-          </a:xfrm>
-          <a:prstGeom prst="rect">
-            <a:avLst/>
-          </a:prstGeom>
-          <a:noFill/>
-          <a:ln/>
-        </p:spPr>
-        <p:txBody>
-          <a:bodyPr wrap="square" lIns="0" tIns="0" rIns="0" bIns="0" rtlCol="0" anchor="ctr"/>
-          <a:lstStyle/>
-          <a:p>
-            <a:pPr indent="0" marL="0">
-              <a:buNone/>
-            </a:pPr>
-            <a:r>
-              <a:rPr lang="en-US" sz="900" b="1" spc="200" kern="0" dirty="0">
-                <a:solidFill>
-                  <a:srgbClr val="8096B0"/>
-                </a:solidFill>
-              </a:rPr>
-              <a:t>EXAMPLES</a:t>
-            </a:r>
-            <a:endParaRPr lang="en-US" sz="900" dirty="0"/>
-          </a:p>
-        </p:txBody>
-      </p:sp>
-      <p:sp>
-        <p:nvSpPr>
-          <p:cNvPr id="28" name="Text 26"/>
-          <p:cNvSpPr/>
-          <p:nvPr/>
-        </p:nvSpPr>
-        <p:spPr>
-          <a:xfrm>
-            <a:off x="6217920" y="2935224"/>
-            <a:ext cx="2423160" cy="1005840"/>
-          </a:xfrm>
-          <a:prstGeom prst="rect">
-            <a:avLst/>
-          </a:prstGeom>
-          <a:noFill/>
-          <a:ln/>
-        </p:spPr>
-        <p:txBody>
-          <a:bodyPr wrap="square" lIns="0" tIns="0" rIns="0" bIns="0" rtlCol="0" anchor="ctr"/>
-          <a:lstStyle/>
-          <a:p>
-            <a:pPr indent="0" marL="0">
-              <a:buNone/>
-            </a:pPr>
-            <a:r>
-              <a:rPr lang="en-US" sz="1100" dirty="0">
-                <a:solidFill>
-                  <a:srgbClr val="D4E4F0"/>
-                </a:solidFill>
-              </a:rPr>
-              <a:t>· Production DB writes</a:t>
-            </a:r>
-            <a:endParaRPr lang="en-US" sz="1100" dirty="0"/>
-          </a:p>
-          <a:p>
-            <a:pPr indent="0" marL="0">
-              <a:buNone/>
-            </a:pPr>
-            <a:r>
-              <a:rPr lang="en-US" sz="1100" dirty="0">
-                <a:solidFill>
-                  <a:srgbClr val="D4E4F0"/>
-                </a:solidFill>
-              </a:rPr>
-              <a:t>· Financial transactions</a:t>
-            </a:r>
-            <a:endParaRPr lang="en-US" sz="1100" dirty="0"/>
-          </a:p>
-          <a:p>
-            <a:pPr indent="0" marL="0">
-              <a:buNone/>
-            </a:pPr>
-            <a:r>
-              <a:rPr lang="en-US" sz="1100" dirty="0">
-                <a:solidFill>
-                  <a:srgbClr val="D4E4F0"/>
-                </a:solidFill>
-              </a:rPr>
-              <a:t>· Security config changes</a:t>
-            </a:r>
-            <a:endParaRPr lang="en-US" sz="1100" dirty="0"/>
-          </a:p>
-          <a:p>
-            <a:pPr indent="0" marL="0">
-              <a:buNone/>
-            </a:pPr>
-            <a:r>
-              <a:rPr lang="en-US" sz="1100" dirty="0">
-                <a:solidFill>
-                  <a:srgbClr val="D4E4F0"/>
-                </a:solidFill>
-              </a:rPr>
-              <a:t>· External communications</a:t>
-            </a:r>
-            <a:endParaRPr lang="en-US" sz="1100" dirty="0"/>
-          </a:p>
-        </p:txBody>
-      </p:sp>
-      <p:sp>
-        <p:nvSpPr>
-          <p:cNvPr id="29" name="Text 27"/>
-          <p:cNvSpPr/>
-          <p:nvPr/>
-        </p:nvSpPr>
-        <p:spPr>
-          <a:xfrm>
-            <a:off x="6217920" y="4023360"/>
-            <a:ext cx="2423160" cy="228600"/>
-          </a:xfrm>
-          <a:prstGeom prst="rect">
-            <a:avLst/>
-          </a:prstGeom>
-          <a:noFill/>
-          <a:ln/>
-        </p:spPr>
-        <p:txBody>
-          <a:bodyPr wrap="square" lIns="0" tIns="0" rIns="0" bIns="0" rtlCol="0" anchor="ctr"/>
-          <a:lstStyle/>
-          <a:p>
-            <a:pPr indent="0" marL="0">
-              <a:buNone/>
-            </a:pPr>
-            <a:r>
-              <a:rPr lang="en-US" sz="900" b="1" spc="200" kern="0" dirty="0">
-                <a:solidFill>
-                  <a:srgbClr val="8096B0"/>
-                </a:solidFill>
-              </a:rPr>
-              <a:t>OVERSIGHT</a:t>
-            </a:r>
-            <a:endParaRPr lang="en-US" sz="900" dirty="0"/>
-          </a:p>
-        </p:txBody>
-      </p:sp>
-      <p:sp>
-        <p:nvSpPr>
-          <p:cNvPr id="30" name="Text 28"/>
-          <p:cNvSpPr/>
-          <p:nvPr/>
-        </p:nvSpPr>
-        <p:spPr>
-          <a:xfrm>
-            <a:off x="6217920" y="4251960"/>
-            <a:ext cx="2423160" cy="457200"/>
-          </a:xfrm>
-          <a:prstGeom prst="rect">
-            <a:avLst/>
-          </a:prstGeom>
-          <a:noFill/>
-          <a:ln/>
-        </p:spPr>
-        <p:txBody>
-          <a:bodyPr wrap="square" lIns="0" tIns="0" rIns="0" bIns="0" rtlCol="0" anchor="ctr"/>
-          <a:lstStyle/>
-          <a:p>
-            <a:pPr indent="0" marL="0">
-              <a:buNone/>
-            </a:pPr>
-            <a:r>
-              <a:rPr lang="en-US" sz="1050" i="1" dirty="0">
-                <a:solidFill>
-                  <a:srgbClr val="D4E4F0"/>
-                </a:solidFill>
-              </a:rPr>
-              <a:t>Human decides; agent surfaces options only</a:t>
-            </a:r>
-            <a:endParaRPr lang="en-US" sz="1050" dirty="0"/>
-          </a:p>
-        </p:txBody>
-      </p:sp>
-      <p:sp>
-        <p:nvSpPr>
-          <p:cNvPr id="31" name="Shape 29"/>
-          <p:cNvSpPr/>
-          <p:nvPr/>
-        </p:nvSpPr>
-        <p:spPr>
-          <a:xfrm>
-            <a:off x="320040" y="4956048"/>
-            <a:ext cx="8503920" cy="0"/>
-          </a:xfrm>
-          <a:prstGeom prst="line">
-            <a:avLst/>
-          </a:prstGeom>
-          <a:noFill/>
-          <a:ln w="12700">
-            <a:solidFill>
-              <a:srgbClr val="5B8DB8"/>
-            </a:solidFill>
-            <a:prstDash val="solid"/>
-          </a:ln>
-        </p:spPr>
-      </p:sp>
-      <p:sp>
-        <p:nvSpPr>
-          <p:cNvPr id="32" name="Text 30"/>
-          <p:cNvSpPr/>
-          <p:nvPr/>
-        </p:nvSpPr>
-        <p:spPr>
-          <a:xfrm>
-            <a:off x="320040" y="4828032"/>
-            <a:ext cx="8503920" cy="256032"/>
-          </a:xfrm>
-          <a:prstGeom prst="rect">
-            <a:avLst/>
-          </a:prstGeom>
-          <a:noFill/>
-          <a:ln/>
-        </p:spPr>
-        <p:txBody>
-          <a:bodyPr wrap="square" lIns="0" tIns="0" rIns="0" bIns="0" rtlCol="0" anchor="ctr"/>
-          <a:lstStyle/>
-          <a:p>
-            <a:pPr algn="ctr" indent="0" marL="0">
-              <a:buNone/>
-            </a:pPr>
-            <a:r>
-              <a:rPr lang="en-US" sz="1000" i="1" dirty="0">
+              <a:rPr lang="en-US" sz="950" i="1" dirty="0">
                 <a:solidFill>
                   <a:srgbClr val="5B8DB8"/>
                 </a:solidFill>
               </a:rPr>
-              <a:t>← More human control                                                              More agent autonomy →</a:t>
-            </a:r>
-            <a:endParaRPr lang="en-US" sz="1000" dirty="0"/>
+              <a:t>Enterprise default: Supervised Agent. Full autonomy only for low-stakes, reversible actions in sandboxed environments.</a:t>
+            </a:r>
+            <a:endParaRPr lang="en-US" sz="950" dirty="0"/>
           </a:p>
         </p:txBody>
       </p:sp>
@@ -11881,7 +13448,7 @@
                   <a:srgbClr val="FFFFFF"/>
                 </a:solidFill>
               </a:rPr>
-              <a:t>THE ROLE SHIFT FOR ENTERPRISE DEVELOPERS</a:t>
+              <a:t>PROGRAMME SCOPE  ·  TWO KINDS OF AGENT</a:t>
             </a:r>
             <a:endParaRPr lang="en-US" sz="1300" dirty="0"/>
           </a:p>
@@ -11889,14 +13456,50 @@
       </p:sp>
       <p:sp>
         <p:nvSpPr>
-          <p:cNvPr id="4" name="Shape 2"/>
-          <p:cNvSpPr/>
-          <p:nvPr/>
-        </p:nvSpPr>
-        <p:spPr>
-          <a:xfrm>
-            <a:off x="320040" y="868680"/>
-            <a:ext cx="3931920" cy="4023360"/>
+          <p:cNvPr id="4" name="Text 2"/>
+          <p:cNvSpPr/>
+          <p:nvPr/>
+        </p:nvSpPr>
+        <p:spPr>
+          <a:xfrm>
+            <a:off x="320040" y="822960"/>
+            <a:ext cx="8503920" cy="292608"/>
+          </a:xfrm>
+          <a:prstGeom prst="rect">
+            <a:avLst/>
+          </a:prstGeom>
+          <a:noFill/>
+          <a:ln/>
+        </p:spPr>
+        <p:txBody>
+          <a:bodyPr wrap="square" lIns="0" tIns="0" rIns="0" bIns="0" rtlCol="0" anchor="ctr"/>
+          <a:lstStyle/>
+          <a:p>
+            <a:pPr indent="0" marL="0">
+              <a:buNone/>
+            </a:pPr>
+            <a:r>
+              <a:rPr lang="en-US" sz="1150" i="1" dirty="0">
+                <a:solidFill>
+                  <a:srgbClr val="7A90A8"/>
+                </a:solidFill>
+              </a:rPr>
+              <a:t>The word "agent" covers two very different things — conflating them causes confusion throughout the SDLC.</a:t>
+            </a:r>
+            <a:endParaRPr lang="en-US" sz="1150" dirty="0"/>
+          </a:p>
+        </p:txBody>
+      </p:sp>
+      <p:sp>
+        <p:nvSpPr>
+          <p:cNvPr id="5" name="Shape 3"/>
+          <p:cNvSpPr/>
+          <p:nvPr/>
+        </p:nvSpPr>
+        <p:spPr>
+          <a:xfrm>
+            <a:off x="320040" y="1188720"/>
+            <a:ext cx="3977640" cy="3703320"/>
           </a:xfrm>
           <a:prstGeom prst="rect">
             <a:avLst/>
@@ -11916,34 +13519,34 @@
       </p:sp>
       <p:sp>
         <p:nvSpPr>
-          <p:cNvPr id="5" name="Shape 3"/>
-          <p:cNvSpPr/>
-          <p:nvPr/>
-        </p:nvSpPr>
-        <p:spPr>
-          <a:xfrm>
-            <a:off x="320040" y="868680"/>
-            <a:ext cx="3931920" cy="502920"/>
-          </a:xfrm>
-          <a:prstGeom prst="rect">
-            <a:avLst/>
-          </a:prstGeom>
-          <a:solidFill>
-            <a:srgbClr val="B8CADA"/>
-          </a:solidFill>
-          <a:ln/>
-        </p:spPr>
-      </p:sp>
-      <p:sp>
-        <p:nvSpPr>
-          <p:cNvPr id="6" name="Text 4"/>
-          <p:cNvSpPr/>
-          <p:nvPr/>
-        </p:nvSpPr>
-        <p:spPr>
-          <a:xfrm>
-            <a:off x="320040" y="868680"/>
-            <a:ext cx="3931920" cy="502920"/>
+          <p:cNvPr id="6" name="Shape 4"/>
+          <p:cNvSpPr/>
+          <p:nvPr/>
+        </p:nvSpPr>
+        <p:spPr>
+          <a:xfrm>
+            <a:off x="320040" y="1188720"/>
+            <a:ext cx="3977640" cy="530352"/>
+          </a:xfrm>
+          <a:prstGeom prst="rect">
+            <a:avLst/>
+          </a:prstGeom>
+          <a:solidFill>
+            <a:srgbClr val="3A7DC9"/>
+          </a:solidFill>
+          <a:ln/>
+        </p:spPr>
+      </p:sp>
+      <p:sp>
+        <p:nvSpPr>
+          <p:cNvPr id="7" name="Text 5"/>
+          <p:cNvSpPr/>
+          <p:nvPr/>
+        </p:nvSpPr>
+        <p:spPr>
+          <a:xfrm>
+            <a:off x="320040" y="1188720"/>
+            <a:ext cx="3977640" cy="530352"/>
           </a:xfrm>
           <a:prstGeom prst="rect">
             <a:avLst/>
@@ -11961,10 +13564,10 @@
             <a:r>
               <a:rPr lang="en-US" sz="1200" b="1" dirty="0">
                 <a:solidFill>
-                  <a:srgbClr val="1E2D3D"/>
-                </a:solidFill>
-              </a:rPr>
-              <a:t>BEFORE  ·  Chat Era</a:t>
+                  <a:srgbClr val="FFFFFF"/>
+                </a:solidFill>
+              </a:rPr>
+              <a:t>CODING AGENTS  ·  OUR FOCUS</a:t>
             </a:r>
             <a:endParaRPr lang="en-US" sz="1200" dirty="0"/>
           </a:p>
@@ -11972,230 +13575,310 @@
       </p:sp>
       <p:sp>
         <p:nvSpPr>
-          <p:cNvPr id="7" name="Text 5"/>
-          <p:cNvSpPr/>
-          <p:nvPr/>
-        </p:nvSpPr>
-        <p:spPr>
-          <a:xfrm>
-            <a:off x="502920" y="1426464"/>
-            <a:ext cx="3566160" cy="502920"/>
-          </a:xfrm>
-          <a:prstGeom prst="rect">
-            <a:avLst/>
-          </a:prstGeom>
-          <a:noFill/>
-          <a:ln/>
-        </p:spPr>
-        <p:txBody>
-          <a:bodyPr wrap="square" lIns="0" tIns="0" rIns="0" bIns="0" rtlCol="0" anchor="ctr"/>
-          <a:lstStyle/>
-          <a:p>
-            <a:pPr indent="0" marL="0">
-              <a:buNone/>
-            </a:pPr>
-            <a:r>
-              <a:rPr lang="en-US" sz="1150" dirty="0">
+          <p:cNvPr id="8" name="Shape 6"/>
+          <p:cNvSpPr/>
+          <p:nvPr/>
+        </p:nvSpPr>
+        <p:spPr>
+          <a:xfrm>
+            <a:off x="502920" y="1810512"/>
+            <a:ext cx="3611880" cy="1051560"/>
+          </a:xfrm>
+          <a:prstGeom prst="rect">
+            <a:avLst/>
+          </a:prstGeom>
+          <a:solidFill>
+            <a:srgbClr val="F3F6F9"/>
+          </a:solidFill>
+          <a:ln/>
+        </p:spPr>
+      </p:sp>
+      <p:sp>
+        <p:nvSpPr>
+          <p:cNvPr id="9" name="Shape 7"/>
+          <p:cNvSpPr/>
+          <p:nvPr/>
+        </p:nvSpPr>
+        <p:spPr>
+          <a:xfrm>
+            <a:off x="502920" y="1810512"/>
+            <a:ext cx="54864" cy="1051560"/>
+          </a:xfrm>
+          <a:prstGeom prst="rect">
+            <a:avLst/>
+          </a:prstGeom>
+          <a:solidFill>
+            <a:srgbClr val="3A7DC9"/>
+          </a:solidFill>
+          <a:ln/>
+        </p:spPr>
+      </p:sp>
+      <p:sp>
+        <p:nvSpPr>
+          <p:cNvPr id="10" name="Text 8"/>
+          <p:cNvSpPr/>
+          <p:nvPr/>
+        </p:nvSpPr>
+        <p:spPr>
+          <a:xfrm>
+            <a:off x="658368" y="1883664"/>
+            <a:ext cx="3337560" cy="274320"/>
+          </a:xfrm>
+          <a:prstGeom prst="rect">
+            <a:avLst/>
+          </a:prstGeom>
+          <a:noFill/>
+          <a:ln/>
+        </p:spPr>
+        <p:txBody>
+          <a:bodyPr wrap="square" lIns="0" tIns="0" rIns="0" bIns="0" rtlCol="0" anchor="ctr"/>
+          <a:lstStyle/>
+          <a:p>
+            <a:pPr indent="0" marL="0">
+              <a:buNone/>
+            </a:pPr>
+            <a:r>
+              <a:rPr lang="en-US" sz="1200" b="1" dirty="0">
+                <a:solidFill>
+                  <a:srgbClr val="1C3557"/>
+                </a:solidFill>
+              </a:rPr>
+              <a:t>Claude Code</a:t>
+            </a:r>
+            <a:endParaRPr lang="en-US" sz="1200" dirty="0"/>
+          </a:p>
+        </p:txBody>
+      </p:sp>
+      <p:sp>
+        <p:nvSpPr>
+          <p:cNvPr id="11" name="Text 9"/>
+          <p:cNvSpPr/>
+          <p:nvPr/>
+        </p:nvSpPr>
+        <p:spPr>
+          <a:xfrm>
+            <a:off x="658368" y="2176272"/>
+            <a:ext cx="3337560" cy="594360"/>
+          </a:xfrm>
+          <a:prstGeom prst="rect">
+            <a:avLst/>
+          </a:prstGeom>
+          <a:noFill/>
+          <a:ln/>
+        </p:spPr>
+        <p:txBody>
+          <a:bodyPr wrap="square" lIns="0" tIns="0" rIns="0" bIns="0" rtlCol="0" anchor="ctr"/>
+          <a:lstStyle/>
+          <a:p>
+            <a:pPr indent="0" marL="0">
+              <a:buNone/>
+            </a:pPr>
+            <a:r>
+              <a:rPr lang="en-US" sz="1050" dirty="0">
                 <a:solidFill>
                   <a:srgbClr val="7A90A8"/>
                 </a:solidFill>
               </a:rPr>
-              <a:t>✗  Write every line of code manually</a:t>
-            </a:r>
-            <a:endParaRPr lang="en-US" sz="1150" dirty="0"/>
-          </a:p>
-        </p:txBody>
-      </p:sp>
-      <p:sp>
-        <p:nvSpPr>
-          <p:cNvPr id="8" name="Text 6"/>
-          <p:cNvSpPr/>
-          <p:nvPr/>
-        </p:nvSpPr>
-        <p:spPr>
-          <a:xfrm>
-            <a:off x="502920" y="1993392"/>
-            <a:ext cx="3566160" cy="502920"/>
-          </a:xfrm>
-          <a:prstGeom prst="rect">
-            <a:avLst/>
-          </a:prstGeom>
-          <a:noFill/>
-          <a:ln/>
-        </p:spPr>
-        <p:txBody>
-          <a:bodyPr wrap="square" lIns="0" tIns="0" rIns="0" bIns="0" rtlCol="0" anchor="ctr"/>
-          <a:lstStyle/>
-          <a:p>
-            <a:pPr indent="0" marL="0">
-              <a:buNone/>
-            </a:pPr>
-            <a:r>
-              <a:rPr lang="en-US" sz="1150" dirty="0">
+              <a:t>Anthropic's CLI agent. Full filesystem + shell access. Reads your codebase, writes code, runs tests, commits and pushes.</a:t>
+            </a:r>
+            <a:endParaRPr lang="en-US" sz="1050" dirty="0"/>
+          </a:p>
+        </p:txBody>
+      </p:sp>
+      <p:sp>
+        <p:nvSpPr>
+          <p:cNvPr id="12" name="Shape 10"/>
+          <p:cNvSpPr/>
+          <p:nvPr/>
+        </p:nvSpPr>
+        <p:spPr>
+          <a:xfrm>
+            <a:off x="502920" y="2980944"/>
+            <a:ext cx="3611880" cy="1051560"/>
+          </a:xfrm>
+          <a:prstGeom prst="rect">
+            <a:avLst/>
+          </a:prstGeom>
+          <a:solidFill>
+            <a:srgbClr val="F3F6F9"/>
+          </a:solidFill>
+          <a:ln/>
+        </p:spPr>
+      </p:sp>
+      <p:sp>
+        <p:nvSpPr>
+          <p:cNvPr id="13" name="Shape 11"/>
+          <p:cNvSpPr/>
+          <p:nvPr/>
+        </p:nvSpPr>
+        <p:spPr>
+          <a:xfrm>
+            <a:off x="502920" y="2980944"/>
+            <a:ext cx="54864" cy="1051560"/>
+          </a:xfrm>
+          <a:prstGeom prst="rect">
+            <a:avLst/>
+          </a:prstGeom>
+          <a:solidFill>
+            <a:srgbClr val="3A7DC9"/>
+          </a:solidFill>
+          <a:ln/>
+        </p:spPr>
+      </p:sp>
+      <p:sp>
+        <p:nvSpPr>
+          <p:cNvPr id="14" name="Text 12"/>
+          <p:cNvSpPr/>
+          <p:nvPr/>
+        </p:nvSpPr>
+        <p:spPr>
+          <a:xfrm>
+            <a:off x="658368" y="3054096"/>
+            <a:ext cx="3337560" cy="274320"/>
+          </a:xfrm>
+          <a:prstGeom prst="rect">
+            <a:avLst/>
+          </a:prstGeom>
+          <a:noFill/>
+          <a:ln/>
+        </p:spPr>
+        <p:txBody>
+          <a:bodyPr wrap="square" lIns="0" tIns="0" rIns="0" bIns="0" rtlCol="0" anchor="ctr"/>
+          <a:lstStyle/>
+          <a:p>
+            <a:pPr indent="0" marL="0">
+              <a:buNone/>
+            </a:pPr>
+            <a:r>
+              <a:rPr lang="en-US" sz="1200" b="1" dirty="0">
+                <a:solidFill>
+                  <a:srgbClr val="1C3557"/>
+                </a:solidFill>
+              </a:rPr>
+              <a:t>GitHub Copilot</a:t>
+            </a:r>
+            <a:endParaRPr lang="en-US" sz="1200" dirty="0"/>
+          </a:p>
+        </p:txBody>
+      </p:sp>
+      <p:sp>
+        <p:nvSpPr>
+          <p:cNvPr id="15" name="Text 13"/>
+          <p:cNvSpPr/>
+          <p:nvPr/>
+        </p:nvSpPr>
+        <p:spPr>
+          <a:xfrm>
+            <a:off x="658368" y="3346704"/>
+            <a:ext cx="3337560" cy="594360"/>
+          </a:xfrm>
+          <a:prstGeom prst="rect">
+            <a:avLst/>
+          </a:prstGeom>
+          <a:noFill/>
+          <a:ln/>
+        </p:spPr>
+        <p:txBody>
+          <a:bodyPr wrap="square" lIns="0" tIns="0" rIns="0" bIns="0" rtlCol="0" anchor="ctr"/>
+          <a:lstStyle/>
+          <a:p>
+            <a:pPr indent="0" marL="0">
+              <a:buNone/>
+            </a:pPr>
+            <a:r>
+              <a:rPr lang="en-US" sz="1050" dirty="0">
                 <a:solidFill>
                   <a:srgbClr val="7A90A8"/>
                 </a:solidFill>
               </a:rPr>
-              <a:t>✗  Debug syntax and boilerplate</a:t>
-            </a:r>
-            <a:endParaRPr lang="en-US" sz="1150" dirty="0"/>
-          </a:p>
-        </p:txBody>
-      </p:sp>
-      <p:sp>
-        <p:nvSpPr>
-          <p:cNvPr id="9" name="Text 7"/>
-          <p:cNvSpPr/>
-          <p:nvPr/>
-        </p:nvSpPr>
-        <p:spPr>
-          <a:xfrm>
-            <a:off x="502920" y="2560320"/>
-            <a:ext cx="3566160" cy="502920"/>
-          </a:xfrm>
-          <a:prstGeom prst="rect">
-            <a:avLst/>
-          </a:prstGeom>
-          <a:noFill/>
-          <a:ln/>
-        </p:spPr>
-        <p:txBody>
-          <a:bodyPr wrap="square" lIns="0" tIns="0" rIns="0" bIns="0" rtlCol="0" anchor="ctr"/>
-          <a:lstStyle/>
-          <a:p>
-            <a:pPr indent="0" marL="0">
-              <a:buNone/>
-            </a:pPr>
-            <a:r>
-              <a:rPr lang="en-US" sz="1150" dirty="0">
+              <a:t>IDE-integrated. Inline suggestions + Copilot Chat. Agentic mode in Copilot Workspace. Supervised by default.</a:t>
+            </a:r>
+            <a:endParaRPr lang="en-US" sz="1050" dirty="0"/>
+          </a:p>
+        </p:txBody>
+      </p:sp>
+      <p:sp>
+        <p:nvSpPr>
+          <p:cNvPr id="16" name="Text 14"/>
+          <p:cNvSpPr/>
+          <p:nvPr/>
+        </p:nvSpPr>
+        <p:spPr>
+          <a:xfrm>
+            <a:off x="384048" y="4407408"/>
+            <a:ext cx="3822192" cy="347472"/>
+          </a:xfrm>
+          <a:prstGeom prst="rect">
+            <a:avLst/>
+          </a:prstGeom>
+          <a:noFill/>
+          <a:ln/>
+        </p:spPr>
+        <p:txBody>
+          <a:bodyPr wrap="square" lIns="0" tIns="0" rIns="0" bIns="0" rtlCol="0" anchor="ctr"/>
+          <a:lstStyle/>
+          <a:p>
+            <a:pPr algn="ctr" indent="0" marL="0">
+              <a:buNone/>
+            </a:pPr>
+            <a:r>
+              <a:rPr lang="en-US" sz="1000" b="1" i="1" dirty="0">
+                <a:solidFill>
+                  <a:srgbClr val="3A7DC9"/>
+                </a:solidFill>
+              </a:rPr>
+              <a:t>Both sit at the supervised agent point — multi-step actions, developer in the loop.</a:t>
+            </a:r>
+            <a:endParaRPr lang="en-US" sz="1000" dirty="0"/>
+          </a:p>
+        </p:txBody>
+      </p:sp>
+      <p:sp>
+        <p:nvSpPr>
+          <p:cNvPr id="17" name="Text 15"/>
+          <p:cNvSpPr/>
+          <p:nvPr/>
+        </p:nvSpPr>
+        <p:spPr>
+          <a:xfrm>
+            <a:off x="4370832" y="2651760"/>
+            <a:ext cx="402336" cy="457200"/>
+          </a:xfrm>
+          <a:prstGeom prst="rect">
+            <a:avLst/>
+          </a:prstGeom>
+          <a:noFill/>
+          <a:ln/>
+        </p:spPr>
+        <p:txBody>
+          <a:bodyPr wrap="square" lIns="0" tIns="0" rIns="0" bIns="0" rtlCol="0" anchor="ctr"/>
+          <a:lstStyle/>
+          <a:p>
+            <a:pPr algn="ctr" indent="0" marL="0">
+              <a:buNone/>
+            </a:pPr>
+            <a:r>
+              <a:rPr lang="en-US" sz="2000" b="1" dirty="0">
                 <a:solidFill>
                   <a:srgbClr val="7A90A8"/>
                 </a:solidFill>
               </a:rPr>
-              <a:t>✗  Context-switch between tasks</a:t>
-            </a:r>
-            <a:endParaRPr lang="en-US" sz="1150" dirty="0"/>
-          </a:p>
-        </p:txBody>
-      </p:sp>
-      <p:sp>
-        <p:nvSpPr>
-          <p:cNvPr id="10" name="Text 8"/>
-          <p:cNvSpPr/>
-          <p:nvPr/>
-        </p:nvSpPr>
-        <p:spPr>
-          <a:xfrm>
-            <a:off x="502920" y="3127248"/>
-            <a:ext cx="3566160" cy="502920"/>
-          </a:xfrm>
-          <a:prstGeom prst="rect">
-            <a:avLst/>
-          </a:prstGeom>
-          <a:noFill/>
-          <a:ln/>
-        </p:spPr>
-        <p:txBody>
-          <a:bodyPr wrap="square" lIns="0" tIns="0" rIns="0" bIns="0" rtlCol="0" anchor="ctr"/>
-          <a:lstStyle/>
-          <a:p>
-            <a:pPr indent="0" marL="0">
-              <a:buNone/>
-            </a:pPr>
-            <a:r>
-              <a:rPr lang="en-US" sz="1150" dirty="0">
-                <a:solidFill>
-                  <a:srgbClr val="7A90A8"/>
-                </a:solidFill>
-              </a:rPr>
-              <a:t>✗  Orchestrate your own workflow step-by-step</a:t>
-            </a:r>
-            <a:endParaRPr lang="en-US" sz="1150" dirty="0"/>
-          </a:p>
-        </p:txBody>
-      </p:sp>
-      <p:sp>
-        <p:nvSpPr>
-          <p:cNvPr id="11" name="Text 9"/>
-          <p:cNvSpPr/>
-          <p:nvPr/>
-        </p:nvSpPr>
-        <p:spPr>
-          <a:xfrm>
-            <a:off x="502920" y="3694176"/>
-            <a:ext cx="3566160" cy="502920"/>
-          </a:xfrm>
-          <a:prstGeom prst="rect">
-            <a:avLst/>
-          </a:prstGeom>
-          <a:noFill/>
-          <a:ln/>
-        </p:spPr>
-        <p:txBody>
-          <a:bodyPr wrap="square" lIns="0" tIns="0" rIns="0" bIns="0" rtlCol="0" anchor="ctr"/>
-          <a:lstStyle/>
-          <a:p>
-            <a:pPr indent="0" marL="0">
-              <a:buNone/>
-            </a:pPr>
-            <a:r>
-              <a:rPr lang="en-US" sz="1150" dirty="0">
-                <a:solidFill>
-                  <a:srgbClr val="7A90A8"/>
-                </a:solidFill>
-              </a:rPr>
-              <a:t>✗  Review your own output before committing</a:t>
-            </a:r>
-            <a:endParaRPr lang="en-US" sz="1150" dirty="0"/>
-          </a:p>
-        </p:txBody>
-      </p:sp>
-      <p:sp>
-        <p:nvSpPr>
-          <p:cNvPr id="12" name="Text 10"/>
-          <p:cNvSpPr/>
-          <p:nvPr/>
-        </p:nvSpPr>
-        <p:spPr>
-          <a:xfrm>
-            <a:off x="4343400" y="2468880"/>
-            <a:ext cx="457200" cy="548640"/>
-          </a:xfrm>
-          <a:prstGeom prst="rect">
-            <a:avLst/>
-          </a:prstGeom>
-          <a:noFill/>
-          <a:ln/>
-        </p:spPr>
-        <p:txBody>
-          <a:bodyPr wrap="square" lIns="0" tIns="0" rIns="0" bIns="0" rtlCol="0" anchor="ctr"/>
-          <a:lstStyle/>
-          <a:p>
-            <a:pPr algn="ctr" indent="0" marL="0">
-              <a:buNone/>
-            </a:pPr>
-            <a:r>
-              <a:rPr lang="en-US" sz="2800" b="1" dirty="0">
-                <a:solidFill>
-                  <a:srgbClr val="3A7DC9"/>
-                </a:solidFill>
-              </a:rPr>
-              <a:t>→</a:t>
-            </a:r>
-            <a:endParaRPr lang="en-US" sz="2800" dirty="0"/>
-          </a:p>
-        </p:txBody>
-      </p:sp>
-      <p:sp>
-        <p:nvSpPr>
-          <p:cNvPr id="13" name="Shape 11"/>
-          <p:cNvSpPr/>
-          <p:nvPr/>
-        </p:nvSpPr>
-        <p:spPr>
-          <a:xfrm>
-            <a:off x="4892040" y="868680"/>
-            <a:ext cx="3931920" cy="4023360"/>
+              <a:t>vs.</a:t>
+            </a:r>
+            <a:endParaRPr lang="en-US" sz="2000" dirty="0"/>
+          </a:p>
+        </p:txBody>
+      </p:sp>
+      <p:sp>
+        <p:nvSpPr>
+          <p:cNvPr id="18" name="Shape 16"/>
+          <p:cNvSpPr/>
+          <p:nvPr/>
+        </p:nvSpPr>
+        <p:spPr>
+          <a:xfrm>
+            <a:off x="4846320" y="1188720"/>
+            <a:ext cx="3977640" cy="3703320"/>
           </a:xfrm>
           <a:prstGeom prst="rect">
             <a:avLst/>
@@ -12215,34 +13898,34 @@
       </p:sp>
       <p:sp>
         <p:nvSpPr>
-          <p:cNvPr id="14" name="Shape 12"/>
-          <p:cNvSpPr/>
-          <p:nvPr/>
-        </p:nvSpPr>
-        <p:spPr>
-          <a:xfrm>
-            <a:off x="4892040" y="868680"/>
-            <a:ext cx="3931920" cy="502920"/>
-          </a:xfrm>
-          <a:prstGeom prst="rect">
-            <a:avLst/>
-          </a:prstGeom>
-          <a:solidFill>
-            <a:srgbClr val="4A7FA8"/>
-          </a:solidFill>
-          <a:ln/>
-        </p:spPr>
-      </p:sp>
-      <p:sp>
-        <p:nvSpPr>
-          <p:cNvPr id="15" name="Text 13"/>
-          <p:cNvSpPr/>
-          <p:nvPr/>
-        </p:nvSpPr>
-        <p:spPr>
-          <a:xfrm>
-            <a:off x="4892040" y="868680"/>
-            <a:ext cx="3931920" cy="502920"/>
+          <p:cNvPr id="19" name="Shape 17"/>
+          <p:cNvSpPr/>
+          <p:nvPr/>
+        </p:nvSpPr>
+        <p:spPr>
+          <a:xfrm>
+            <a:off x="4846320" y="1188720"/>
+            <a:ext cx="3977640" cy="530352"/>
+          </a:xfrm>
+          <a:prstGeom prst="rect">
+            <a:avLst/>
+          </a:prstGeom>
+          <a:solidFill>
+            <a:srgbClr val="000000"/>
+          </a:solidFill>
+          <a:ln/>
+        </p:spPr>
+      </p:sp>
+      <p:sp>
+        <p:nvSpPr>
+          <p:cNvPr id="20" name="Text 18"/>
+          <p:cNvSpPr/>
+          <p:nvPr/>
+        </p:nvSpPr>
+        <p:spPr>
+          <a:xfrm>
+            <a:off x="4846320" y="1188720"/>
+            <a:ext cx="3977640" cy="530352"/>
           </a:xfrm>
           <a:prstGeom prst="rect">
             <a:avLst/>
@@ -12263,7 +13946,7 @@
                   <a:srgbClr val="FFFFFF"/>
                 </a:solidFill>
               </a:rPr>
-              <a:t>AFTER  ·  Agent Era</a:t>
+              <a:t>PRODUCTION AGENTS  ·  OUT OF SCOPE</a:t>
             </a:r>
             <a:endParaRPr lang="en-US" sz="1200" dirty="0"/>
           </a:p>
@@ -12271,181 +13954,273 @@
       </p:sp>
       <p:sp>
         <p:nvSpPr>
-          <p:cNvPr id="16" name="Text 14"/>
-          <p:cNvSpPr/>
-          <p:nvPr/>
-        </p:nvSpPr>
-        <p:spPr>
-          <a:xfrm>
-            <a:off x="5074920" y="1426464"/>
-            <a:ext cx="3566160" cy="502920"/>
-          </a:xfrm>
-          <a:prstGeom prst="rect">
-            <a:avLst/>
-          </a:prstGeom>
-          <a:noFill/>
-          <a:ln/>
-        </p:spPr>
-        <p:txBody>
-          <a:bodyPr wrap="square" lIns="0" tIns="0" rIns="0" bIns="0" rtlCol="0" anchor="ctr"/>
-          <a:lstStyle/>
-          <a:p>
-            <a:pPr indent="0" marL="0">
-              <a:buNone/>
-            </a:pPr>
-            <a:r>
-              <a:rPr lang="en-US" sz="1150" dirty="0">
+          <p:cNvPr id="21" name="Text 19"/>
+          <p:cNvSpPr/>
+          <p:nvPr/>
+        </p:nvSpPr>
+        <p:spPr>
+          <a:xfrm>
+            <a:off x="5010912" y="1810512"/>
+            <a:ext cx="3639312" cy="658368"/>
+          </a:xfrm>
+          <a:prstGeom prst="rect">
+            <a:avLst/>
+          </a:prstGeom>
+          <a:noFill/>
+          <a:ln/>
+        </p:spPr>
+        <p:txBody>
+          <a:bodyPr wrap="square" lIns="0" tIns="0" rIns="0" bIns="0" rtlCol="0" anchor="ctr"/>
+          <a:lstStyle/>
+          <a:p>
+            <a:pPr indent="0" marL="0">
+              <a:buNone/>
+            </a:pPr>
+            <a:r>
+              <a:rPr lang="en-US" sz="1100" dirty="0">
+                <a:solidFill>
+                  <a:srgbClr val="7A90A8"/>
+                </a:solidFill>
+              </a:rPr>
+              <a:t>AI systems that operate as runtime components of your product or platform — customer-facing bots, autonomous workflow automations, orchestration services.</a:t>
+            </a:r>
+            <a:endParaRPr lang="en-US" sz="1100" dirty="0"/>
+          </a:p>
+        </p:txBody>
+      </p:sp>
+      <p:sp>
+        <p:nvSpPr>
+          <p:cNvPr id="22" name="Text 20"/>
+          <p:cNvSpPr/>
+          <p:nvPr/>
+        </p:nvSpPr>
+        <p:spPr>
+          <a:xfrm>
+            <a:off x="5010912" y="2542032"/>
+            <a:ext cx="3639312" cy="256032"/>
+          </a:xfrm>
+          <a:prstGeom prst="rect">
+            <a:avLst/>
+          </a:prstGeom>
+          <a:noFill/>
+          <a:ln/>
+        </p:spPr>
+        <p:txBody>
+          <a:bodyPr wrap="square" lIns="0" tIns="0" rIns="0" bIns="0" rtlCol="0" anchor="ctr"/>
+          <a:lstStyle/>
+          <a:p>
+            <a:pPr indent="0" marL="0">
+              <a:buNone/>
+            </a:pPr>
+            <a:r>
+              <a:rPr lang="en-US" sz="1100" b="1" dirty="0">
+                <a:solidFill>
+                  <a:srgbClr val="1C3557"/>
+                </a:solidFill>
+              </a:rPr>
+              <a:t>Examples:</a:t>
+            </a:r>
+            <a:endParaRPr lang="en-US" sz="1100" dirty="0"/>
+          </a:p>
+        </p:txBody>
+      </p:sp>
+      <p:sp>
+        <p:nvSpPr>
+          <p:cNvPr id="23" name="Text 21"/>
+          <p:cNvSpPr/>
+          <p:nvPr/>
+        </p:nvSpPr>
+        <p:spPr>
+          <a:xfrm>
+            <a:off x="5074920" y="2816352"/>
+            <a:ext cx="3566160" cy="274320"/>
+          </a:xfrm>
+          <a:prstGeom prst="rect">
+            <a:avLst/>
+          </a:prstGeom>
+          <a:noFill/>
+          <a:ln/>
+        </p:spPr>
+        <p:txBody>
+          <a:bodyPr wrap="square" lIns="0" tIns="0" rIns="0" bIns="0" rtlCol="0" anchor="ctr"/>
+          <a:lstStyle/>
+          <a:p>
+            <a:pPr indent="0" marL="0">
+              <a:buNone/>
+            </a:pPr>
+            <a:r>
+              <a:rPr lang="en-US" sz="1100" dirty="0">
                 <a:solidFill>
                   <a:srgbClr val="1E2D3D"/>
                 </a:solidFill>
               </a:rPr>
-              <a:t>✓  Define intent: spec, acceptance criteria, DoD</a:t>
-            </a:r>
-            <a:endParaRPr lang="en-US" sz="1150" dirty="0"/>
-          </a:p>
-        </p:txBody>
-      </p:sp>
-      <p:sp>
-        <p:nvSpPr>
-          <p:cNvPr id="17" name="Text 15"/>
-          <p:cNvSpPr/>
-          <p:nvPr/>
-        </p:nvSpPr>
-        <p:spPr>
-          <a:xfrm>
-            <a:off x="5074920" y="1993392"/>
-            <a:ext cx="3566160" cy="502920"/>
-          </a:xfrm>
-          <a:prstGeom prst="rect">
-            <a:avLst/>
-          </a:prstGeom>
-          <a:noFill/>
-          <a:ln/>
-        </p:spPr>
-        <p:txBody>
-          <a:bodyPr wrap="square" lIns="0" tIns="0" rIns="0" bIns="0" rtlCol="0" anchor="ctr"/>
-          <a:lstStyle/>
-          <a:p>
-            <a:pPr indent="0" marL="0">
-              <a:buNone/>
-            </a:pPr>
-            <a:r>
-              <a:rPr lang="en-US" sz="1150" dirty="0">
+              <a:t>· AWS Bedrock / Amazon Agent Core</a:t>
+            </a:r>
+            <a:endParaRPr lang="en-US" sz="1100" dirty="0"/>
+          </a:p>
+        </p:txBody>
+      </p:sp>
+      <p:sp>
+        <p:nvSpPr>
+          <p:cNvPr id="24" name="Text 22"/>
+          <p:cNvSpPr/>
+          <p:nvPr/>
+        </p:nvSpPr>
+        <p:spPr>
+          <a:xfrm>
+            <a:off x="5074920" y="3136392"/>
+            <a:ext cx="3566160" cy="274320"/>
+          </a:xfrm>
+          <a:prstGeom prst="rect">
+            <a:avLst/>
+          </a:prstGeom>
+          <a:noFill/>
+          <a:ln/>
+        </p:spPr>
+        <p:txBody>
+          <a:bodyPr wrap="square" lIns="0" tIns="0" rIns="0" bIns="0" rtlCol="0" anchor="ctr"/>
+          <a:lstStyle/>
+          <a:p>
+            <a:pPr indent="0" marL="0">
+              <a:buNone/>
+            </a:pPr>
+            <a:r>
+              <a:rPr lang="en-US" sz="1100" dirty="0">
                 <a:solidFill>
                   <a:srgbClr val="1E2D3D"/>
                 </a:solidFill>
               </a:rPr>
-              <a:t>✓  Review and approve agent-generated diffs</a:t>
-            </a:r>
-            <a:endParaRPr lang="en-US" sz="1150" dirty="0"/>
-          </a:p>
-        </p:txBody>
-      </p:sp>
-      <p:sp>
-        <p:nvSpPr>
-          <p:cNvPr id="18" name="Text 16"/>
-          <p:cNvSpPr/>
-          <p:nvPr/>
-        </p:nvSpPr>
-        <p:spPr>
-          <a:xfrm>
-            <a:off x="5074920" y="2560320"/>
-            <a:ext cx="3566160" cy="502920"/>
-          </a:xfrm>
-          <a:prstGeom prst="rect">
-            <a:avLst/>
-          </a:prstGeom>
-          <a:noFill/>
-          <a:ln/>
-        </p:spPr>
-        <p:txBody>
-          <a:bodyPr wrap="square" lIns="0" tIns="0" rIns="0" bIns="0" rtlCol="0" anchor="ctr"/>
-          <a:lstStyle/>
-          <a:p>
-            <a:pPr indent="0" marL="0">
-              <a:buNone/>
-            </a:pPr>
-            <a:r>
-              <a:rPr lang="en-US" sz="1150" dirty="0">
+              <a:t>· Azure AI Foundry agents</a:t>
+            </a:r>
+            <a:endParaRPr lang="en-US" sz="1100" dirty="0"/>
+          </a:p>
+        </p:txBody>
+      </p:sp>
+      <p:sp>
+        <p:nvSpPr>
+          <p:cNvPr id="25" name="Text 23"/>
+          <p:cNvSpPr/>
+          <p:nvPr/>
+        </p:nvSpPr>
+        <p:spPr>
+          <a:xfrm>
+            <a:off x="5074920" y="3456432"/>
+            <a:ext cx="3566160" cy="274320"/>
+          </a:xfrm>
+          <a:prstGeom prst="rect">
+            <a:avLst/>
+          </a:prstGeom>
+          <a:noFill/>
+          <a:ln/>
+        </p:spPr>
+        <p:txBody>
+          <a:bodyPr wrap="square" lIns="0" tIns="0" rIns="0" bIns="0" rtlCol="0" anchor="ctr"/>
+          <a:lstStyle/>
+          <a:p>
+            <a:pPr indent="0" marL="0">
+              <a:buNone/>
+            </a:pPr>
+            <a:r>
+              <a:rPr lang="en-US" sz="1100" dirty="0">
                 <a:solidFill>
                   <a:srgbClr val="1E2D3D"/>
                 </a:solidFill>
               </a:rPr>
-              <a:t>✓  Design agent architecture and tool boundaries</a:t>
-            </a:r>
-            <a:endParaRPr lang="en-US" sz="1150" dirty="0"/>
-          </a:p>
-        </p:txBody>
-      </p:sp>
-      <p:sp>
-        <p:nvSpPr>
-          <p:cNvPr id="19" name="Text 17"/>
-          <p:cNvSpPr/>
-          <p:nvPr/>
-        </p:nvSpPr>
-        <p:spPr>
-          <a:xfrm>
-            <a:off x="5074920" y="3127248"/>
-            <a:ext cx="3566160" cy="502920"/>
-          </a:xfrm>
-          <a:prstGeom prst="rect">
-            <a:avLst/>
-          </a:prstGeom>
-          <a:noFill/>
-          <a:ln/>
-        </p:spPr>
-        <p:txBody>
-          <a:bodyPr wrap="square" lIns="0" tIns="0" rIns="0" bIns="0" rtlCol="0" anchor="ctr"/>
-          <a:lstStyle/>
-          <a:p>
-            <a:pPr indent="0" marL="0">
-              <a:buNone/>
-            </a:pPr>
-            <a:r>
-              <a:rPr lang="en-US" sz="1150" dirty="0">
-                <a:solidFill>
-                  <a:srgbClr val="1E2D3D"/>
-                </a:solidFill>
-              </a:rPr>
-              <a:t>✓  Set oversight gates and HITL checkpoints</a:t>
-            </a:r>
-            <a:endParaRPr lang="en-US" sz="1150" dirty="0"/>
-          </a:p>
-        </p:txBody>
-      </p:sp>
-      <p:sp>
-        <p:nvSpPr>
-          <p:cNvPr id="20" name="Text 18"/>
-          <p:cNvSpPr/>
-          <p:nvPr/>
-        </p:nvSpPr>
-        <p:spPr>
-          <a:xfrm>
-            <a:off x="5074920" y="3694176"/>
-            <a:ext cx="3566160" cy="502920"/>
-          </a:xfrm>
-          <a:prstGeom prst="rect">
-            <a:avLst/>
-          </a:prstGeom>
-          <a:noFill/>
-          <a:ln/>
-        </p:spPr>
-        <p:txBody>
-          <a:bodyPr wrap="square" lIns="0" tIns="0" rIns="0" bIns="0" rtlCol="0" anchor="ctr"/>
-          <a:lstStyle/>
-          <a:p>
-            <a:pPr indent="0" marL="0">
-              <a:buNone/>
-            </a:pPr>
-            <a:r>
-              <a:rPr lang="en-US" sz="1150" dirty="0">
-                <a:solidFill>
-                  <a:srgbClr val="1E2D3D"/>
-                </a:solidFill>
-              </a:rPr>
-              <a:t>✓  Evaluate quality at the system level</a:t>
-            </a:r>
-            <a:endParaRPr lang="en-US" sz="1150" dirty="0"/>
+              <a:t>· Custom LLM orchestration services</a:t>
+            </a:r>
+            <a:endParaRPr lang="en-US" sz="1100" dirty="0"/>
+          </a:p>
+        </p:txBody>
+      </p:sp>
+      <p:sp>
+        <p:nvSpPr>
+          <p:cNvPr id="26" name="Text 24"/>
+          <p:cNvSpPr/>
+          <p:nvPr/>
+        </p:nvSpPr>
+        <p:spPr>
+          <a:xfrm>
+            <a:off x="5010912" y="3840480"/>
+            <a:ext cx="3639312" cy="457200"/>
+          </a:xfrm>
+          <a:prstGeom prst="rect">
+            <a:avLst/>
+          </a:prstGeom>
+          <a:noFill/>
+          <a:ln/>
+        </p:spPr>
+        <p:txBody>
+          <a:bodyPr wrap="square" lIns="0" tIns="0" rIns="0" bIns="0" rtlCol="0" anchor="ctr"/>
+          <a:lstStyle/>
+          <a:p>
+            <a:pPr indent="0" marL="0">
+              <a:buNone/>
+            </a:pPr>
+            <a:r>
+              <a:rPr lang="en-US" sz="1050" i="1" dirty="0">
+                <a:solidFill>
+                  <a:srgbClr val="7A90A8"/>
+                </a:solidFill>
+              </a:rPr>
+              <a:t>Different concerns: runtime reliability, cost at scale, customer data, blast radius in live environments.</a:t>
+            </a:r>
+            <a:endParaRPr lang="en-US" sz="1050" dirty="0"/>
+          </a:p>
+        </p:txBody>
+      </p:sp>
+      <p:sp>
+        <p:nvSpPr>
+          <p:cNvPr id="27" name="Shape 25"/>
+          <p:cNvSpPr/>
+          <p:nvPr/>
+        </p:nvSpPr>
+        <p:spPr>
+          <a:xfrm>
+            <a:off x="4846320" y="4407408"/>
+            <a:ext cx="3977640" cy="347472"/>
+          </a:xfrm>
+          <a:prstGeom prst="rect">
+            <a:avLst/>
+          </a:prstGeom>
+          <a:solidFill>
+            <a:srgbClr val="F3F6F9"/>
+          </a:solidFill>
+          <a:ln/>
+        </p:spPr>
+      </p:sp>
+      <p:sp>
+        <p:nvSpPr>
+          <p:cNvPr id="28" name="Text 26"/>
+          <p:cNvSpPr/>
+          <p:nvPr/>
+        </p:nvSpPr>
+        <p:spPr>
+          <a:xfrm>
+            <a:off x="4846320" y="4407408"/>
+            <a:ext cx="3977640" cy="347472"/>
+          </a:xfrm>
+          <a:prstGeom prst="rect">
+            <a:avLst/>
+          </a:prstGeom>
+          <a:noFill/>
+          <a:ln/>
+        </p:spPr>
+        <p:txBody>
+          <a:bodyPr wrap="square" lIns="0" tIns="0" rIns="0" bIns="0" rtlCol="0" anchor="ctr"/>
+          <a:lstStyle/>
+          <a:p>
+            <a:pPr algn="ctr" indent="0" marL="0">
+              <a:buNone/>
+            </a:pPr>
+            <a:r>
+              <a:rPr lang="en-US" sz="1000" i="1" dirty="0">
+                <a:solidFill>
+                  <a:srgbClr val="000000"/>
+                </a:solidFill>
+              </a:rPr>
+              <a:t>Refer to the Enterprise AI Platform practice for guidance.</a:t>
+            </a:r>
+            <a:endParaRPr lang="en-US" sz="1000" dirty="0"/>
           </a:p>
         </p:txBody>
       </p:sp>

--- a/slides/Module_01_Chat_vs_Agents_v2.pptx
+++ b/slides/Module_01_Chat_vs_Agents_v2.pptx
@@ -4913,7 +4913,7 @@
                   <a:srgbClr val="D4E4F0"/>
                 </a:solidFill>
               </a:rPr>
-              <a:t>Q4.  How does your organisation's risk culture affect where you set your HITL gates?</a:t>
+              <a:t>Q4.  How does your organization's risk culture affect where you set your HITL gates?</a:t>
             </a:r>
             <a:endParaRPr lang="en-US" sz="1150" dirty="0"/>
           </a:p>
@@ -13448,7 +13448,7 @@
                   <a:srgbClr val="FFFFFF"/>
                 </a:solidFill>
               </a:rPr>
-              <a:t>PROGRAMME SCOPE  ·  TWO KINDS OF AGENT</a:t>
+              <a:t>PROGRAM SCOPE  ·  TWO KINDS OF AGENT</a:t>
             </a:r>
             <a:endParaRPr lang="en-US" sz="1300" dirty="0"/>
           </a:p>
